--- a/slides/06-linear-regression.pptx
+++ b/slides/06-linear-regression.pptx
@@ -221,7 +221,7 @@
           <a:p>
             <a:fld id="{A5320152-7289-42ED-97D3-BBB411F9F8C0}" type="datetimeFigureOut">
               <a:rPr lang="en-US" smtClean="0"/>
-              <a:t>8/31/2026</a:t>
+              <a:t>9/22/2026</a:t>
             </a:fld>
             <a:endParaRPr lang="en-US"/>
           </a:p>
@@ -641,7 +641,7 @@
           <a:p>
             <a:fld id="{D1D1EADE-8E88-4C7C-8AC5-FB148DE4940E}" type="datetime1">
               <a:rPr lang="en-US" smtClean="0"/>
-              <a:t>8/31/2026</a:t>
+              <a:t>9/22/2026</a:t>
             </a:fld>
             <a:endParaRPr lang="en-US"/>
           </a:p>
@@ -841,7 +841,7 @@
           <a:p>
             <a:fld id="{EC3C8B9C-477D-492A-96AD-1FC2CC997A73}" type="datetime1">
               <a:rPr lang="en-US" smtClean="0"/>
-              <a:t>8/31/2026</a:t>
+              <a:t>9/22/2026</a:t>
             </a:fld>
             <a:endParaRPr lang="en-US"/>
           </a:p>
@@ -1051,7 +1051,7 @@
           <a:p>
             <a:fld id="{42D3AED5-E26D-4E29-B1B3-7847B6779594}" type="datetime1">
               <a:rPr lang="en-US" smtClean="0"/>
-              <a:t>8/31/2026</a:t>
+              <a:t>9/22/2026</a:t>
             </a:fld>
             <a:endParaRPr lang="en-US"/>
           </a:p>
@@ -1698,7 +1698,7 @@
           <a:p>
             <a:fld id="{157B6794-849E-4626-908B-D15793550EFB}" type="datetime1">
               <a:rPr lang="en-US" smtClean="0"/>
-              <a:t>8/31/2026</a:t>
+              <a:t>9/22/2026</a:t>
             </a:fld>
             <a:endParaRPr lang="en-US"/>
           </a:p>
@@ -1974,7 +1974,7 @@
           <a:p>
             <a:fld id="{63DB64E7-5594-42A3-ADBF-E95A7ACEAD64}" type="datetime1">
               <a:rPr lang="en-US" smtClean="0"/>
-              <a:t>8/31/2026</a:t>
+              <a:t>9/22/2026</a:t>
             </a:fld>
             <a:endParaRPr lang="en-US"/>
           </a:p>
@@ -2247,7 +2247,7 @@
           <a:p>
             <a:fld id="{18462B0B-D248-4FFB-8695-AD7FA4B1284A}" type="datetime1">
               <a:rPr lang="en-US" smtClean="0"/>
-              <a:t>8/31/2026</a:t>
+              <a:t>9/22/2026</a:t>
             </a:fld>
             <a:endParaRPr lang="en-US"/>
           </a:p>
@@ -2670,7 +2670,7 @@
           <a:p>
             <a:fld id="{D0378EFB-9159-4510-B73F-4F0409ADE937}" type="datetime1">
               <a:rPr lang="en-US" smtClean="0"/>
-              <a:t>8/31/2026</a:t>
+              <a:t>9/22/2026</a:t>
             </a:fld>
             <a:endParaRPr lang="en-US"/>
           </a:p>
@@ -2812,7 +2812,7 @@
           <a:p>
             <a:fld id="{89BC9412-2452-4BED-A324-9D8C115361AD}" type="datetime1">
               <a:rPr lang="en-US" smtClean="0"/>
-              <a:t>8/31/2026</a:t>
+              <a:t>9/22/2026</a:t>
             </a:fld>
             <a:endParaRPr lang="en-US"/>
           </a:p>
@@ -2925,7 +2925,7 @@
           <a:p>
             <a:fld id="{F5318F62-D251-40E8-A23C-F4CFE9FEAB41}" type="datetime1">
               <a:rPr lang="en-US" smtClean="0"/>
-              <a:t>8/31/2026</a:t>
+              <a:t>9/22/2026</a:t>
             </a:fld>
             <a:endParaRPr lang="en-US"/>
           </a:p>
@@ -3238,7 +3238,7 @@
           <a:p>
             <a:fld id="{44F76144-149E-4874-93A5-554A0357CF82}" type="datetime1">
               <a:rPr lang="en-US" smtClean="0"/>
-              <a:t>8/31/2026</a:t>
+              <a:t>9/22/2026</a:t>
             </a:fld>
             <a:endParaRPr lang="en-US"/>
           </a:p>
@@ -3531,7 +3531,7 @@
           <a:p>
             <a:fld id="{50BA65D8-0540-4835-AE5C-25D29DBA01BE}" type="datetime1">
               <a:rPr lang="en-US" smtClean="0"/>
-              <a:t>8/31/2026</a:t>
+              <a:t>9/22/2026</a:t>
             </a:fld>
             <a:endParaRPr lang="en-US"/>
           </a:p>
@@ -3773,7 +3773,7 @@
           <a:p>
             <a:fld id="{E31BA835-12AC-4E8F-955A-EA3F4DE2791F}" type="datetime1">
               <a:rPr lang="en-US" smtClean="0"/>
-              <a:t>8/31/2026</a:t>
+              <a:t>9/22/2026</a:t>
             </a:fld>
             <a:endParaRPr lang="en-US"/>
           </a:p>
@@ -6764,8 +6764,8 @@
           </a:p>
         </p:txBody>
       </p:sp>
-      <mc:AlternateContent xmlns:mc="http://schemas.openxmlformats.org/markup-compatibility/2006">
-        <mc:Choice xmlns:a14="http://schemas.microsoft.com/office/drawing/2010/main" Requires="a14">
+      <mc:AlternateContent xmlns:mc="http://schemas.openxmlformats.org/markup-compatibility/2006" xmlns:a14="http://schemas.microsoft.com/office/drawing/2010/main">
+        <mc:Choice Requires="a14">
           <p:sp>
             <p:nvSpPr>
               <p:cNvPr id="203" name="Matrix notation cost function:…"/>
@@ -7237,7 +7237,7 @@
             </p:txBody>
           </p:sp>
         </mc:Choice>
-        <mc:Fallback>
+        <mc:Fallback xmlns="">
           <p:sp>
             <p:nvSpPr>
               <p:cNvPr id="203" name="Matrix notation cost function:…"/>
@@ -7478,8 +7478,17 @@
           <a:p>
             <a:r>
               <a:rPr dirty="0"/>
-              <a:t>Method 2: Gradient Descent</a:t>
-            </a:r>
+              <a:t>Method 2: </a:t>
+            </a:r>
+            <a:r>
+              <a:rPr lang="en-US" dirty="0"/>
+              <a:t>Numerical </a:t>
+            </a:r>
+            <a:r>
+              <a:rPr lang="en-US" dirty="0" err="1"/>
+              <a:t>APproximations</a:t>
+            </a:r>
+            <a:endParaRPr dirty="0"/>
           </a:p>
         </p:txBody>
       </p:sp>
@@ -12468,7 +12477,7 @@
           </a:ln>
           <a:extLst>
             <a:ext uri="{C572A759-6A51-4108-AA02-DFA0A04FC94B}">
-              <ma14:wrappingTextBoxFlag xmlns="" xmlns:m="http://schemas.openxmlformats.org/officeDocument/2006/math" xmlns:a14="http://schemas.microsoft.com/office/drawing/2010/main" xmlns:ma14="http://schemas.microsoft.com/office/mac/drawingml/2011/main" val="1"/>
+              <ma14:wrappingTextBoxFlag xmlns:ma14="http://schemas.microsoft.com/office/mac/drawingml/2011/main" xmlns:a14="http://schemas.microsoft.com/office/drawing/2010/main" xmlns:m="http://schemas.openxmlformats.org/officeDocument/2006/math" xmlns="" val="1"/>
             </a:ext>
           </a:extLst>
         </p:spPr>
@@ -13140,7 +13149,7 @@
           </a:ln>
           <a:extLst>
             <a:ext uri="{C572A759-6A51-4108-AA02-DFA0A04FC94B}">
-              <ma14:wrappingTextBoxFlag xmlns="" xmlns:m="http://schemas.openxmlformats.org/officeDocument/2006/math" xmlns:a14="http://schemas.microsoft.com/office/drawing/2010/main" xmlns:ma14="http://schemas.microsoft.com/office/mac/drawingml/2011/main" val="1"/>
+              <ma14:wrappingTextBoxFlag xmlns:ma14="http://schemas.microsoft.com/office/mac/drawingml/2011/main" xmlns:a14="http://schemas.microsoft.com/office/drawing/2010/main" xmlns:m="http://schemas.openxmlformats.org/officeDocument/2006/math" xmlns="" val="1"/>
             </a:ext>
           </a:extLst>
         </p:spPr>

--- a/slides/06-linear-regression.pptx
+++ b/slides/06-linear-regression.pptx
@@ -5,34 +5,31 @@
     <p:sldMasterId id="2147483686" r:id="rId1"/>
   </p:sldMasterIdLst>
   <p:notesMasterIdLst>
-    <p:notesMasterId r:id="rId27"/>
+    <p:notesMasterId r:id="rId24"/>
   </p:notesMasterIdLst>
   <p:sldIdLst>
     <p:sldId id="256" r:id="rId2"/>
     <p:sldId id="257" r:id="rId3"/>
     <p:sldId id="259" r:id="rId4"/>
-    <p:sldId id="260" r:id="rId5"/>
-    <p:sldId id="301" r:id="rId6"/>
-    <p:sldId id="302" r:id="rId7"/>
-    <p:sldId id="261" r:id="rId8"/>
-    <p:sldId id="262" r:id="rId9"/>
-    <p:sldId id="303" r:id="rId10"/>
-    <p:sldId id="309" r:id="rId11"/>
-    <p:sldId id="304" r:id="rId12"/>
-    <p:sldId id="264" r:id="rId13"/>
-    <p:sldId id="265" r:id="rId14"/>
-    <p:sldId id="289" r:id="rId15"/>
-    <p:sldId id="290" r:id="rId16"/>
-    <p:sldId id="308" r:id="rId17"/>
-    <p:sldId id="291" r:id="rId18"/>
-    <p:sldId id="292" r:id="rId19"/>
-    <p:sldId id="293" r:id="rId20"/>
-    <p:sldId id="294" r:id="rId21"/>
-    <p:sldId id="296" r:id="rId22"/>
-    <p:sldId id="297" r:id="rId23"/>
-    <p:sldId id="307" r:id="rId24"/>
-    <p:sldId id="299" r:id="rId25"/>
-    <p:sldId id="300" r:id="rId26"/>
+    <p:sldId id="261" r:id="rId5"/>
+    <p:sldId id="260" r:id="rId6"/>
+    <p:sldId id="303" r:id="rId7"/>
+    <p:sldId id="309" r:id="rId8"/>
+    <p:sldId id="304" r:id="rId9"/>
+    <p:sldId id="264" r:id="rId10"/>
+    <p:sldId id="265" r:id="rId11"/>
+    <p:sldId id="289" r:id="rId12"/>
+    <p:sldId id="290" r:id="rId13"/>
+    <p:sldId id="308" r:id="rId14"/>
+    <p:sldId id="291" r:id="rId15"/>
+    <p:sldId id="292" r:id="rId16"/>
+    <p:sldId id="293" r:id="rId17"/>
+    <p:sldId id="294" r:id="rId18"/>
+    <p:sldId id="296" r:id="rId19"/>
+    <p:sldId id="297" r:id="rId20"/>
+    <p:sldId id="307" r:id="rId21"/>
+    <p:sldId id="299" r:id="rId22"/>
+    <p:sldId id="300" r:id="rId23"/>
   </p:sldIdLst>
   <p:sldSz cx="12192000" cy="6858000"/>
   <p:notesSz cx="6858000" cy="9144000"/>
@@ -4607,2858 +4604,6 @@
       </p:grpSpPr>
       <p:sp>
         <p:nvSpPr>
-          <p:cNvPr id="2" name="Title 1">
-            <a:extLst>
-              <a:ext uri="{FF2B5EF4-FFF2-40B4-BE49-F238E27FC236}">
-                <a16:creationId xmlns:a16="http://schemas.microsoft.com/office/drawing/2014/main" id="{E032997E-1C3A-7EC4-901A-4E5D547B05AF}"/>
-              </a:ext>
-            </a:extLst>
-          </p:cNvPr>
-          <p:cNvSpPr>
-            <a:spLocks noGrp="1"/>
-          </p:cNvSpPr>
-          <p:nvPr>
-            <p:ph type="title"/>
-          </p:nvPr>
-        </p:nvSpPr>
-        <p:spPr/>
-        <p:txBody>
-          <a:bodyPr>
-            <a:normAutofit fontScale="90000"/>
-          </a:bodyPr>
-          <a:lstStyle/>
-          <a:p>
-            <a:r>
-              <a:rPr lang="en-US" dirty="0"/>
-              <a:t>Typical Forms of linear regression models</a:t>
-            </a:r>
-          </a:p>
-        </p:txBody>
-      </p:sp>
-      <mc:AlternateContent xmlns:mc="http://schemas.openxmlformats.org/markup-compatibility/2006" xmlns:a14="http://schemas.microsoft.com/office/drawing/2010/main">
-        <mc:Choice Requires="a14">
-          <p:sp>
-            <p:nvSpPr>
-              <p:cNvPr id="3" name="Content Placeholder 2">
-                <a:extLst>
-                  <a:ext uri="{FF2B5EF4-FFF2-40B4-BE49-F238E27FC236}">
-                    <a16:creationId xmlns:a16="http://schemas.microsoft.com/office/drawing/2014/main" id="{6291388A-D814-0C2F-9289-708792D4ECBF}"/>
-                  </a:ext>
-                </a:extLst>
-              </p:cNvPr>
-              <p:cNvSpPr>
-                <a:spLocks noGrp="1"/>
-              </p:cNvSpPr>
-              <p:nvPr>
-                <p:ph sz="half" idx="1"/>
-              </p:nvPr>
-            </p:nvSpPr>
-            <p:spPr/>
-            <p:txBody>
-              <a:bodyPr/>
-              <a:lstStyle/>
-              <a:p>
-                <a:pPr marL="0" indent="0">
-                  <a:buNone/>
-                </a:pPr>
-                <a:r>
-                  <a:rPr lang="sv-SE" dirty="0">
-                    <a:latin typeface="Cambria Math" panose="02040503050406030204" pitchFamily="18" charset="0"/>
-                  </a:rPr>
-                  <a:t>Scalar Form</a:t>
-                </a:r>
-              </a:p>
-              <a:p>
-                <a14:m>
-                  <m:oMath xmlns:m="http://schemas.openxmlformats.org/officeDocument/2006/math">
-                    <m:sSub>
-                      <m:sSubPr>
-                        <m:ctrlPr>
-                          <a:rPr lang="sv-SE" i="1" dirty="0" smtClean="0">
-                            <a:latin typeface="Cambria Math" panose="02040503050406030204" pitchFamily="18" charset="0"/>
-                          </a:rPr>
-                        </m:ctrlPr>
-                      </m:sSubPr>
-                      <m:e>
-                        <m:r>
-                          <a:rPr lang="sv-SE" i="1" dirty="0" smtClean="0">
-                            <a:latin typeface="Cambria Math" panose="02040503050406030204" pitchFamily="18" charset="0"/>
-                          </a:rPr>
-                          <m:t>𝑦</m:t>
-                        </m:r>
-                      </m:e>
-                      <m:sub>
-                        <m:r>
-                          <a:rPr lang="sv-SE" i="1" dirty="0" smtClean="0">
-                            <a:latin typeface="Cambria Math" panose="02040503050406030204" pitchFamily="18" charset="0"/>
-                          </a:rPr>
-                          <m:t>𝑖</m:t>
-                        </m:r>
-                      </m:sub>
-                    </m:sSub>
-                    <m:r>
-                      <a:rPr lang="sv-SE" i="1" dirty="0" smtClean="0">
-                        <a:latin typeface="Cambria Math" panose="02040503050406030204" pitchFamily="18" charset="0"/>
-                      </a:rPr>
-                      <m:t>=</m:t>
-                    </m:r>
-                    <m:sSub>
-                      <m:sSubPr>
-                        <m:ctrlPr>
-                          <a:rPr lang="sv-SE" i="1" dirty="0" smtClean="0">
-                            <a:latin typeface="Cambria Math" panose="02040503050406030204" pitchFamily="18" charset="0"/>
-                          </a:rPr>
-                        </m:ctrlPr>
-                      </m:sSubPr>
-                      <m:e>
-                        <m:r>
-                          <a:rPr lang="sv-SE" i="1" dirty="0" smtClean="0">
-                            <a:latin typeface="Cambria Math" panose="02040503050406030204" pitchFamily="18" charset="0"/>
-                          </a:rPr>
-                          <m:t>𝛽</m:t>
-                        </m:r>
-                      </m:e>
-                      <m:sub>
-                        <m:r>
-                          <a:rPr lang="sv-SE" i="1" dirty="0" smtClean="0">
-                            <a:latin typeface="Cambria Math" panose="02040503050406030204" pitchFamily="18" charset="0"/>
-                          </a:rPr>
-                          <m:t>0</m:t>
-                        </m:r>
-                      </m:sub>
-                    </m:sSub>
-                    <m:r>
-                      <a:rPr lang="sv-SE" i="1" dirty="0" smtClean="0">
-                        <a:latin typeface="Cambria Math" panose="02040503050406030204" pitchFamily="18" charset="0"/>
-                      </a:rPr>
-                      <m:t>+</m:t>
-                    </m:r>
-                    <m:nary>
-                      <m:naryPr>
-                        <m:chr m:val="∑"/>
-                        <m:limLoc m:val="undOvr"/>
-                        <m:ctrlPr>
-                          <a:rPr lang="sv-SE" i="1" dirty="0" smtClean="0">
-                            <a:latin typeface="Cambria Math" panose="02040503050406030204" pitchFamily="18" charset="0"/>
-                          </a:rPr>
-                        </m:ctrlPr>
-                      </m:naryPr>
-                      <m:sub>
-                        <m:r>
-                          <a:rPr lang="sv-SE" i="1" dirty="0" smtClean="0">
-                            <a:latin typeface="Cambria Math" panose="02040503050406030204" pitchFamily="18" charset="0"/>
-                          </a:rPr>
-                          <m:t>𝑗</m:t>
-                        </m:r>
-                        <m:r>
-                          <a:rPr lang="sv-SE" i="1" dirty="0" smtClean="0">
-                            <a:latin typeface="Cambria Math" panose="02040503050406030204" pitchFamily="18" charset="0"/>
-                          </a:rPr>
-                          <m:t>=1</m:t>
-                        </m:r>
-                      </m:sub>
-                      <m:sup>
-                        <m:r>
-                          <a:rPr lang="sv-SE" i="1" dirty="0" smtClean="0">
-                            <a:latin typeface="Cambria Math" panose="02040503050406030204" pitchFamily="18" charset="0"/>
-                          </a:rPr>
-                          <m:t>𝑝</m:t>
-                        </m:r>
-                      </m:sup>
-                      <m:e>
-                        <m:sSub>
-                          <m:sSubPr>
-                            <m:ctrlPr>
-                              <a:rPr lang="sv-SE" i="1" dirty="0" smtClean="0">
-                                <a:latin typeface="Cambria Math" panose="02040503050406030204" pitchFamily="18" charset="0"/>
-                              </a:rPr>
-                            </m:ctrlPr>
-                          </m:sSubPr>
-                          <m:e>
-                            <m:r>
-                              <a:rPr lang="sv-SE" i="1" dirty="0" smtClean="0">
-                                <a:latin typeface="Cambria Math" panose="02040503050406030204" pitchFamily="18" charset="0"/>
-                              </a:rPr>
-                              <m:t>𝛽</m:t>
-                            </m:r>
-                          </m:e>
-                          <m:sub>
-                            <m:r>
-                              <a:rPr lang="sv-SE" i="1" dirty="0" smtClean="0">
-                                <a:latin typeface="Cambria Math" panose="02040503050406030204" pitchFamily="18" charset="0"/>
-                              </a:rPr>
-                              <m:t>𝑗</m:t>
-                            </m:r>
-                          </m:sub>
-                        </m:sSub>
-                      </m:e>
-                    </m:nary>
-                    <m:sSub>
-                      <m:sSubPr>
-                        <m:ctrlPr>
-                          <a:rPr lang="sv-SE" i="1" dirty="0" smtClean="0">
-                            <a:latin typeface="Cambria Math" panose="02040503050406030204" pitchFamily="18" charset="0"/>
-                          </a:rPr>
-                        </m:ctrlPr>
-                      </m:sSubPr>
-                      <m:e>
-                        <m:r>
-                          <a:rPr lang="sv-SE" i="1" dirty="0" smtClean="0">
-                            <a:latin typeface="Cambria Math" panose="02040503050406030204" pitchFamily="18" charset="0"/>
-                          </a:rPr>
-                          <m:t>𝑥</m:t>
-                        </m:r>
-                      </m:e>
-                      <m:sub>
-                        <m:r>
-                          <a:rPr lang="sv-SE" i="1" dirty="0" smtClean="0">
-                            <a:latin typeface="Cambria Math" panose="02040503050406030204" pitchFamily="18" charset="0"/>
-                          </a:rPr>
-                          <m:t>𝑖𝑗</m:t>
-                        </m:r>
-                      </m:sub>
-                    </m:sSub>
-                    <m:r>
-                      <a:rPr lang="sv-SE" i="1" dirty="0" smtClean="0">
-                        <a:latin typeface="Cambria Math" panose="02040503050406030204" pitchFamily="18" charset="0"/>
-                      </a:rPr>
-                      <m:t>+</m:t>
-                    </m:r>
-                    <m:sSub>
-                      <m:sSubPr>
-                        <m:ctrlPr>
-                          <a:rPr lang="sv-SE" i="1" dirty="0" smtClean="0">
-                            <a:latin typeface="Cambria Math" panose="02040503050406030204" pitchFamily="18" charset="0"/>
-                          </a:rPr>
-                        </m:ctrlPr>
-                      </m:sSubPr>
-                      <m:e>
-                        <m:r>
-                          <a:rPr lang="sv-SE" i="1" dirty="0" smtClean="0">
-                            <a:latin typeface="Cambria Math" panose="02040503050406030204" pitchFamily="18" charset="0"/>
-                          </a:rPr>
-                          <m:t>𝜀</m:t>
-                        </m:r>
-                      </m:e>
-                      <m:sub>
-                        <m:r>
-                          <a:rPr lang="sv-SE" i="1" dirty="0" smtClean="0">
-                            <a:latin typeface="Cambria Math" panose="02040503050406030204" pitchFamily="18" charset="0"/>
-                          </a:rPr>
-                          <m:t>𝑖</m:t>
-                        </m:r>
-                      </m:sub>
-                    </m:sSub>
-                    <m:r>
-                      <a:rPr lang="sv-SE" i="1" dirty="0" smtClean="0">
-                        <a:latin typeface="Cambria Math" panose="02040503050406030204" pitchFamily="18" charset="0"/>
-                      </a:rPr>
-                      <m:t> </m:t>
-                    </m:r>
-                    <m:r>
-                      <m:rPr>
-                        <m:nor/>
-                      </m:rPr>
-                      <a:rPr lang="sv-SE" i="0" dirty="0" smtClean="0">
-                        <a:latin typeface="Cambria Math" panose="02040503050406030204" pitchFamily="18" charset="0"/>
-                      </a:rPr>
-                      <m:t> for </m:t>
-                    </m:r>
-                    <m:r>
-                      <a:rPr lang="sv-SE" i="1" dirty="0" smtClean="0">
-                        <a:latin typeface="Cambria Math" panose="02040503050406030204" pitchFamily="18" charset="0"/>
-                      </a:rPr>
-                      <m:t>𝑖</m:t>
-                    </m:r>
-                    <m:r>
-                      <a:rPr lang="sv-SE" i="1" dirty="0" smtClean="0">
-                        <a:latin typeface="Cambria Math" panose="02040503050406030204" pitchFamily="18" charset="0"/>
-                      </a:rPr>
-                      <m:t>=1,2,…,</m:t>
-                    </m:r>
-                    <m:r>
-                      <a:rPr lang="sv-SE" i="1" dirty="0" smtClean="0">
-                        <a:latin typeface="Cambria Math" panose="02040503050406030204" pitchFamily="18" charset="0"/>
-                      </a:rPr>
-                      <m:t>𝑛</m:t>
-                    </m:r>
-                  </m:oMath>
-                </a14:m>
-                <a:endParaRPr lang="sv-SE" dirty="0">
-                  <a:latin typeface="Cambria Math" panose="02040503050406030204" pitchFamily="18" charset="0"/>
-                </a:endParaRPr>
-              </a:p>
-            </p:txBody>
-          </p:sp>
-        </mc:Choice>
-        <mc:Fallback xmlns="">
-          <p:sp>
-            <p:nvSpPr>
-              <p:cNvPr id="3" name="Content Placeholder 2">
-                <a:extLst>
-                  <a:ext uri="{FF2B5EF4-FFF2-40B4-BE49-F238E27FC236}">
-                    <a16:creationId xmlns:a16="http://schemas.microsoft.com/office/drawing/2014/main" id="{6291388A-D814-0C2F-9289-708792D4ECBF}"/>
-                  </a:ext>
-                </a:extLst>
-              </p:cNvPr>
-              <p:cNvSpPr>
-                <a:spLocks noGrp="1" noRot="1" noChangeAspect="1" noMove="1" noResize="1" noEditPoints="1" noAdjustHandles="1" noChangeArrowheads="1" noChangeShapeType="1" noTextEdit="1"/>
-              </p:cNvSpPr>
-              <p:nvPr>
-                <p:ph sz="half" idx="1"/>
-              </p:nvPr>
-            </p:nvSpPr>
-            <p:spPr>
-              <a:blipFill>
-                <a:blip r:embed="rId2"/>
-                <a:stretch>
-                  <a:fillRect l="-1287" t="-979" r="-1287"/>
-                </a:stretch>
-              </a:blipFill>
-            </p:spPr>
-            <p:txBody>
-              <a:bodyPr/>
-              <a:lstStyle/>
-              <a:p>
-                <a:r>
-                  <a:rPr lang="en-US">
-                    <a:noFill/>
-                  </a:rPr>
-                  <a:t> </a:t>
-                </a:r>
-              </a:p>
-            </p:txBody>
-          </p:sp>
-        </mc:Fallback>
-      </mc:AlternateContent>
-      <mc:AlternateContent xmlns:mc="http://schemas.openxmlformats.org/markup-compatibility/2006" xmlns:a14="http://schemas.microsoft.com/office/drawing/2010/main">
-        <mc:Choice Requires="a14">
-          <p:sp>
-            <p:nvSpPr>
-              <p:cNvPr id="4" name="Content Placeholder 3">
-                <a:extLst>
-                  <a:ext uri="{FF2B5EF4-FFF2-40B4-BE49-F238E27FC236}">
-                    <a16:creationId xmlns:a16="http://schemas.microsoft.com/office/drawing/2014/main" id="{ED737C0F-8011-2262-F9F9-0E2BB7891DBF}"/>
-                  </a:ext>
-                </a:extLst>
-              </p:cNvPr>
-              <p:cNvSpPr>
-                <a:spLocks noGrp="1"/>
-              </p:cNvSpPr>
-              <p:nvPr>
-                <p:ph sz="half" idx="2"/>
-              </p:nvPr>
-            </p:nvSpPr>
-            <p:spPr/>
-            <p:txBody>
-              <a:bodyPr/>
-              <a:lstStyle/>
-              <a:p>
-                <a:pPr marL="0" indent="0">
-                  <a:buNone/>
-                </a:pPr>
-                <a:r>
-                  <a:rPr lang="en-US" dirty="0">
-                    <a:latin typeface="Cambria Math" panose="02040503050406030204" pitchFamily="18" charset="0"/>
-                  </a:rPr>
-                  <a:t>Matrix Notation</a:t>
-                </a:r>
-              </a:p>
-              <a:p>
-                <a14:m>
-                  <m:oMath xmlns:m="http://schemas.openxmlformats.org/officeDocument/2006/math">
-                    <m:r>
-                      <a:rPr lang="en-US" b="1" i="1" smtClean="0">
-                        <a:latin typeface="Cambria Math" panose="02040503050406030204" pitchFamily="18" charset="0"/>
-                      </a:rPr>
-                      <m:t>𝐲</m:t>
-                    </m:r>
-                    <m:r>
-                      <a:rPr lang="en-US" b="0" i="1">
-                        <a:latin typeface="Cambria Math" panose="02040503050406030204" pitchFamily="18" charset="0"/>
-                      </a:rPr>
-                      <m:t>=</m:t>
-                    </m:r>
-                    <m:r>
-                      <a:rPr lang="en-US" b="1" i="1">
-                        <a:latin typeface="Cambria Math" panose="02040503050406030204" pitchFamily="18" charset="0"/>
-                      </a:rPr>
-                      <m:t>𝐗</m:t>
-                    </m:r>
-                    <m:r>
-                      <a:rPr lang="en-US" b="1" i="1">
-                        <a:latin typeface="Cambria Math" panose="02040503050406030204" pitchFamily="18" charset="0"/>
-                      </a:rPr>
-                      <m:t>𝜷</m:t>
-                    </m:r>
-                    <m:r>
-                      <a:rPr lang="en-US" b="0" i="1">
-                        <a:latin typeface="Cambria Math" panose="02040503050406030204" pitchFamily="18" charset="0"/>
-                      </a:rPr>
-                      <m:t>+</m:t>
-                    </m:r>
-                    <m:r>
-                      <a:rPr lang="en-US" b="1" i="1">
-                        <a:latin typeface="Cambria Math" panose="02040503050406030204" pitchFamily="18" charset="0"/>
-                      </a:rPr>
-                      <m:t>𝜺</m:t>
-                    </m:r>
-                  </m:oMath>
-                </a14:m>
-                <a:endParaRPr lang="en-US" dirty="0"/>
-              </a:p>
-            </p:txBody>
-          </p:sp>
-        </mc:Choice>
-        <mc:Fallback xmlns="">
-          <p:sp>
-            <p:nvSpPr>
-              <p:cNvPr id="4" name="Content Placeholder 3">
-                <a:extLst>
-                  <a:ext uri="{FF2B5EF4-FFF2-40B4-BE49-F238E27FC236}">
-                    <a16:creationId xmlns:a16="http://schemas.microsoft.com/office/drawing/2014/main" id="{ED737C0F-8011-2262-F9F9-0E2BB7891DBF}"/>
-                  </a:ext>
-                </a:extLst>
-              </p:cNvPr>
-              <p:cNvSpPr>
-                <a:spLocks noGrp="1" noRot="1" noChangeAspect="1" noMove="1" noResize="1" noEditPoints="1" noAdjustHandles="1" noChangeArrowheads="1" noChangeShapeType="1" noTextEdit="1"/>
-              </p:cNvSpPr>
-              <p:nvPr>
-                <p:ph sz="half" idx="2"/>
-              </p:nvPr>
-            </p:nvSpPr>
-            <p:spPr>
-              <a:blipFill>
-                <a:blip r:embed="rId3"/>
-                <a:stretch>
-                  <a:fillRect l="-1170" t="-979"/>
-                </a:stretch>
-              </a:blipFill>
-            </p:spPr>
-            <p:txBody>
-              <a:bodyPr/>
-              <a:lstStyle/>
-              <a:p>
-                <a:r>
-                  <a:rPr lang="en-US">
-                    <a:noFill/>
-                  </a:rPr>
-                  <a:t> </a:t>
-                </a:r>
-              </a:p>
-            </p:txBody>
-          </p:sp>
-        </mc:Fallback>
-      </mc:AlternateContent>
-      <p:sp>
-        <p:nvSpPr>
-          <p:cNvPr id="5" name="TextBox 4">
-            <a:extLst>
-              <a:ext uri="{FF2B5EF4-FFF2-40B4-BE49-F238E27FC236}">
-                <a16:creationId xmlns:a16="http://schemas.microsoft.com/office/drawing/2014/main" id="{2571D62C-76C8-0EE0-4753-D2F021ACDA20}"/>
-              </a:ext>
-            </a:extLst>
-          </p:cNvPr>
-          <p:cNvSpPr txBox="1"/>
-          <p:nvPr/>
-        </p:nvSpPr>
-        <p:spPr>
-          <a:xfrm>
-            <a:off x="4373805" y="3594539"/>
-            <a:ext cx="2851037" cy="2308324"/>
-          </a:xfrm>
-          <a:prstGeom prst="rect">
-            <a:avLst/>
-          </a:prstGeom>
-          <a:noFill/>
-        </p:spPr>
-        <p:txBody>
-          <a:bodyPr wrap="none" rtlCol="0">
-            <a:spAutoFit/>
-          </a:bodyPr>
-          <a:lstStyle/>
-          <a:p>
-            <a:r>
-              <a:rPr lang="en-US" b="1" dirty="0"/>
-              <a:t>Assumptions</a:t>
-            </a:r>
-          </a:p>
-          <a:p>
-            <a:pPr marL="285750" indent="-285750">
-              <a:buFont typeface="Arial" panose="020B0604020202020204" pitchFamily="34" charset="0"/>
-              <a:buChar char="•"/>
-            </a:pPr>
-            <a:r>
-              <a:rPr lang="en-US" dirty="0"/>
-              <a:t>Linearity</a:t>
-            </a:r>
-          </a:p>
-          <a:p>
-            <a:pPr marL="285750" indent="-285750">
-              <a:buFont typeface="Arial" panose="020B0604020202020204" pitchFamily="34" charset="0"/>
-              <a:buChar char="•"/>
-            </a:pPr>
-            <a:r>
-              <a:rPr lang="en-US" dirty="0"/>
-              <a:t>Homoscedasticity</a:t>
-            </a:r>
-          </a:p>
-          <a:p>
-            <a:pPr marL="285750" indent="-285750">
-              <a:buFont typeface="Arial" panose="020B0604020202020204" pitchFamily="34" charset="0"/>
-              <a:buChar char="•"/>
-            </a:pPr>
-            <a:r>
-              <a:rPr lang="en-US" dirty="0"/>
-              <a:t>Independence of Errors</a:t>
-            </a:r>
-          </a:p>
-          <a:p>
-            <a:pPr marL="285750" indent="-285750">
-              <a:buFont typeface="Arial" panose="020B0604020202020204" pitchFamily="34" charset="0"/>
-              <a:buChar char="•"/>
-            </a:pPr>
-            <a:r>
-              <a:rPr lang="en-US" dirty="0"/>
-              <a:t>Normal Residuals</a:t>
-            </a:r>
-          </a:p>
-          <a:p>
-            <a:pPr marL="285750" indent="-285750">
-              <a:buFont typeface="Arial" panose="020B0604020202020204" pitchFamily="34" charset="0"/>
-              <a:buChar char="•"/>
-            </a:pPr>
-            <a:r>
-              <a:rPr lang="en-US" dirty="0"/>
-              <a:t>No Multicollinearity</a:t>
-            </a:r>
-          </a:p>
-          <a:p>
-            <a:pPr marL="285750" indent="-285750">
-              <a:buFont typeface="Arial" panose="020B0604020202020204" pitchFamily="34" charset="0"/>
-              <a:buChar char="•"/>
-            </a:pPr>
-            <a:endParaRPr lang="en-US" dirty="0"/>
-          </a:p>
-          <a:p>
-            <a:endParaRPr lang="en-US" b="1" dirty="0"/>
-          </a:p>
-        </p:txBody>
-      </p:sp>
-    </p:spTree>
-    <p:extLst>
-      <p:ext uri="{BB962C8B-B14F-4D97-AF65-F5344CB8AC3E}">
-        <p14:creationId xmlns:p14="http://schemas.microsoft.com/office/powerpoint/2010/main" val="3707712987"/>
-      </p:ext>
-    </p:extLst>
-  </p:cSld>
-  <p:clrMapOvr>
-    <a:masterClrMapping/>
-  </p:clrMapOvr>
-  <p:timing>
-    <p:tnLst>
-      <p:par>
-        <p:cTn id="1" dur="indefinite" restart="never" nodeType="tmRoot">
-          <p:childTnLst>
-            <p:seq concurrent="1" nextAc="seek">
-              <p:cTn id="2" dur="indefinite" nodeType="mainSeq">
-                <p:childTnLst>
-                  <p:par>
-                    <p:cTn id="3" fill="hold">
-                      <p:stCondLst>
-                        <p:cond delay="indefinite"/>
-                      </p:stCondLst>
-                      <p:childTnLst>
-                        <p:par>
-                          <p:cTn id="4" fill="hold">
-                            <p:stCondLst>
-                              <p:cond delay="0"/>
-                            </p:stCondLst>
-                            <p:childTnLst>
-                              <p:par>
-                                <p:cTn id="5" presetID="1" presetClass="entr" presetSubtype="0" fill="hold" grpId="0" nodeType="clickEffect">
-                                  <p:stCondLst>
-                                    <p:cond delay="0"/>
-                                  </p:stCondLst>
-                                  <p:childTnLst>
-                                    <p:set>
-                                      <p:cBhvr>
-                                        <p:cTn id="6" dur="1" fill="hold">
-                                          <p:stCondLst>
-                                            <p:cond delay="0"/>
-                                          </p:stCondLst>
-                                        </p:cTn>
-                                        <p:tgtEl>
-                                          <p:spTgt spid="3">
-                                            <p:txEl>
-                                              <p:pRg st="0" end="0"/>
-                                            </p:txEl>
-                                          </p:spTgt>
-                                        </p:tgtEl>
-                                        <p:attrNameLst>
-                                          <p:attrName>style.visibility</p:attrName>
-                                        </p:attrNameLst>
-                                      </p:cBhvr>
-                                      <p:to>
-                                        <p:strVal val="visible"/>
-                                      </p:to>
-                                    </p:set>
-                                  </p:childTnLst>
-                                </p:cTn>
-                              </p:par>
-                            </p:childTnLst>
-                          </p:cTn>
-                        </p:par>
-                      </p:childTnLst>
-                    </p:cTn>
-                  </p:par>
-                  <p:par>
-                    <p:cTn id="7" fill="hold">
-                      <p:stCondLst>
-                        <p:cond delay="indefinite"/>
-                      </p:stCondLst>
-                      <p:childTnLst>
-                        <p:par>
-                          <p:cTn id="8" fill="hold">
-                            <p:stCondLst>
-                              <p:cond delay="0"/>
-                            </p:stCondLst>
-                            <p:childTnLst>
-                              <p:par>
-                                <p:cTn id="9" presetID="1" presetClass="entr" presetSubtype="0" fill="hold" grpId="0" nodeType="clickEffect">
-                                  <p:stCondLst>
-                                    <p:cond delay="0"/>
-                                  </p:stCondLst>
-                                  <p:childTnLst>
-                                    <p:set>
-                                      <p:cBhvr>
-                                        <p:cTn id="10" dur="1" fill="hold">
-                                          <p:stCondLst>
-                                            <p:cond delay="0"/>
-                                          </p:stCondLst>
-                                        </p:cTn>
-                                        <p:tgtEl>
-                                          <p:spTgt spid="3">
-                                            <p:txEl>
-                                              <p:pRg st="1" end="1"/>
-                                            </p:txEl>
-                                          </p:spTgt>
-                                        </p:tgtEl>
-                                        <p:attrNameLst>
-                                          <p:attrName>style.visibility</p:attrName>
-                                        </p:attrNameLst>
-                                      </p:cBhvr>
-                                      <p:to>
-                                        <p:strVal val="visible"/>
-                                      </p:to>
-                                    </p:set>
-                                  </p:childTnLst>
-                                </p:cTn>
-                              </p:par>
-                            </p:childTnLst>
-                          </p:cTn>
-                        </p:par>
-                      </p:childTnLst>
-                    </p:cTn>
-                  </p:par>
-                  <p:par>
-                    <p:cTn id="11" fill="hold">
-                      <p:stCondLst>
-                        <p:cond delay="indefinite"/>
-                      </p:stCondLst>
-                      <p:childTnLst>
-                        <p:par>
-                          <p:cTn id="12" fill="hold">
-                            <p:stCondLst>
-                              <p:cond delay="0"/>
-                            </p:stCondLst>
-                            <p:childTnLst>
-                              <p:par>
-                                <p:cTn id="13" presetID="1" presetClass="entr" presetSubtype="0" fill="hold" nodeType="clickEffect">
-                                  <p:stCondLst>
-                                    <p:cond delay="0"/>
-                                  </p:stCondLst>
-                                  <p:childTnLst>
-                                    <p:set>
-                                      <p:cBhvr>
-                                        <p:cTn id="14" dur="1" fill="hold">
-                                          <p:stCondLst>
-                                            <p:cond delay="0"/>
-                                          </p:stCondLst>
-                                        </p:cTn>
-                                        <p:tgtEl>
-                                          <p:spTgt spid="4">
-                                            <p:txEl>
-                                              <p:pRg st="0" end="0"/>
-                                            </p:txEl>
-                                          </p:spTgt>
-                                        </p:tgtEl>
-                                        <p:attrNameLst>
-                                          <p:attrName>style.visibility</p:attrName>
-                                        </p:attrNameLst>
-                                      </p:cBhvr>
-                                      <p:to>
-                                        <p:strVal val="visible"/>
-                                      </p:to>
-                                    </p:set>
-                                  </p:childTnLst>
-                                </p:cTn>
-                              </p:par>
-                              <p:par>
-                                <p:cTn id="15" presetID="1" presetClass="entr" presetSubtype="0" fill="hold" nodeType="withEffect">
-                                  <p:stCondLst>
-                                    <p:cond delay="0"/>
-                                  </p:stCondLst>
-                                  <p:childTnLst>
-                                    <p:set>
-                                      <p:cBhvr>
-                                        <p:cTn id="16" dur="1" fill="hold">
-                                          <p:stCondLst>
-                                            <p:cond delay="0"/>
-                                          </p:stCondLst>
-                                        </p:cTn>
-                                        <p:tgtEl>
-                                          <p:spTgt spid="4">
-                                            <p:txEl>
-                                              <p:pRg st="1" end="1"/>
-                                            </p:txEl>
-                                          </p:spTgt>
-                                        </p:tgtEl>
-                                        <p:attrNameLst>
-                                          <p:attrName>style.visibility</p:attrName>
-                                        </p:attrNameLst>
-                                      </p:cBhvr>
-                                      <p:to>
-                                        <p:strVal val="visible"/>
-                                      </p:to>
-                                    </p:set>
-                                  </p:childTnLst>
-                                </p:cTn>
-                              </p:par>
-                            </p:childTnLst>
-                          </p:cTn>
-                        </p:par>
-                      </p:childTnLst>
-                    </p:cTn>
-                  </p:par>
-                  <p:par>
-                    <p:cTn id="17" fill="hold">
-                      <p:stCondLst>
-                        <p:cond delay="indefinite"/>
-                      </p:stCondLst>
-                      <p:childTnLst>
-                        <p:par>
-                          <p:cTn id="18" fill="hold">
-                            <p:stCondLst>
-                              <p:cond delay="0"/>
-                            </p:stCondLst>
-                            <p:childTnLst>
-                              <p:par>
-                                <p:cTn id="19" presetID="1" presetClass="entr" presetSubtype="0" fill="hold" nodeType="clickEffect">
-                                  <p:stCondLst>
-                                    <p:cond delay="0"/>
-                                  </p:stCondLst>
-                                  <p:childTnLst>
-                                    <p:set>
-                                      <p:cBhvr>
-                                        <p:cTn id="20" dur="1" fill="hold">
-                                          <p:stCondLst>
-                                            <p:cond delay="0"/>
-                                          </p:stCondLst>
-                                        </p:cTn>
-                                        <p:tgtEl>
-                                          <p:spTgt spid="5">
-                                            <p:txEl>
-                                              <p:pRg st="0" end="0"/>
-                                            </p:txEl>
-                                          </p:spTgt>
-                                        </p:tgtEl>
-                                        <p:attrNameLst>
-                                          <p:attrName>style.visibility</p:attrName>
-                                        </p:attrNameLst>
-                                      </p:cBhvr>
-                                      <p:to>
-                                        <p:strVal val="visible"/>
-                                      </p:to>
-                                    </p:set>
-                                  </p:childTnLst>
-                                </p:cTn>
-                              </p:par>
-                            </p:childTnLst>
-                          </p:cTn>
-                        </p:par>
-                      </p:childTnLst>
-                    </p:cTn>
-                  </p:par>
-                  <p:par>
-                    <p:cTn id="21" fill="hold">
-                      <p:stCondLst>
-                        <p:cond delay="indefinite"/>
-                      </p:stCondLst>
-                      <p:childTnLst>
-                        <p:par>
-                          <p:cTn id="22" fill="hold">
-                            <p:stCondLst>
-                              <p:cond delay="0"/>
-                            </p:stCondLst>
-                            <p:childTnLst>
-                              <p:par>
-                                <p:cTn id="23" presetID="1" presetClass="entr" presetSubtype="0" fill="hold" nodeType="clickEffect">
-                                  <p:stCondLst>
-                                    <p:cond delay="0"/>
-                                  </p:stCondLst>
-                                  <p:childTnLst>
-                                    <p:set>
-                                      <p:cBhvr>
-                                        <p:cTn id="24" dur="1" fill="hold">
-                                          <p:stCondLst>
-                                            <p:cond delay="0"/>
-                                          </p:stCondLst>
-                                        </p:cTn>
-                                        <p:tgtEl>
-                                          <p:spTgt spid="5">
-                                            <p:txEl>
-                                              <p:pRg st="1" end="1"/>
-                                            </p:txEl>
-                                          </p:spTgt>
-                                        </p:tgtEl>
-                                        <p:attrNameLst>
-                                          <p:attrName>style.visibility</p:attrName>
-                                        </p:attrNameLst>
-                                      </p:cBhvr>
-                                      <p:to>
-                                        <p:strVal val="visible"/>
-                                      </p:to>
-                                    </p:set>
-                                  </p:childTnLst>
-                                </p:cTn>
-                              </p:par>
-                            </p:childTnLst>
-                          </p:cTn>
-                        </p:par>
-                      </p:childTnLst>
-                    </p:cTn>
-                  </p:par>
-                  <p:par>
-                    <p:cTn id="25" fill="hold">
-                      <p:stCondLst>
-                        <p:cond delay="indefinite"/>
-                      </p:stCondLst>
-                      <p:childTnLst>
-                        <p:par>
-                          <p:cTn id="26" fill="hold">
-                            <p:stCondLst>
-                              <p:cond delay="0"/>
-                            </p:stCondLst>
-                            <p:childTnLst>
-                              <p:par>
-                                <p:cTn id="27" presetID="1" presetClass="entr" presetSubtype="0" fill="hold" nodeType="clickEffect">
-                                  <p:stCondLst>
-                                    <p:cond delay="0"/>
-                                  </p:stCondLst>
-                                  <p:childTnLst>
-                                    <p:set>
-                                      <p:cBhvr>
-                                        <p:cTn id="28" dur="1" fill="hold">
-                                          <p:stCondLst>
-                                            <p:cond delay="0"/>
-                                          </p:stCondLst>
-                                        </p:cTn>
-                                        <p:tgtEl>
-                                          <p:spTgt spid="5">
-                                            <p:txEl>
-                                              <p:pRg st="2" end="2"/>
-                                            </p:txEl>
-                                          </p:spTgt>
-                                        </p:tgtEl>
-                                        <p:attrNameLst>
-                                          <p:attrName>style.visibility</p:attrName>
-                                        </p:attrNameLst>
-                                      </p:cBhvr>
-                                      <p:to>
-                                        <p:strVal val="visible"/>
-                                      </p:to>
-                                    </p:set>
-                                  </p:childTnLst>
-                                </p:cTn>
-                              </p:par>
-                            </p:childTnLst>
-                          </p:cTn>
-                        </p:par>
-                      </p:childTnLst>
-                    </p:cTn>
-                  </p:par>
-                  <p:par>
-                    <p:cTn id="29" fill="hold">
-                      <p:stCondLst>
-                        <p:cond delay="indefinite"/>
-                      </p:stCondLst>
-                      <p:childTnLst>
-                        <p:par>
-                          <p:cTn id="30" fill="hold">
-                            <p:stCondLst>
-                              <p:cond delay="0"/>
-                            </p:stCondLst>
-                            <p:childTnLst>
-                              <p:par>
-                                <p:cTn id="31" presetID="1" presetClass="entr" presetSubtype="0" fill="hold" nodeType="clickEffect">
-                                  <p:stCondLst>
-                                    <p:cond delay="0"/>
-                                  </p:stCondLst>
-                                  <p:childTnLst>
-                                    <p:set>
-                                      <p:cBhvr>
-                                        <p:cTn id="32" dur="1" fill="hold">
-                                          <p:stCondLst>
-                                            <p:cond delay="0"/>
-                                          </p:stCondLst>
-                                        </p:cTn>
-                                        <p:tgtEl>
-                                          <p:spTgt spid="5">
-                                            <p:txEl>
-                                              <p:pRg st="3" end="3"/>
-                                            </p:txEl>
-                                          </p:spTgt>
-                                        </p:tgtEl>
-                                        <p:attrNameLst>
-                                          <p:attrName>style.visibility</p:attrName>
-                                        </p:attrNameLst>
-                                      </p:cBhvr>
-                                      <p:to>
-                                        <p:strVal val="visible"/>
-                                      </p:to>
-                                    </p:set>
-                                  </p:childTnLst>
-                                </p:cTn>
-                              </p:par>
-                            </p:childTnLst>
-                          </p:cTn>
-                        </p:par>
-                      </p:childTnLst>
-                    </p:cTn>
-                  </p:par>
-                  <p:par>
-                    <p:cTn id="33" fill="hold">
-                      <p:stCondLst>
-                        <p:cond delay="indefinite"/>
-                      </p:stCondLst>
-                      <p:childTnLst>
-                        <p:par>
-                          <p:cTn id="34" fill="hold">
-                            <p:stCondLst>
-                              <p:cond delay="0"/>
-                            </p:stCondLst>
-                            <p:childTnLst>
-                              <p:par>
-                                <p:cTn id="35" presetID="1" presetClass="entr" presetSubtype="0" fill="hold" nodeType="clickEffect">
-                                  <p:stCondLst>
-                                    <p:cond delay="0"/>
-                                  </p:stCondLst>
-                                  <p:childTnLst>
-                                    <p:set>
-                                      <p:cBhvr>
-                                        <p:cTn id="36" dur="1" fill="hold">
-                                          <p:stCondLst>
-                                            <p:cond delay="0"/>
-                                          </p:stCondLst>
-                                        </p:cTn>
-                                        <p:tgtEl>
-                                          <p:spTgt spid="5">
-                                            <p:txEl>
-                                              <p:pRg st="4" end="4"/>
-                                            </p:txEl>
-                                          </p:spTgt>
-                                        </p:tgtEl>
-                                        <p:attrNameLst>
-                                          <p:attrName>style.visibility</p:attrName>
-                                        </p:attrNameLst>
-                                      </p:cBhvr>
-                                      <p:to>
-                                        <p:strVal val="visible"/>
-                                      </p:to>
-                                    </p:set>
-                                  </p:childTnLst>
-                                </p:cTn>
-                              </p:par>
-                            </p:childTnLst>
-                          </p:cTn>
-                        </p:par>
-                      </p:childTnLst>
-                    </p:cTn>
-                  </p:par>
-                  <p:par>
-                    <p:cTn id="37" fill="hold">
-                      <p:stCondLst>
-                        <p:cond delay="indefinite"/>
-                      </p:stCondLst>
-                      <p:childTnLst>
-                        <p:par>
-                          <p:cTn id="38" fill="hold">
-                            <p:stCondLst>
-                              <p:cond delay="0"/>
-                            </p:stCondLst>
-                            <p:childTnLst>
-                              <p:par>
-                                <p:cTn id="39" presetID="1" presetClass="entr" presetSubtype="0" fill="hold" nodeType="clickEffect">
-                                  <p:stCondLst>
-                                    <p:cond delay="0"/>
-                                  </p:stCondLst>
-                                  <p:childTnLst>
-                                    <p:set>
-                                      <p:cBhvr>
-                                        <p:cTn id="40" dur="1" fill="hold">
-                                          <p:stCondLst>
-                                            <p:cond delay="0"/>
-                                          </p:stCondLst>
-                                        </p:cTn>
-                                        <p:tgtEl>
-                                          <p:spTgt spid="5">
-                                            <p:txEl>
-                                              <p:pRg st="5" end="5"/>
-                                            </p:txEl>
-                                          </p:spTgt>
-                                        </p:tgtEl>
-                                        <p:attrNameLst>
-                                          <p:attrName>style.visibility</p:attrName>
-                                        </p:attrNameLst>
-                                      </p:cBhvr>
-                                      <p:to>
-                                        <p:strVal val="visible"/>
-                                      </p:to>
-                                    </p:set>
-                                  </p:childTnLst>
-                                </p:cTn>
-                              </p:par>
-                            </p:childTnLst>
-                          </p:cTn>
-                        </p:par>
-                      </p:childTnLst>
-                    </p:cTn>
-                  </p:par>
-                </p:childTnLst>
-              </p:cTn>
-              <p:prevCondLst>
-                <p:cond evt="onPrev" delay="0">
-                  <p:tgtEl>
-                    <p:sldTgt/>
-                  </p:tgtEl>
-                </p:cond>
-              </p:prevCondLst>
-              <p:nextCondLst>
-                <p:cond evt="onNext" delay="0">
-                  <p:tgtEl>
-                    <p:sldTgt/>
-                  </p:tgtEl>
-                </p:cond>
-              </p:nextCondLst>
-            </p:seq>
-          </p:childTnLst>
-        </p:cTn>
-      </p:par>
-    </p:tnLst>
-    <p:bldLst>
-      <p:bldP spid="3" grpId="0" build="p"/>
-    </p:bldLst>
-  </p:timing>
-</p:sld>
-</file>
-
-<file path=ppt/slides/slide11.xml><?xml version="1.0" encoding="utf-8"?>
-<p:sld xmlns:a="http://schemas.openxmlformats.org/drawingml/2006/main" xmlns:r="http://schemas.openxmlformats.org/officeDocument/2006/relationships" xmlns:p="http://schemas.openxmlformats.org/presentationml/2006/main">
-  <p:cSld>
-    <p:spTree>
-      <p:nvGrpSpPr>
-        <p:cNvPr id="1" name=""/>
-        <p:cNvGrpSpPr/>
-        <p:nvPr/>
-      </p:nvGrpSpPr>
-      <p:grpSpPr>
-        <a:xfrm>
-          <a:off x="0" y="0"/>
-          <a:ext cx="0" cy="0"/>
-          <a:chOff x="0" y="0"/>
-          <a:chExt cx="0" cy="0"/>
-        </a:xfrm>
-      </p:grpSpPr>
-      <p:sp>
-        <p:nvSpPr>
-          <p:cNvPr id="2" name="Title 1">
-            <a:extLst>
-              <a:ext uri="{FF2B5EF4-FFF2-40B4-BE49-F238E27FC236}">
-                <a16:creationId xmlns:a16="http://schemas.microsoft.com/office/drawing/2014/main" id="{CA172A30-A5E5-419A-C060-ACFA4DC7E9BD}"/>
-              </a:ext>
-            </a:extLst>
-          </p:cNvPr>
-          <p:cNvSpPr>
-            <a:spLocks noGrp="1"/>
-          </p:cNvSpPr>
-          <p:nvPr>
-            <p:ph type="title"/>
-          </p:nvPr>
-        </p:nvSpPr>
-        <p:spPr/>
-        <p:txBody>
-          <a:bodyPr/>
-          <a:lstStyle/>
-          <a:p>
-            <a:r>
-              <a:rPr lang="en-US" dirty="0"/>
-              <a:t>Ordinary least squares objective</a:t>
-            </a:r>
-          </a:p>
-        </p:txBody>
-      </p:sp>
-      <mc:AlternateContent xmlns:mc="http://schemas.openxmlformats.org/markup-compatibility/2006" xmlns:a14="http://schemas.microsoft.com/office/drawing/2010/main">
-        <mc:Choice Requires="a14">
-          <p:sp>
-            <p:nvSpPr>
-              <p:cNvPr id="3" name="Content Placeholder 2">
-                <a:extLst>
-                  <a:ext uri="{FF2B5EF4-FFF2-40B4-BE49-F238E27FC236}">
-                    <a16:creationId xmlns:a16="http://schemas.microsoft.com/office/drawing/2014/main" id="{F2AC4BA7-6E27-AC88-A788-092EA31ACEA5}"/>
-                  </a:ext>
-                </a:extLst>
-              </p:cNvPr>
-              <p:cNvSpPr>
-                <a:spLocks noGrp="1"/>
-              </p:cNvSpPr>
-              <p:nvPr>
-                <p:ph sz="half" idx="1"/>
-              </p:nvPr>
-            </p:nvSpPr>
-            <p:spPr/>
-            <p:txBody>
-              <a:bodyPr/>
-              <a:lstStyle/>
-              <a:p>
-                <a:r>
-                  <a:rPr lang="en-US" dirty="0"/>
-                  <a:t>What does it mean to “fit” a line to data?</a:t>
-                </a:r>
-              </a:p>
-              <a:p>
-                <a:r>
-                  <a:rPr lang="en-US" dirty="0"/>
-                  <a:t>How do we measure goodness?</a:t>
-                </a:r>
-              </a:p>
-              <a:p>
-                <a:r>
-                  <a:rPr lang="en-US" dirty="0"/>
-                  <a:t>We want </a:t>
-                </a:r>
-                <a14:m>
-                  <m:oMath xmlns:m="http://schemas.openxmlformats.org/officeDocument/2006/math">
-                    <m:r>
-                      <a:rPr lang="en-US" i="1" dirty="0">
-                        <a:latin typeface="Cambria Math" panose="02040503050406030204" pitchFamily="18" charset="0"/>
-                      </a:rPr>
-                      <m:t>𝑦</m:t>
-                    </m:r>
-                    <m:r>
-                      <a:rPr lang="en-US" i="1" dirty="0">
-                        <a:latin typeface="Cambria Math" panose="02040503050406030204" pitchFamily="18" charset="0"/>
-                      </a:rPr>
-                      <m:t>−</m:t>
-                    </m:r>
-                    <m:acc>
-                      <m:accPr>
-                        <m:chr m:val="̂"/>
-                        <m:ctrlPr>
-                          <a:rPr lang="en-US" i="1" dirty="0">
-                            <a:latin typeface="Cambria Math" panose="02040503050406030204" pitchFamily="18" charset="0"/>
-                          </a:rPr>
-                        </m:ctrlPr>
-                      </m:accPr>
-                      <m:e>
-                        <m:r>
-                          <a:rPr lang="en-US" i="1" dirty="0">
-                            <a:latin typeface="Cambria Math" panose="02040503050406030204" pitchFamily="18" charset="0"/>
-                          </a:rPr>
-                          <m:t>𝑦</m:t>
-                        </m:r>
-                      </m:e>
-                    </m:acc>
-                  </m:oMath>
-                </a14:m>
-                <a:r>
-                  <a:rPr lang="en-US" dirty="0"/>
-                  <a:t> to be </a:t>
-                </a:r>
-                <a:r>
-                  <a:rPr lang="en-US" i="1" dirty="0"/>
-                  <a:t>small.</a:t>
-                </a:r>
-                <a:endParaRPr lang="en-US" dirty="0"/>
-              </a:p>
-              <a:p>
-                <a:r>
-                  <a:rPr lang="en-US" dirty="0"/>
-                  <a:t>Why use </a:t>
-                </a:r>
-                <a14:m>
-                  <m:oMath xmlns:m="http://schemas.openxmlformats.org/officeDocument/2006/math">
-                    <m:sSup>
-                      <m:sSupPr>
-                        <m:ctrlPr>
-                          <a:rPr lang="en-US" i="1" dirty="0" smtClean="0">
-                            <a:latin typeface="Cambria Math" panose="02040503050406030204" pitchFamily="18" charset="0"/>
-                          </a:rPr>
-                        </m:ctrlPr>
-                      </m:sSupPr>
-                      <m:e>
-                        <m:d>
-                          <m:dPr>
-                            <m:ctrlPr>
-                              <a:rPr lang="en-US" i="1" dirty="0" smtClean="0">
-                                <a:latin typeface="Cambria Math" panose="02040503050406030204" pitchFamily="18" charset="0"/>
-                              </a:rPr>
-                            </m:ctrlPr>
-                          </m:dPr>
-                          <m:e>
-                            <m:r>
-                              <a:rPr lang="en-US" i="1" dirty="0" smtClean="0">
-                                <a:latin typeface="Cambria Math" panose="02040503050406030204" pitchFamily="18" charset="0"/>
-                              </a:rPr>
-                              <m:t>𝑦</m:t>
-                            </m:r>
-                            <m:r>
-                              <a:rPr lang="en-US" i="1" dirty="0" smtClean="0">
-                                <a:latin typeface="Cambria Math" panose="02040503050406030204" pitchFamily="18" charset="0"/>
-                              </a:rPr>
-                              <m:t>−</m:t>
-                            </m:r>
-                            <m:acc>
-                              <m:accPr>
-                                <m:chr m:val="̂"/>
-                                <m:ctrlPr>
-                                  <a:rPr lang="en-US" i="1" dirty="0" smtClean="0">
-                                    <a:latin typeface="Cambria Math" panose="02040503050406030204" pitchFamily="18" charset="0"/>
-                                  </a:rPr>
-                                </m:ctrlPr>
-                              </m:accPr>
-                              <m:e>
-                                <m:r>
-                                  <a:rPr lang="en-US" i="1" dirty="0" smtClean="0">
-                                    <a:latin typeface="Cambria Math" panose="02040503050406030204" pitchFamily="18" charset="0"/>
-                                  </a:rPr>
-                                  <m:t>𝑦</m:t>
-                                </m:r>
-                              </m:e>
-                            </m:acc>
-                          </m:e>
-                        </m:d>
-                      </m:e>
-                      <m:sup>
-                        <m:r>
-                          <a:rPr lang="en-US" i="1" dirty="0" smtClean="0">
-                            <a:latin typeface="Cambria Math" panose="02040503050406030204" pitchFamily="18" charset="0"/>
-                          </a:rPr>
-                          <m:t>2</m:t>
-                        </m:r>
-                      </m:sup>
-                    </m:sSup>
-                  </m:oMath>
-                </a14:m>
-                <a:r>
-                  <a:rPr lang="en-US" dirty="0"/>
-                  <a:t>and not </a:t>
-                </a:r>
-                <a14:m>
-                  <m:oMath xmlns:m="http://schemas.openxmlformats.org/officeDocument/2006/math">
-                    <m:d>
-                      <m:dPr>
-                        <m:begChr m:val="|"/>
-                        <m:endChr m:val="|"/>
-                        <m:ctrlPr>
-                          <a:rPr lang="en-US" i="1" dirty="0" smtClean="0">
-                            <a:latin typeface="Cambria Math" panose="02040503050406030204" pitchFamily="18" charset="0"/>
-                          </a:rPr>
-                        </m:ctrlPr>
-                      </m:dPr>
-                      <m:e>
-                        <m:r>
-                          <a:rPr lang="en-US" i="1" dirty="0" smtClean="0">
-                            <a:latin typeface="Cambria Math" panose="02040503050406030204" pitchFamily="18" charset="0"/>
-                          </a:rPr>
-                          <m:t>𝑦</m:t>
-                        </m:r>
-                        <m:r>
-                          <a:rPr lang="en-US" i="1" dirty="0" smtClean="0">
-                            <a:latin typeface="Cambria Math" panose="02040503050406030204" pitchFamily="18" charset="0"/>
-                          </a:rPr>
-                          <m:t>−</m:t>
-                        </m:r>
-                        <m:acc>
-                          <m:accPr>
-                            <m:chr m:val="̂"/>
-                            <m:ctrlPr>
-                              <a:rPr lang="en-US" i="1" dirty="0" smtClean="0">
-                                <a:latin typeface="Cambria Math" panose="02040503050406030204" pitchFamily="18" charset="0"/>
-                              </a:rPr>
-                            </m:ctrlPr>
-                          </m:accPr>
-                          <m:e>
-                            <m:r>
-                              <a:rPr lang="en-US" i="1" dirty="0" smtClean="0">
-                                <a:latin typeface="Cambria Math" panose="02040503050406030204" pitchFamily="18" charset="0"/>
-                              </a:rPr>
-                              <m:t>𝑦</m:t>
-                            </m:r>
-                          </m:e>
-                        </m:acc>
-                      </m:e>
-                    </m:d>
-                  </m:oMath>
-                </a14:m>
-                <a:r>
-                  <a:rPr lang="en-US" dirty="0"/>
-                  <a:t> ?</a:t>
-                </a:r>
-              </a:p>
-              <a:p>
-                <a:r>
-                  <a:rPr lang="en-US" dirty="0"/>
-                  <a:t>The objective function:</a:t>
-                </a:r>
-              </a:p>
-            </p:txBody>
-          </p:sp>
-        </mc:Choice>
-        <mc:Fallback xmlns="">
-          <p:sp>
-            <p:nvSpPr>
-              <p:cNvPr id="3" name="Content Placeholder 2">
-                <a:extLst>
-                  <a:ext uri="{FF2B5EF4-FFF2-40B4-BE49-F238E27FC236}">
-                    <a16:creationId xmlns:a16="http://schemas.microsoft.com/office/drawing/2014/main" id="{F2AC4BA7-6E27-AC88-A788-092EA31ACEA5}"/>
-                  </a:ext>
-                </a:extLst>
-              </p:cNvPr>
-              <p:cNvSpPr>
-                <a:spLocks noGrp="1" noRot="1" noChangeAspect="1" noMove="1" noResize="1" noEditPoints="1" noAdjustHandles="1" noChangeArrowheads="1" noChangeShapeType="1" noTextEdit="1"/>
-              </p:cNvSpPr>
-              <p:nvPr>
-                <p:ph sz="half" idx="1"/>
-              </p:nvPr>
-            </p:nvSpPr>
-            <p:spPr>
-              <a:blipFill>
-                <a:blip r:embed="rId2"/>
-                <a:stretch>
-                  <a:fillRect l="-1053" t="-816"/>
-                </a:stretch>
-              </a:blipFill>
-            </p:spPr>
-            <p:txBody>
-              <a:bodyPr/>
-              <a:lstStyle/>
-              <a:p>
-                <a:r>
-                  <a:rPr lang="en-US">
-                    <a:noFill/>
-                  </a:rPr>
-                  <a:t> </a:t>
-                </a:r>
-              </a:p>
-            </p:txBody>
-          </p:sp>
-        </mc:Fallback>
-      </mc:AlternateContent>
-      <mc:AlternateContent xmlns:mc="http://schemas.openxmlformats.org/markup-compatibility/2006" xmlns:a14="http://schemas.microsoft.com/office/drawing/2010/main">
-        <mc:Choice Requires="a14">
-          <p:sp>
-            <p:nvSpPr>
-              <p:cNvPr id="4" name="Content Placeholder 3">
-                <a:extLst>
-                  <a:ext uri="{FF2B5EF4-FFF2-40B4-BE49-F238E27FC236}">
-                    <a16:creationId xmlns:a16="http://schemas.microsoft.com/office/drawing/2014/main" id="{6F31E7A9-AAC2-3CC2-FD66-B09452EF6F3A}"/>
-                  </a:ext>
-                </a:extLst>
-              </p:cNvPr>
-              <p:cNvSpPr>
-                <a:spLocks noGrp="1"/>
-              </p:cNvSpPr>
-              <p:nvPr>
-                <p:ph sz="half" idx="2"/>
-              </p:nvPr>
-            </p:nvSpPr>
-            <p:spPr/>
-            <p:txBody>
-              <a:bodyPr/>
-              <a:lstStyle/>
-              <a:p>
-                <a:r>
-                  <a:rPr lang="en-US" dirty="0"/>
-                  <a:t>We want  </a:t>
-                </a:r>
-                <a14:m>
-                  <m:oMath xmlns:m="http://schemas.openxmlformats.org/officeDocument/2006/math">
-                    <m:acc>
-                      <m:accPr>
-                        <m:chr m:val="̂"/>
-                        <m:ctrlPr>
-                          <a:rPr lang="en-US" b="0" i="1" smtClean="0">
-                            <a:latin typeface="Cambria Math" panose="02040503050406030204" pitchFamily="18" charset="0"/>
-                          </a:rPr>
-                        </m:ctrlPr>
-                      </m:accPr>
-                      <m:e>
-                        <m:r>
-                          <a:rPr lang="en-US" b="0" i="1" smtClean="0">
-                            <a:latin typeface="Cambria Math" panose="02040503050406030204" pitchFamily="18" charset="0"/>
-                          </a:rPr>
-                          <m:t>𝑦</m:t>
-                        </m:r>
-                      </m:e>
-                    </m:acc>
-                    <m:r>
-                      <a:rPr lang="en-US" b="0" i="1" smtClean="0">
-                        <a:latin typeface="Cambria Math" panose="02040503050406030204" pitchFamily="18" charset="0"/>
-                      </a:rPr>
-                      <m:t>=</m:t>
-                    </m:r>
-                    <m:r>
-                      <a:rPr lang="en-US" b="0" i="1" smtClean="0">
-                        <a:latin typeface="Cambria Math" panose="02040503050406030204" pitchFamily="18" charset="0"/>
-                      </a:rPr>
-                      <m:t>𝑋</m:t>
-                    </m:r>
-                    <m:r>
-                      <a:rPr lang="en-US" b="0" i="1" smtClean="0">
-                        <a:latin typeface="Cambria Math" panose="02040503050406030204" pitchFamily="18" charset="0"/>
-                      </a:rPr>
-                      <m:t>𝛽</m:t>
-                    </m:r>
-                  </m:oMath>
-                </a14:m>
-                <a:r>
-                  <a:rPr lang="en-US" dirty="0"/>
-                  <a:t> to be a </a:t>
-                </a:r>
-                <a:r>
-                  <a:rPr lang="en-US" i="1" dirty="0"/>
-                  <a:t>good</a:t>
-                </a:r>
-                <a:r>
-                  <a:rPr lang="en-US" dirty="0"/>
-                  <a:t> approximation.</a:t>
-                </a:r>
-              </a:p>
-              <a:p>
-                <a:r>
-                  <a:rPr lang="en-US" dirty="0"/>
-                  <a:t>Differentiability/punishing larger errors.</a:t>
-                </a:r>
-              </a:p>
-            </p:txBody>
-          </p:sp>
-        </mc:Choice>
-        <mc:Fallback xmlns="">
-          <p:sp>
-            <p:nvSpPr>
-              <p:cNvPr id="4" name="Content Placeholder 3">
-                <a:extLst>
-                  <a:ext uri="{FF2B5EF4-FFF2-40B4-BE49-F238E27FC236}">
-                    <a16:creationId xmlns:a16="http://schemas.microsoft.com/office/drawing/2014/main" id="{6F31E7A9-AAC2-3CC2-FD66-B09452EF6F3A}"/>
-                  </a:ext>
-                </a:extLst>
-              </p:cNvPr>
-              <p:cNvSpPr>
-                <a:spLocks noGrp="1" noRot="1" noChangeAspect="1" noMove="1" noResize="1" noEditPoints="1" noAdjustHandles="1" noChangeArrowheads="1" noChangeShapeType="1" noTextEdit="1"/>
-              </p:cNvSpPr>
-              <p:nvPr>
-                <p:ph sz="half" idx="2"/>
-              </p:nvPr>
-            </p:nvSpPr>
-            <p:spPr>
-              <a:blipFill>
-                <a:blip r:embed="rId3"/>
-                <a:stretch>
-                  <a:fillRect l="-1053" t="-816"/>
-                </a:stretch>
-              </a:blipFill>
-            </p:spPr>
-            <p:txBody>
-              <a:bodyPr/>
-              <a:lstStyle/>
-              <a:p>
-                <a:r>
-                  <a:rPr lang="en-US">
-                    <a:noFill/>
-                  </a:rPr>
-                  <a:t> </a:t>
-                </a:r>
-              </a:p>
-            </p:txBody>
-          </p:sp>
-        </mc:Fallback>
-      </mc:AlternateContent>
-      <mc:AlternateContent xmlns:mc="http://schemas.openxmlformats.org/markup-compatibility/2006" xmlns:a14="http://schemas.microsoft.com/office/drawing/2010/main">
-        <mc:Choice Requires="a14">
-          <p:sp>
-            <p:nvSpPr>
-              <p:cNvPr id="8" name="TextBox 7">
-                <a:extLst>
-                  <a:ext uri="{FF2B5EF4-FFF2-40B4-BE49-F238E27FC236}">
-                    <a16:creationId xmlns:a16="http://schemas.microsoft.com/office/drawing/2014/main" id="{D4A754CF-C3FE-6DEE-57BA-C1A4427C4C64}"/>
-                  </a:ext>
-                </a:extLst>
-              </p:cNvPr>
-              <p:cNvSpPr txBox="1"/>
-              <p:nvPr/>
-            </p:nvSpPr>
-            <p:spPr>
-              <a:xfrm>
-                <a:off x="2751964" y="4453129"/>
-                <a:ext cx="6096762" cy="612732"/>
-              </a:xfrm>
-              <a:prstGeom prst="rect">
-                <a:avLst/>
-              </a:prstGeom>
-              <a:noFill/>
-            </p:spPr>
-            <p:txBody>
-              <a:bodyPr wrap="square">
-                <a:spAutoFit/>
-              </a:bodyPr>
-              <a:lstStyle/>
-              <a:p>
-                <a:pPr/>
-                <a14:m>
-                  <m:oMathPara xmlns:m="http://schemas.openxmlformats.org/officeDocument/2006/math">
-                    <m:oMath>
-                      <m:r>
-                        <a:rPr lang="fr-FR" i="1" dirty="0" smtClean="0">
-                          <a:latin typeface="Cambria Math" panose="02040503050406030204" pitchFamily="18" charset="0"/>
-                        </a:rPr>
-                        <m:t>𝐽</m:t>
-                      </m:r>
-                      <m:d>
-                        <m:dPr>
-                          <m:ctrlPr>
-                            <a:rPr lang="fr-FR" i="1" dirty="0" smtClean="0">
-                              <a:latin typeface="Cambria Math" panose="02040503050406030204" pitchFamily="18" charset="0"/>
-                            </a:rPr>
-                          </m:ctrlPr>
-                        </m:dPr>
-                        <m:e>
-                          <m:r>
-                            <a:rPr lang="fr-FR" i="1" dirty="0" smtClean="0">
-                              <a:latin typeface="Cambria Math" panose="02040503050406030204" pitchFamily="18" charset="0"/>
-                            </a:rPr>
-                            <m:t>𝛽</m:t>
-                          </m:r>
-                        </m:e>
-                      </m:d>
-                      <m:r>
-                        <a:rPr lang="fr-FR" i="1" dirty="0" smtClean="0">
-                          <a:latin typeface="Cambria Math" panose="02040503050406030204" pitchFamily="18" charset="0"/>
-                        </a:rPr>
-                        <m:t>=</m:t>
-                      </m:r>
-                      <m:f>
-                        <m:fPr>
-                          <m:ctrlPr>
-                            <a:rPr lang="fr-FR" i="1" dirty="0" smtClean="0">
-                              <a:latin typeface="Cambria Math" panose="02040503050406030204" pitchFamily="18" charset="0"/>
-                            </a:rPr>
-                          </m:ctrlPr>
-                        </m:fPr>
-                        <m:num>
-                          <m:r>
-                            <a:rPr lang="fr-FR" i="1" dirty="0" smtClean="0">
-                              <a:latin typeface="Cambria Math" panose="02040503050406030204" pitchFamily="18" charset="0"/>
-                            </a:rPr>
-                            <m:t>1</m:t>
-                          </m:r>
-                        </m:num>
-                        <m:den>
-                          <m:r>
-                            <a:rPr lang="fr-FR" i="1" dirty="0" smtClean="0">
-                              <a:latin typeface="Cambria Math" panose="02040503050406030204" pitchFamily="18" charset="0"/>
-                            </a:rPr>
-                            <m:t>2</m:t>
-                          </m:r>
-                          <m:r>
-                            <a:rPr lang="fr-FR" i="1" dirty="0" smtClean="0">
-                              <a:latin typeface="Cambria Math" panose="02040503050406030204" pitchFamily="18" charset="0"/>
-                            </a:rPr>
-                            <m:t>𝑛</m:t>
-                          </m:r>
-                        </m:den>
-                      </m:f>
-                      <m:r>
-                        <a:rPr lang="fr-FR" i="1" dirty="0" smtClean="0">
-                          <a:latin typeface="Cambria Math" panose="02040503050406030204" pitchFamily="18" charset="0"/>
-                        </a:rPr>
-                        <m:t>​</m:t>
-                      </m:r>
-                      <m:sSup>
-                        <m:sSupPr>
-                          <m:ctrlPr>
-                            <a:rPr lang="fr-FR" i="1" dirty="0" smtClean="0">
-                              <a:latin typeface="Cambria Math" panose="02040503050406030204" pitchFamily="18" charset="0"/>
-                            </a:rPr>
-                          </m:ctrlPr>
-                        </m:sSupPr>
-                        <m:e>
-                          <m:d>
-                            <m:dPr>
-                              <m:ctrlPr>
-                                <a:rPr lang="fr-FR" i="1" dirty="0" smtClean="0">
-                                  <a:latin typeface="Cambria Math" panose="02040503050406030204" pitchFamily="18" charset="0"/>
-                                </a:rPr>
-                              </m:ctrlPr>
-                            </m:dPr>
-                            <m:e>
-                              <m:r>
-                                <a:rPr lang="fr-FR" i="1" dirty="0" smtClean="0">
-                                  <a:latin typeface="Cambria Math" panose="02040503050406030204" pitchFamily="18" charset="0"/>
-                                </a:rPr>
-                                <m:t>𝑦</m:t>
-                              </m:r>
-                              <m:r>
-                                <a:rPr lang="fr-FR" i="1" dirty="0" smtClean="0">
-                                  <a:latin typeface="Cambria Math" panose="02040503050406030204" pitchFamily="18" charset="0"/>
-                                </a:rPr>
-                                <m:t>−</m:t>
-                              </m:r>
-                              <m:r>
-                                <a:rPr lang="fr-FR" i="1" dirty="0" smtClean="0">
-                                  <a:latin typeface="Cambria Math" panose="02040503050406030204" pitchFamily="18" charset="0"/>
-                                </a:rPr>
-                                <m:t>𝑋</m:t>
-                              </m:r>
-                              <m:r>
-                                <a:rPr lang="fr-FR" i="1" dirty="0" smtClean="0">
-                                  <a:latin typeface="Cambria Math" panose="02040503050406030204" pitchFamily="18" charset="0"/>
-                                </a:rPr>
-                                <m:t>𝛽</m:t>
-                              </m:r>
-                            </m:e>
-                          </m:d>
-                        </m:e>
-                        <m:sup>
-                          <m:r>
-                            <a:rPr lang="fr-FR" i="1" dirty="0" smtClean="0">
-                              <a:latin typeface="Cambria Math" panose="02040503050406030204" pitchFamily="18" charset="0"/>
-                            </a:rPr>
-                            <m:t>𝑇</m:t>
-                          </m:r>
-                        </m:sup>
-                      </m:sSup>
-                      <m:d>
-                        <m:dPr>
-                          <m:ctrlPr>
-                            <a:rPr lang="fr-FR" i="1" dirty="0" smtClean="0">
-                              <a:latin typeface="Cambria Math" panose="02040503050406030204" pitchFamily="18" charset="0"/>
-                            </a:rPr>
-                          </m:ctrlPr>
-                        </m:dPr>
-                        <m:e>
-                          <m:r>
-                            <a:rPr lang="fr-FR" i="1" dirty="0" smtClean="0">
-                              <a:latin typeface="Cambria Math" panose="02040503050406030204" pitchFamily="18" charset="0"/>
-                            </a:rPr>
-                            <m:t>𝑦</m:t>
-                          </m:r>
-                          <m:r>
-                            <a:rPr lang="fr-FR" i="1" dirty="0" smtClean="0">
-                              <a:latin typeface="Cambria Math" panose="02040503050406030204" pitchFamily="18" charset="0"/>
-                            </a:rPr>
-                            <m:t>−</m:t>
-                          </m:r>
-                          <m:r>
-                            <a:rPr lang="fr-FR" i="1" dirty="0" smtClean="0">
-                              <a:latin typeface="Cambria Math" panose="02040503050406030204" pitchFamily="18" charset="0"/>
-                            </a:rPr>
-                            <m:t>𝑋</m:t>
-                          </m:r>
-                          <m:r>
-                            <a:rPr lang="fr-FR" i="1" dirty="0" smtClean="0">
-                              <a:latin typeface="Cambria Math" panose="02040503050406030204" pitchFamily="18" charset="0"/>
-                            </a:rPr>
-                            <m:t>𝛽</m:t>
-                          </m:r>
-                        </m:e>
-                      </m:d>
-                    </m:oMath>
-                  </m:oMathPara>
-                </a14:m>
-                <a:endParaRPr/>
-              </a:p>
-            </p:txBody>
-          </p:sp>
-        </mc:Choice>
-        <mc:Fallback xmlns="">
-          <p:sp>
-            <p:nvSpPr>
-              <p:cNvPr id="8" name="TextBox 7">
-                <a:extLst>
-                  <a:ext uri="{FF2B5EF4-FFF2-40B4-BE49-F238E27FC236}">
-                    <a16:creationId xmlns:a16="http://schemas.microsoft.com/office/drawing/2014/main" id="{D4A754CF-C3FE-6DEE-57BA-C1A4427C4C64}"/>
-                  </a:ext>
-                </a:extLst>
-              </p:cNvPr>
-              <p:cNvSpPr txBox="1">
-                <a:spLocks noRot="1" noChangeAspect="1" noMove="1" noResize="1" noEditPoints="1" noAdjustHandles="1" noChangeArrowheads="1" noChangeShapeType="1" noTextEdit="1"/>
-              </p:cNvSpPr>
-              <p:nvPr/>
-            </p:nvSpPr>
-            <p:spPr>
-              <a:xfrm>
-                <a:off x="2751964" y="4453129"/>
-                <a:ext cx="6096762" cy="612732"/>
-              </a:xfrm>
-              <a:prstGeom prst="rect">
-                <a:avLst/>
-              </a:prstGeom>
-              <a:blipFill>
-                <a:blip r:embed="rId4"/>
-                <a:stretch>
-                  <a:fillRect/>
-                </a:stretch>
-              </a:blipFill>
-            </p:spPr>
-            <p:txBody>
-              <a:bodyPr/>
-              <a:lstStyle/>
-              <a:p>
-                <a:r>
-                  <a:rPr lang="en-US">
-                    <a:noFill/>
-                  </a:rPr>
-                  <a:t> </a:t>
-                </a:r>
-              </a:p>
-            </p:txBody>
-          </p:sp>
-        </mc:Fallback>
-      </mc:AlternateContent>
-    </p:spTree>
-    <p:extLst>
-      <p:ext uri="{BB962C8B-B14F-4D97-AF65-F5344CB8AC3E}">
-        <p14:creationId xmlns:p14="http://schemas.microsoft.com/office/powerpoint/2010/main" val="1375252611"/>
-      </p:ext>
-    </p:extLst>
-  </p:cSld>
-  <p:clrMapOvr>
-    <a:masterClrMapping/>
-  </p:clrMapOvr>
-  <p:timing>
-    <p:tnLst>
-      <p:par>
-        <p:cTn id="1" dur="indefinite" restart="never" nodeType="tmRoot">
-          <p:childTnLst>
-            <p:seq concurrent="1" nextAc="seek">
-              <p:cTn id="2" dur="indefinite" nodeType="mainSeq">
-                <p:childTnLst>
-                  <p:par>
-                    <p:cTn id="3" fill="hold">
-                      <p:stCondLst>
-                        <p:cond delay="indefinite"/>
-                      </p:stCondLst>
-                      <p:childTnLst>
-                        <p:par>
-                          <p:cTn id="4" fill="hold">
-                            <p:stCondLst>
-                              <p:cond delay="0"/>
-                            </p:stCondLst>
-                            <p:childTnLst>
-                              <p:par>
-                                <p:cTn id="5" presetID="1" presetClass="entr" presetSubtype="0" fill="hold" nodeType="clickEffect">
-                                  <p:stCondLst>
-                                    <p:cond delay="0"/>
-                                  </p:stCondLst>
-                                  <p:childTnLst>
-                                    <p:set>
-                                      <p:cBhvr>
-                                        <p:cTn id="6" dur="1" fill="hold">
-                                          <p:stCondLst>
-                                            <p:cond delay="0"/>
-                                          </p:stCondLst>
-                                        </p:cTn>
-                                        <p:tgtEl>
-                                          <p:spTgt spid="4">
-                                            <p:txEl>
-                                              <p:pRg st="0" end="0"/>
-                                            </p:txEl>
-                                          </p:spTgt>
-                                        </p:tgtEl>
-                                        <p:attrNameLst>
-                                          <p:attrName>style.visibility</p:attrName>
-                                        </p:attrNameLst>
-                                      </p:cBhvr>
-                                      <p:to>
-                                        <p:strVal val="visible"/>
-                                      </p:to>
-                                    </p:set>
-                                  </p:childTnLst>
-                                </p:cTn>
-                              </p:par>
-                            </p:childTnLst>
-                          </p:cTn>
-                        </p:par>
-                      </p:childTnLst>
-                    </p:cTn>
-                  </p:par>
-                  <p:par>
-                    <p:cTn id="7" fill="hold">
-                      <p:stCondLst>
-                        <p:cond delay="indefinite"/>
-                      </p:stCondLst>
-                      <p:childTnLst>
-                        <p:par>
-                          <p:cTn id="8" fill="hold">
-                            <p:stCondLst>
-                              <p:cond delay="0"/>
-                            </p:stCondLst>
-                            <p:childTnLst>
-                              <p:par>
-                                <p:cTn id="9" presetID="1" presetClass="entr" presetSubtype="0" fill="hold" nodeType="clickEffect">
-                                  <p:stCondLst>
-                                    <p:cond delay="0"/>
-                                  </p:stCondLst>
-                                  <p:childTnLst>
-                                    <p:set>
-                                      <p:cBhvr>
-                                        <p:cTn id="10" dur="1" fill="hold">
-                                          <p:stCondLst>
-                                            <p:cond delay="0"/>
-                                          </p:stCondLst>
-                                        </p:cTn>
-                                        <p:tgtEl>
-                                          <p:spTgt spid="3">
-                                            <p:txEl>
-                                              <p:pRg st="1" end="1"/>
-                                            </p:txEl>
-                                          </p:spTgt>
-                                        </p:tgtEl>
-                                        <p:attrNameLst>
-                                          <p:attrName>style.visibility</p:attrName>
-                                        </p:attrNameLst>
-                                      </p:cBhvr>
-                                      <p:to>
-                                        <p:strVal val="visible"/>
-                                      </p:to>
-                                    </p:set>
-                                  </p:childTnLst>
-                                </p:cTn>
-                              </p:par>
-                            </p:childTnLst>
-                          </p:cTn>
-                        </p:par>
-                      </p:childTnLst>
-                    </p:cTn>
-                  </p:par>
-                  <p:par>
-                    <p:cTn id="11" fill="hold">
-                      <p:stCondLst>
-                        <p:cond delay="indefinite"/>
-                      </p:stCondLst>
-                      <p:childTnLst>
-                        <p:par>
-                          <p:cTn id="12" fill="hold">
-                            <p:stCondLst>
-                              <p:cond delay="0"/>
-                            </p:stCondLst>
-                            <p:childTnLst>
-                              <p:par>
-                                <p:cTn id="13" presetID="1" presetClass="entr" presetSubtype="0" fill="hold" nodeType="clickEffect">
-                                  <p:stCondLst>
-                                    <p:cond delay="0"/>
-                                  </p:stCondLst>
-                                  <p:childTnLst>
-                                    <p:set>
-                                      <p:cBhvr>
-                                        <p:cTn id="14" dur="1" fill="hold">
-                                          <p:stCondLst>
-                                            <p:cond delay="0"/>
-                                          </p:stCondLst>
-                                        </p:cTn>
-                                        <p:tgtEl>
-                                          <p:spTgt spid="3">
-                                            <p:txEl>
-                                              <p:pRg st="2" end="2"/>
-                                            </p:txEl>
-                                          </p:spTgt>
-                                        </p:tgtEl>
-                                        <p:attrNameLst>
-                                          <p:attrName>style.visibility</p:attrName>
-                                        </p:attrNameLst>
-                                      </p:cBhvr>
-                                      <p:to>
-                                        <p:strVal val="visible"/>
-                                      </p:to>
-                                    </p:set>
-                                  </p:childTnLst>
-                                </p:cTn>
-                              </p:par>
-                            </p:childTnLst>
-                          </p:cTn>
-                        </p:par>
-                      </p:childTnLst>
-                    </p:cTn>
-                  </p:par>
-                  <p:par>
-                    <p:cTn id="15" fill="hold">
-                      <p:stCondLst>
-                        <p:cond delay="indefinite"/>
-                      </p:stCondLst>
-                      <p:childTnLst>
-                        <p:par>
-                          <p:cTn id="16" fill="hold">
-                            <p:stCondLst>
-                              <p:cond delay="0"/>
-                            </p:stCondLst>
-                            <p:childTnLst>
-                              <p:par>
-                                <p:cTn id="17" presetID="1" presetClass="entr" presetSubtype="0" fill="hold" nodeType="clickEffect">
-                                  <p:stCondLst>
-                                    <p:cond delay="0"/>
-                                  </p:stCondLst>
-                                  <p:childTnLst>
-                                    <p:set>
-                                      <p:cBhvr>
-                                        <p:cTn id="18" dur="1" fill="hold">
-                                          <p:stCondLst>
-                                            <p:cond delay="0"/>
-                                          </p:stCondLst>
-                                        </p:cTn>
-                                        <p:tgtEl>
-                                          <p:spTgt spid="3">
-                                            <p:txEl>
-                                              <p:pRg st="3" end="3"/>
-                                            </p:txEl>
-                                          </p:spTgt>
-                                        </p:tgtEl>
-                                        <p:attrNameLst>
-                                          <p:attrName>style.visibility</p:attrName>
-                                        </p:attrNameLst>
-                                      </p:cBhvr>
-                                      <p:to>
-                                        <p:strVal val="visible"/>
-                                      </p:to>
-                                    </p:set>
-                                  </p:childTnLst>
-                                </p:cTn>
-                              </p:par>
-                            </p:childTnLst>
-                          </p:cTn>
-                        </p:par>
-                      </p:childTnLst>
-                    </p:cTn>
-                  </p:par>
-                  <p:par>
-                    <p:cTn id="19" fill="hold">
-                      <p:stCondLst>
-                        <p:cond delay="indefinite"/>
-                      </p:stCondLst>
-                      <p:childTnLst>
-                        <p:par>
-                          <p:cTn id="20" fill="hold">
-                            <p:stCondLst>
-                              <p:cond delay="0"/>
-                            </p:stCondLst>
-                            <p:childTnLst>
-                              <p:par>
-                                <p:cTn id="21" presetID="1" presetClass="entr" presetSubtype="0" fill="hold" nodeType="clickEffect">
-                                  <p:stCondLst>
-                                    <p:cond delay="0"/>
-                                  </p:stCondLst>
-                                  <p:childTnLst>
-                                    <p:set>
-                                      <p:cBhvr>
-                                        <p:cTn id="22" dur="1" fill="hold">
-                                          <p:stCondLst>
-                                            <p:cond delay="0"/>
-                                          </p:stCondLst>
-                                        </p:cTn>
-                                        <p:tgtEl>
-                                          <p:spTgt spid="3">
-                                            <p:txEl>
-                                              <p:pRg st="4" end="4"/>
-                                            </p:txEl>
-                                          </p:spTgt>
-                                        </p:tgtEl>
-                                        <p:attrNameLst>
-                                          <p:attrName>style.visibility</p:attrName>
-                                        </p:attrNameLst>
-                                      </p:cBhvr>
-                                      <p:to>
-                                        <p:strVal val="visible"/>
-                                      </p:to>
-                                    </p:set>
-                                  </p:childTnLst>
-                                </p:cTn>
-                              </p:par>
-                            </p:childTnLst>
-                          </p:cTn>
-                        </p:par>
-                      </p:childTnLst>
-                    </p:cTn>
-                  </p:par>
-                  <p:par>
-                    <p:cTn id="23" fill="hold">
-                      <p:stCondLst>
-                        <p:cond delay="indefinite"/>
-                      </p:stCondLst>
-                      <p:childTnLst>
-                        <p:par>
-                          <p:cTn id="24" fill="hold">
-                            <p:stCondLst>
-                              <p:cond delay="0"/>
-                            </p:stCondLst>
-                            <p:childTnLst>
-                              <p:par>
-                                <p:cTn id="25" presetID="1" presetClass="entr" presetSubtype="0" fill="hold" nodeType="clickEffect">
-                                  <p:stCondLst>
-                                    <p:cond delay="0"/>
-                                  </p:stCondLst>
-                                  <p:childTnLst>
-                                    <p:set>
-                                      <p:cBhvr>
-                                        <p:cTn id="26" dur="1" fill="hold">
-                                          <p:stCondLst>
-                                            <p:cond delay="0"/>
-                                          </p:stCondLst>
-                                        </p:cTn>
-                                        <p:tgtEl>
-                                          <p:spTgt spid="4">
-                                            <p:txEl>
-                                              <p:pRg st="1" end="1"/>
-                                            </p:txEl>
-                                          </p:spTgt>
-                                        </p:tgtEl>
-                                        <p:attrNameLst>
-                                          <p:attrName>style.visibility</p:attrName>
-                                        </p:attrNameLst>
-                                      </p:cBhvr>
-                                      <p:to>
-                                        <p:strVal val="visible"/>
-                                      </p:to>
-                                    </p:set>
-                                  </p:childTnLst>
-                                </p:cTn>
-                              </p:par>
-                            </p:childTnLst>
-                          </p:cTn>
-                        </p:par>
-                      </p:childTnLst>
-                    </p:cTn>
-                  </p:par>
-                  <p:par>
-                    <p:cTn id="27" fill="hold">
-                      <p:stCondLst>
-                        <p:cond delay="indefinite"/>
-                      </p:stCondLst>
-                      <p:childTnLst>
-                        <p:par>
-                          <p:cTn id="28" fill="hold">
-                            <p:stCondLst>
-                              <p:cond delay="0"/>
-                            </p:stCondLst>
-                            <p:childTnLst>
-                              <p:par>
-                                <p:cTn id="29" presetID="1" presetClass="entr" presetSubtype="0" fill="hold" grpId="0" nodeType="clickEffect">
-                                  <p:stCondLst>
-                                    <p:cond delay="0"/>
-                                  </p:stCondLst>
-                                  <p:childTnLst>
-                                    <p:set>
-                                      <p:cBhvr>
-                                        <p:cTn id="30" dur="1" fill="hold">
-                                          <p:stCondLst>
-                                            <p:cond delay="0"/>
-                                          </p:stCondLst>
-                                        </p:cTn>
-                                        <p:tgtEl>
-                                          <p:spTgt spid="8"/>
-                                        </p:tgtEl>
-                                        <p:attrNameLst>
-                                          <p:attrName>style.visibility</p:attrName>
-                                        </p:attrNameLst>
-                                      </p:cBhvr>
-                                      <p:to>
-                                        <p:strVal val="visible"/>
-                                      </p:to>
-                                    </p:set>
-                                  </p:childTnLst>
-                                </p:cTn>
-                              </p:par>
-                            </p:childTnLst>
-                          </p:cTn>
-                        </p:par>
-                      </p:childTnLst>
-                    </p:cTn>
-                  </p:par>
-                </p:childTnLst>
-              </p:cTn>
-              <p:prevCondLst>
-                <p:cond evt="onPrev" delay="0">
-                  <p:tgtEl>
-                    <p:sldTgt/>
-                  </p:tgtEl>
-                </p:cond>
-              </p:prevCondLst>
-              <p:nextCondLst>
-                <p:cond evt="onNext" delay="0">
-                  <p:tgtEl>
-                    <p:sldTgt/>
-                  </p:tgtEl>
-                </p:cond>
-              </p:nextCondLst>
-            </p:seq>
-          </p:childTnLst>
-        </p:cTn>
-      </p:par>
-    </p:tnLst>
-    <p:bldLst>
-      <p:bldP spid="8" grpId="0"/>
-    </p:bldLst>
-  </p:timing>
-</p:sld>
-</file>
-
-<file path=ppt/slides/slide12.xml><?xml version="1.0" encoding="utf-8"?>
-<p:sld xmlns:a="http://schemas.openxmlformats.org/drawingml/2006/main" xmlns:r="http://schemas.openxmlformats.org/officeDocument/2006/relationships" xmlns:p="http://schemas.openxmlformats.org/presentationml/2006/main">
-  <p:cSld>
-    <p:spTree>
-      <p:nvGrpSpPr>
-        <p:cNvPr id="1" name=""/>
-        <p:cNvGrpSpPr/>
-        <p:nvPr/>
-      </p:nvGrpSpPr>
-      <p:grpSpPr>
-        <a:xfrm>
-          <a:off x="0" y="0"/>
-          <a:ext cx="0" cy="0"/>
-          <a:chOff x="0" y="0"/>
-          <a:chExt cx="0" cy="0"/>
-        </a:xfrm>
-      </p:grpSpPr>
-      <p:sp>
-        <p:nvSpPr>
-          <p:cNvPr id="202" name="Method 1: Normal Equations"/>
-          <p:cNvSpPr txBox="1">
-            <a:spLocks noGrp="1"/>
-          </p:cNvSpPr>
-          <p:nvPr>
-            <p:ph type="title"/>
-          </p:nvPr>
-        </p:nvSpPr>
-        <p:spPr>
-          <a:prstGeom prst="rect">
-            <a:avLst/>
-          </a:prstGeom>
-        </p:spPr>
-        <p:txBody>
-          <a:bodyPr/>
-          <a:lstStyle/>
-          <a:p>
-            <a:r>
-              <a:rPr dirty="0"/>
-              <a:t>Method 1: Normal Equations </a:t>
-            </a:r>
-          </a:p>
-        </p:txBody>
-      </p:sp>
-      <mc:AlternateContent xmlns:mc="http://schemas.openxmlformats.org/markup-compatibility/2006" xmlns:a14="http://schemas.microsoft.com/office/drawing/2010/main">
-        <mc:Choice Requires="a14">
-          <p:sp>
-            <p:nvSpPr>
-              <p:cNvPr id="203" name="Matrix notation cost function:…"/>
-              <p:cNvSpPr txBox="1">
-                <a:spLocks noGrp="1"/>
-              </p:cNvSpPr>
-              <p:nvPr>
-                <p:ph type="body" idx="1"/>
-              </p:nvPr>
-            </p:nvSpPr>
-            <p:spPr>
-              <a:prstGeom prst="rect">
-                <a:avLst/>
-              </a:prstGeom>
-            </p:spPr>
-            <p:txBody>
-              <a:bodyPr>
-                <a:normAutofit/>
-              </a:bodyPr>
-              <a:lstStyle/>
-              <a:p>
-                <a:pPr marL="169658" indent="-169658" defTabSz="135123">
-                  <a:spcBef>
-                    <a:spcPts val="1758"/>
-                  </a:spcBef>
-                  <a:defRPr sz="2128"/>
-                </a:pPr>
-                <a:r>
-                  <a:rPr dirty="0"/>
-                  <a:t>Matrix notation cost function:</a:t>
-                </a:r>
-                <a:br>
-                  <a:rPr dirty="0"/>
-                </a:br>
-                <a14:m>
-                  <m:oMath xmlns:m="http://schemas.openxmlformats.org/officeDocument/2006/math">
-                    <m:r>
-                      <a:rPr sz="1828" i="1">
-                        <a:solidFill>
-                          <a:srgbClr val="52575F"/>
-                        </a:solidFill>
-                        <a:latin typeface="Cambria Math" panose="02040503050406030204" pitchFamily="18" charset="0"/>
-                      </a:rPr>
-                      <m:t>𝐽</m:t>
-                    </m:r>
-                    <m:r>
-                      <a:rPr sz="1828" i="1">
-                        <a:solidFill>
-                          <a:srgbClr val="52575F"/>
-                        </a:solidFill>
-                        <a:latin typeface="Cambria Math" panose="02040503050406030204" pitchFamily="18" charset="0"/>
-                      </a:rPr>
-                      <m:t>(</m:t>
-                    </m:r>
-                    <m:r>
-                      <a:rPr sz="1828" i="1">
-                        <a:solidFill>
-                          <a:srgbClr val="52575F"/>
-                        </a:solidFill>
-                        <a:latin typeface="Cambria Math" panose="02040503050406030204" pitchFamily="18" charset="0"/>
-                      </a:rPr>
-                      <m:t>𝛽</m:t>
-                    </m:r>
-                    <m:r>
-                      <a:rPr sz="1828" i="1">
-                        <a:solidFill>
-                          <a:srgbClr val="52575F"/>
-                        </a:solidFill>
-                        <a:latin typeface="Cambria Math" panose="02040503050406030204" pitchFamily="18" charset="0"/>
-                      </a:rPr>
-                      <m:t>)=</m:t>
-                    </m:r>
-                    <m:f>
-                      <m:fPr>
-                        <m:ctrlPr>
-                          <a:rPr sz="1828" i="1">
-                            <a:solidFill>
-                              <a:srgbClr val="52575F"/>
-                            </a:solidFill>
-                            <a:latin typeface="Cambria Math" panose="02040503050406030204" pitchFamily="18" charset="0"/>
-                          </a:rPr>
-                        </m:ctrlPr>
-                      </m:fPr>
-                      <m:num>
-                        <m:r>
-                          <a:rPr sz="1828" i="1">
-                            <a:solidFill>
-                              <a:srgbClr val="52575F"/>
-                            </a:solidFill>
-                            <a:latin typeface="Cambria Math" panose="02040503050406030204" pitchFamily="18" charset="0"/>
-                          </a:rPr>
-                          <m:t>1</m:t>
-                        </m:r>
-                      </m:num>
-                      <m:den>
-                        <m:r>
-                          <a:rPr sz="1828" i="1">
-                            <a:solidFill>
-                              <a:srgbClr val="52575F"/>
-                            </a:solidFill>
-                            <a:latin typeface="Cambria Math" panose="02040503050406030204" pitchFamily="18" charset="0"/>
-                          </a:rPr>
-                          <m:t>2</m:t>
-                        </m:r>
-                        <m:r>
-                          <a:rPr sz="1828" i="1">
-                            <a:solidFill>
-                              <a:srgbClr val="52575F"/>
-                            </a:solidFill>
-                            <a:latin typeface="Cambria Math" panose="02040503050406030204" pitchFamily="18" charset="0"/>
-                          </a:rPr>
-                          <m:t>𝑛</m:t>
-                        </m:r>
-                      </m:den>
-                    </m:f>
-                    <m:r>
-                      <a:rPr sz="1828" i="1">
-                        <a:solidFill>
-                          <a:srgbClr val="52575F"/>
-                        </a:solidFill>
-                        <a:latin typeface="Cambria Math" panose="02040503050406030204" pitchFamily="18" charset="0"/>
-                      </a:rPr>
-                      <m:t>(</m:t>
-                    </m:r>
-                    <m:r>
-                      <a:rPr sz="1828" i="1">
-                        <a:solidFill>
-                          <a:srgbClr val="52575F"/>
-                        </a:solidFill>
-                        <a:latin typeface="Cambria Math" panose="02040503050406030204" pitchFamily="18" charset="0"/>
-                      </a:rPr>
-                      <m:t>𝑦</m:t>
-                    </m:r>
-                    <m:r>
-                      <a:rPr sz="1828" i="1">
-                        <a:solidFill>
-                          <a:srgbClr val="52575F"/>
-                        </a:solidFill>
-                        <a:latin typeface="Cambria Math" panose="02040503050406030204" pitchFamily="18" charset="0"/>
-                      </a:rPr>
-                      <m:t>−</m:t>
-                    </m:r>
-                    <m:r>
-                      <a:rPr sz="1828" i="1">
-                        <a:solidFill>
-                          <a:srgbClr val="52575F"/>
-                        </a:solidFill>
-                        <a:latin typeface="Cambria Math" panose="02040503050406030204" pitchFamily="18" charset="0"/>
-                      </a:rPr>
-                      <m:t>𝑋</m:t>
-                    </m:r>
-                    <m:r>
-                      <a:rPr sz="1828" i="1">
-                        <a:solidFill>
-                          <a:srgbClr val="52575F"/>
-                        </a:solidFill>
-                        <a:latin typeface="Cambria Math" panose="02040503050406030204" pitchFamily="18" charset="0"/>
-                      </a:rPr>
-                      <m:t>𝛽</m:t>
-                    </m:r>
-                    <m:sSup>
-                      <m:sSupPr>
-                        <m:ctrlPr>
-                          <a:rPr sz="1828" i="1">
-                            <a:solidFill>
-                              <a:srgbClr val="52575F"/>
-                            </a:solidFill>
-                            <a:latin typeface="Cambria Math" panose="02040503050406030204" pitchFamily="18" charset="0"/>
-                          </a:rPr>
-                        </m:ctrlPr>
-                      </m:sSupPr>
-                      <m:e>
-                        <m:r>
-                          <a:rPr sz="1828" i="1">
-                            <a:solidFill>
-                              <a:srgbClr val="52575F"/>
-                            </a:solidFill>
-                            <a:latin typeface="Cambria Math" panose="02040503050406030204" pitchFamily="18" charset="0"/>
-                          </a:rPr>
-                          <m:t>)</m:t>
-                        </m:r>
-                      </m:e>
-                      <m:sup>
-                        <m:r>
-                          <a:rPr sz="1828" i="1">
-                            <a:solidFill>
-                              <a:srgbClr val="52575F"/>
-                            </a:solidFill>
-                            <a:latin typeface="Cambria Math" panose="02040503050406030204" pitchFamily="18" charset="0"/>
-                          </a:rPr>
-                          <m:t>𝑇</m:t>
-                        </m:r>
-                      </m:sup>
-                    </m:sSup>
-                    <m:r>
-                      <a:rPr sz="1828" i="1">
-                        <a:solidFill>
-                          <a:srgbClr val="52575F"/>
-                        </a:solidFill>
-                        <a:latin typeface="Cambria Math" panose="02040503050406030204" pitchFamily="18" charset="0"/>
-                      </a:rPr>
-                      <m:t>(</m:t>
-                    </m:r>
-                    <m:r>
-                      <a:rPr sz="1828" i="1">
-                        <a:solidFill>
-                          <a:srgbClr val="52575F"/>
-                        </a:solidFill>
-                        <a:latin typeface="Cambria Math" panose="02040503050406030204" pitchFamily="18" charset="0"/>
-                      </a:rPr>
-                      <m:t>𝑦</m:t>
-                    </m:r>
-                    <m:r>
-                      <a:rPr sz="1828" i="1">
-                        <a:solidFill>
-                          <a:srgbClr val="52575F"/>
-                        </a:solidFill>
-                        <a:latin typeface="Cambria Math" panose="02040503050406030204" pitchFamily="18" charset="0"/>
-                      </a:rPr>
-                      <m:t>−</m:t>
-                    </m:r>
-                    <m:r>
-                      <a:rPr sz="1828" i="1">
-                        <a:solidFill>
-                          <a:srgbClr val="52575F"/>
-                        </a:solidFill>
-                        <a:latin typeface="Cambria Math" panose="02040503050406030204" pitchFamily="18" charset="0"/>
-                      </a:rPr>
-                      <m:t>𝑋</m:t>
-                    </m:r>
-                    <m:r>
-                      <a:rPr sz="1828" i="1">
-                        <a:solidFill>
-                          <a:srgbClr val="52575F"/>
-                        </a:solidFill>
-                        <a:latin typeface="Cambria Math" panose="02040503050406030204" pitchFamily="18" charset="0"/>
-                      </a:rPr>
-                      <m:t>𝛽</m:t>
-                    </m:r>
-                    <m:r>
-                      <a:rPr sz="1828" i="1">
-                        <a:solidFill>
-                          <a:srgbClr val="52575F"/>
-                        </a:solidFill>
-                        <a:latin typeface="Cambria Math" panose="02040503050406030204" pitchFamily="18" charset="0"/>
-                      </a:rPr>
-                      <m:t>)</m:t>
-                    </m:r>
-                  </m:oMath>
-                </a14:m>
-                <a:br>
-                  <a:rPr dirty="0"/>
-                </a:br>
-                <a:endParaRPr dirty="0"/>
-              </a:p>
-              <a:p>
-                <a:pPr marL="169658" indent="-169658" defTabSz="135123">
-                  <a:spcBef>
-                    <a:spcPts val="1758"/>
-                  </a:spcBef>
-                  <a:defRPr sz="2128"/>
-                </a:pPr>
-                <a:r>
-                  <a:rPr lang="en-US" dirty="0"/>
-                  <a:t>Optimal</a:t>
-                </a:r>
-                <a:r>
-                  <a:rPr dirty="0"/>
-                  <a:t> </a:t>
-                </a:r>
-                <a14:m>
-                  <m:oMath xmlns:m="http://schemas.openxmlformats.org/officeDocument/2006/math">
-                    <m:acc>
-                      <m:accPr>
-                        <m:chr m:val="̂"/>
-                        <m:ctrlPr>
-                          <a:rPr lang="ar-AE" sz="1828" i="1">
-                            <a:solidFill>
-                              <a:srgbClr val="52575F"/>
-                            </a:solidFill>
-                            <a:latin typeface="Cambria Math" panose="02040503050406030204" pitchFamily="18" charset="0"/>
-                          </a:rPr>
-                        </m:ctrlPr>
-                      </m:accPr>
-                      <m:e>
-                        <m:r>
-                          <a:rPr lang="ar-AE" sz="1828" i="1">
-                            <a:solidFill>
-                              <a:srgbClr val="52575F"/>
-                            </a:solidFill>
-                            <a:latin typeface="Cambria Math" panose="02040503050406030204" pitchFamily="18" charset="0"/>
-                          </a:rPr>
-                          <m:t>𝛽</m:t>
-                        </m:r>
-                      </m:e>
-                    </m:acc>
-                  </m:oMath>
-                </a14:m>
-                <a:r>
-                  <a:rPr dirty="0"/>
-                  <a:t>:</a:t>
-                </a:r>
-                <a:br>
-                  <a:rPr dirty="0"/>
-                </a:br>
-                <a14:m>
-                  <m:oMath xmlns:m="http://schemas.openxmlformats.org/officeDocument/2006/math">
-                    <m:acc>
-                      <m:accPr>
-                        <m:chr m:val="̂"/>
-                        <m:ctrlPr>
-                          <a:rPr lang="ar-AE" sz="1828" i="1">
-                            <a:solidFill>
-                              <a:srgbClr val="52575F"/>
-                            </a:solidFill>
-                            <a:latin typeface="Cambria Math" panose="02040503050406030204" pitchFamily="18" charset="0"/>
-                          </a:rPr>
-                        </m:ctrlPr>
-                      </m:accPr>
-                      <m:e>
-                        <m:r>
-                          <a:rPr lang="ar-AE" sz="1828" i="1">
-                            <a:solidFill>
-                              <a:srgbClr val="52575F"/>
-                            </a:solidFill>
-                            <a:latin typeface="Cambria Math" panose="02040503050406030204" pitchFamily="18" charset="0"/>
-                          </a:rPr>
-                          <m:t>𝛽</m:t>
-                        </m:r>
-                      </m:e>
-                    </m:acc>
-                    <m:r>
-                      <a:rPr lang="ar-AE" sz="1828" i="1">
-                        <a:solidFill>
-                          <a:srgbClr val="52575F"/>
-                        </a:solidFill>
-                        <a:latin typeface="Cambria Math" panose="02040503050406030204" pitchFamily="18" charset="0"/>
-                      </a:rPr>
-                      <m:t>=(</m:t>
-                    </m:r>
-                    <m:sSup>
-                      <m:sSupPr>
-                        <m:ctrlPr>
-                          <a:rPr lang="ar-AE" sz="1828" i="1">
-                            <a:solidFill>
-                              <a:srgbClr val="52575F"/>
-                            </a:solidFill>
-                            <a:latin typeface="Cambria Math" panose="02040503050406030204" pitchFamily="18" charset="0"/>
-                          </a:rPr>
-                        </m:ctrlPr>
-                      </m:sSupPr>
-                      <m:e>
-                        <m:r>
-                          <a:rPr lang="ar-AE" sz="1828" i="1">
-                            <a:solidFill>
-                              <a:srgbClr val="52575F"/>
-                            </a:solidFill>
-                            <a:latin typeface="Cambria Math" panose="02040503050406030204" pitchFamily="18" charset="0"/>
-                          </a:rPr>
-                          <m:t>𝑋</m:t>
-                        </m:r>
-                      </m:e>
-                      <m:sup>
-                        <m:r>
-                          <a:rPr lang="ar-AE" sz="1828" i="1">
-                            <a:solidFill>
-                              <a:srgbClr val="52575F"/>
-                            </a:solidFill>
-                            <a:latin typeface="Cambria Math" panose="02040503050406030204" pitchFamily="18" charset="0"/>
-                          </a:rPr>
-                          <m:t>𝑇</m:t>
-                        </m:r>
-                      </m:sup>
-                    </m:sSup>
-                    <m:r>
-                      <a:rPr lang="ar-AE" sz="1828" i="1">
-                        <a:solidFill>
-                          <a:srgbClr val="52575F"/>
-                        </a:solidFill>
-                        <a:latin typeface="Cambria Math" panose="02040503050406030204" pitchFamily="18" charset="0"/>
-                      </a:rPr>
-                      <m:t>𝑋</m:t>
-                    </m:r>
-                    <m:sSup>
-                      <m:sSupPr>
-                        <m:ctrlPr>
-                          <a:rPr lang="ar-AE" sz="1828" i="1">
-                            <a:solidFill>
-                              <a:srgbClr val="52575F"/>
-                            </a:solidFill>
-                            <a:latin typeface="Cambria Math" panose="02040503050406030204" pitchFamily="18" charset="0"/>
-                          </a:rPr>
-                        </m:ctrlPr>
-                      </m:sSupPr>
-                      <m:e>
-                        <m:r>
-                          <a:rPr lang="ar-AE" sz="1828" i="1">
-                            <a:solidFill>
-                              <a:srgbClr val="52575F"/>
-                            </a:solidFill>
-                            <a:latin typeface="Cambria Math" panose="02040503050406030204" pitchFamily="18" charset="0"/>
-                          </a:rPr>
-                          <m:t>)</m:t>
-                        </m:r>
-                      </m:e>
-                      <m:sup>
-                        <m:r>
-                          <a:rPr lang="ar-AE" sz="1828" i="1">
-                            <a:solidFill>
-                              <a:srgbClr val="52575F"/>
-                            </a:solidFill>
-                            <a:latin typeface="Cambria Math" panose="02040503050406030204" pitchFamily="18" charset="0"/>
-                          </a:rPr>
-                          <m:t>−1</m:t>
-                        </m:r>
-                      </m:sup>
-                    </m:sSup>
-                    <m:sSup>
-                      <m:sSupPr>
-                        <m:ctrlPr>
-                          <a:rPr lang="ar-AE" sz="1828" i="1">
-                            <a:solidFill>
-                              <a:srgbClr val="52575F"/>
-                            </a:solidFill>
-                            <a:latin typeface="Cambria Math" panose="02040503050406030204" pitchFamily="18" charset="0"/>
-                          </a:rPr>
-                        </m:ctrlPr>
-                      </m:sSupPr>
-                      <m:e>
-                        <m:r>
-                          <a:rPr lang="ar-AE" sz="1828" i="1">
-                            <a:solidFill>
-                              <a:srgbClr val="52575F"/>
-                            </a:solidFill>
-                            <a:latin typeface="Cambria Math" panose="02040503050406030204" pitchFamily="18" charset="0"/>
-                          </a:rPr>
-                          <m:t>𝑋</m:t>
-                        </m:r>
-                      </m:e>
-                      <m:sup>
-                        <m:r>
-                          <a:rPr lang="ar-AE" sz="1828" i="1">
-                            <a:solidFill>
-                              <a:srgbClr val="52575F"/>
-                            </a:solidFill>
-                            <a:latin typeface="Cambria Math" panose="02040503050406030204" pitchFamily="18" charset="0"/>
-                          </a:rPr>
-                          <m:t>𝑇</m:t>
-                        </m:r>
-                      </m:sup>
-                    </m:sSup>
-                    <m:r>
-                      <a:rPr lang="ar-AE" sz="1828" i="1">
-                        <a:solidFill>
-                          <a:srgbClr val="52575F"/>
-                        </a:solidFill>
-                        <a:latin typeface="Cambria Math" panose="02040503050406030204" pitchFamily="18" charset="0"/>
-                      </a:rPr>
-                      <m:t>𝑦</m:t>
-                    </m:r>
-                  </m:oMath>
-                </a14:m>
-                <a:endParaRPr sz="1969" dirty="0">
-                  <a:solidFill>
-                    <a:srgbClr val="53585F"/>
-                  </a:solidFill>
-                </a:endParaRPr>
-              </a:p>
-            </p:txBody>
-          </p:sp>
-        </mc:Choice>
-        <mc:Fallback xmlns="">
-          <p:sp>
-            <p:nvSpPr>
-              <p:cNvPr id="203" name="Matrix notation cost function:…"/>
-              <p:cNvSpPr txBox="1">
-                <a:spLocks noGrp="1" noRot="1" noChangeAspect="1" noMove="1" noResize="1" noEditPoints="1" noAdjustHandles="1" noChangeArrowheads="1" noChangeShapeType="1" noTextEdit="1"/>
-              </p:cNvSpPr>
-              <p:nvPr>
-                <p:ph type="body" idx="1"/>
-              </p:nvPr>
-            </p:nvSpPr>
-            <p:spPr>
-              <a:prstGeom prst="rect">
-                <a:avLst/>
-              </a:prstGeom>
-              <a:blipFill>
-                <a:blip r:embed="rId2"/>
-                <a:stretch>
-                  <a:fillRect l="-570" t="-979"/>
-                </a:stretch>
-              </a:blipFill>
-            </p:spPr>
-            <p:txBody>
-              <a:bodyPr/>
-              <a:lstStyle/>
-              <a:p>
-                <a:r>
-                  <a:rPr lang="en-US">
-                    <a:noFill/>
-                  </a:rPr>
-                  <a:t> </a:t>
-                </a:r>
-              </a:p>
-            </p:txBody>
-          </p:sp>
-        </mc:Fallback>
-      </mc:AlternateContent>
-    </p:spTree>
-  </p:cSld>
-  <p:clrMapOvr>
-    <a:masterClrMapping/>
-  </p:clrMapOvr>
-  <p:transition spd="med"/>
-  <p:timing>
-    <p:tnLst>
-      <p:par>
-        <p:cTn id="1" dur="indefinite" restart="never" fill="hold" nodeType="tmRoot">
-          <p:childTnLst>
-            <p:seq concurrent="1" prevAc="none" nextAc="seek">
-              <p:cTn id="2" dur="indefinite" fill="hold" nodeType="mainSeq">
-                <p:childTnLst>
-                  <p:par>
-                    <p:cTn id="3" fill="hold">
-                      <p:stCondLst>
-                        <p:cond delay="indefinite"/>
-                      </p:stCondLst>
-                      <p:childTnLst>
-                        <p:par>
-                          <p:cTn id="4" fill="hold">
-                            <p:stCondLst>
-                              <p:cond delay="0"/>
-                            </p:stCondLst>
-                            <p:childTnLst>
-                              <p:par>
-                                <p:cTn id="5" presetID="1" presetClass="entr" presetSubtype="0" fill="hold" grpId="0" nodeType="clickEffect">
-                                  <p:stCondLst>
-                                    <p:cond delay="0"/>
-                                  </p:stCondLst>
-                                  <p:iterate>
-                                    <p:tmAbs val="0"/>
-                                  </p:iterate>
-                                  <p:childTnLst>
-                                    <p:set>
-                                      <p:cBhvr>
-                                        <p:cTn id="6" fill="hold"/>
-                                        <p:tgtEl>
-                                          <p:spTgt spid="203">
-                                            <p:bg/>
-                                          </p:spTgt>
-                                        </p:tgtEl>
-                                        <p:attrNameLst>
-                                          <p:attrName>style.visibility</p:attrName>
-                                        </p:attrNameLst>
-                                      </p:cBhvr>
-                                      <p:to>
-                                        <p:strVal val="visible"/>
-                                      </p:to>
-                                    </p:set>
-                                  </p:childTnLst>
-                                </p:cTn>
-                              </p:par>
-                              <p:par>
-                                <p:cTn id="7" presetID="1" presetClass="entr" presetSubtype="0" fill="hold" grpId="0" nodeType="withEffect">
-                                  <p:stCondLst>
-                                    <p:cond delay="0"/>
-                                  </p:stCondLst>
-                                  <p:iterate>
-                                    <p:tmAbs val="0"/>
-                                  </p:iterate>
-                                  <p:childTnLst>
-                                    <p:set>
-                                      <p:cBhvr>
-                                        <p:cTn id="8" fill="hold"/>
-                                        <p:tgtEl>
-                                          <p:spTgt spid="203">
-                                            <p:txEl>
-                                              <p:pRg st="0" end="0"/>
-                                            </p:txEl>
-                                          </p:spTgt>
-                                        </p:tgtEl>
-                                        <p:attrNameLst>
-                                          <p:attrName>style.visibility</p:attrName>
-                                        </p:attrNameLst>
-                                      </p:cBhvr>
-                                      <p:to>
-                                        <p:strVal val="visible"/>
-                                      </p:to>
-                                    </p:set>
-                                  </p:childTnLst>
-                                </p:cTn>
-                              </p:par>
-                            </p:childTnLst>
-                          </p:cTn>
-                        </p:par>
-                      </p:childTnLst>
-                    </p:cTn>
-                  </p:par>
-                  <p:par>
-                    <p:cTn id="9" fill="hold">
-                      <p:stCondLst>
-                        <p:cond delay="indefinite"/>
-                      </p:stCondLst>
-                      <p:childTnLst>
-                        <p:par>
-                          <p:cTn id="10" fill="hold">
-                            <p:stCondLst>
-                              <p:cond delay="0"/>
-                            </p:stCondLst>
-                            <p:childTnLst>
-                              <p:par>
-                                <p:cTn id="11" presetID="1" presetClass="entr" presetSubtype="0" fill="hold" grpId="0" nodeType="clickEffect">
-                                  <p:stCondLst>
-                                    <p:cond delay="0"/>
-                                  </p:stCondLst>
-                                  <p:iterate>
-                                    <p:tmAbs val="0"/>
-                                  </p:iterate>
-                                  <p:childTnLst>
-                                    <p:set>
-                                      <p:cBhvr>
-                                        <p:cTn id="12" fill="hold"/>
-                                        <p:tgtEl>
-                                          <p:spTgt spid="203">
-                                            <p:txEl>
-                                              <p:pRg st="1" end="1"/>
-                                            </p:txEl>
-                                          </p:spTgt>
-                                        </p:tgtEl>
-                                        <p:attrNameLst>
-                                          <p:attrName>style.visibility</p:attrName>
-                                        </p:attrNameLst>
-                                      </p:cBhvr>
-                                      <p:to>
-                                        <p:strVal val="visible"/>
-                                      </p:to>
-                                    </p:set>
-                                  </p:childTnLst>
-                                </p:cTn>
-                              </p:par>
-                            </p:childTnLst>
-                          </p:cTn>
-                        </p:par>
-                      </p:childTnLst>
-                    </p:cTn>
-                  </p:par>
-                </p:childTnLst>
-              </p:cTn>
-              <p:prevCondLst>
-                <p:cond evt="onPrev" delay="0">
-                  <p:tgtEl>
-                    <p:sldTgt/>
-                  </p:tgtEl>
-                </p:cond>
-              </p:prevCondLst>
-              <p:nextCondLst>
-                <p:cond evt="onNext" delay="0">
-                  <p:tgtEl>
-                    <p:sldTgt/>
-                  </p:tgtEl>
-                </p:cond>
-              </p:nextCondLst>
-            </p:seq>
-          </p:childTnLst>
-        </p:cTn>
-      </p:par>
-    </p:tnLst>
-    <p:bldLst>
-      <p:bldP spid="203" grpId="0" build="p" bldLvl="5" animBg="1" advAuto="0"/>
-    </p:bldLst>
-  </p:timing>
-</p:sld>
-</file>
-
-<file path=ppt/slides/slide13.xml><?xml version="1.0" encoding="utf-8"?>
-<p:sld xmlns:a="http://schemas.openxmlformats.org/drawingml/2006/main" xmlns:r="http://schemas.openxmlformats.org/officeDocument/2006/relationships" xmlns:p="http://schemas.openxmlformats.org/presentationml/2006/main">
-  <p:cSld>
-    <p:spTree>
-      <p:nvGrpSpPr>
-        <p:cNvPr id="1" name=""/>
-        <p:cNvGrpSpPr/>
-        <p:nvPr/>
-      </p:nvGrpSpPr>
-      <p:grpSpPr>
-        <a:xfrm>
-          <a:off x="0" y="0"/>
-          <a:ext cx="0" cy="0"/>
-          <a:chOff x="0" y="0"/>
-          <a:chExt cx="0" cy="0"/>
-        </a:xfrm>
-      </p:grpSpPr>
-      <p:sp>
-        <p:nvSpPr>
           <p:cNvPr id="206" name="Method 2: Gradient Descent"/>
           <p:cNvSpPr txBox="1">
             <a:spLocks noGrp="1"/>
@@ -7529,7 +4674,7 @@
 </p:sld>
 </file>
 
-<file path=ppt/slides/slide14.xml><?xml version="1.0" encoding="utf-8"?>
+<file path=ppt/slides/slide11.xml><?xml version="1.0" encoding="utf-8"?>
 <p:sld xmlns:a="http://schemas.openxmlformats.org/drawingml/2006/main" xmlns:r="http://schemas.openxmlformats.org/officeDocument/2006/relationships" xmlns:p="http://schemas.openxmlformats.org/presentationml/2006/main">
   <p:cSld>
     <p:spTree>
@@ -7580,7 +4725,7 @@
 </p:sld>
 </file>
 
-<file path=ppt/slides/slide15.xml><?xml version="1.0" encoding="utf-8"?>
+<file path=ppt/slides/slide12.xml><?xml version="1.0" encoding="utf-8"?>
 <p:sld xmlns:a="http://schemas.openxmlformats.org/drawingml/2006/main" xmlns:r="http://schemas.openxmlformats.org/officeDocument/2006/relationships" xmlns:p="http://schemas.openxmlformats.org/presentationml/2006/main">
   <p:cSld>
     <p:spTree>
@@ -8210,7 +5355,7 @@
 </p:sld>
 </file>
 
-<file path=ppt/slides/slide16.xml><?xml version="1.0" encoding="utf-8"?>
+<file path=ppt/slides/slide13.xml><?xml version="1.0" encoding="utf-8"?>
 <p:sld xmlns:a="http://schemas.openxmlformats.org/drawingml/2006/main" xmlns:r="http://schemas.openxmlformats.org/officeDocument/2006/relationships" xmlns:p="http://schemas.openxmlformats.org/presentationml/2006/main">
   <p:cSld>
     <p:spTree>
@@ -8708,7 +5853,7 @@
 </p:sld>
 </file>
 
-<file path=ppt/slides/slide17.xml><?xml version="1.0" encoding="utf-8"?>
+<file path=ppt/slides/slide14.xml><?xml version="1.0" encoding="utf-8"?>
 <p:sld xmlns:a="http://schemas.openxmlformats.org/drawingml/2006/main" xmlns:r="http://schemas.openxmlformats.org/officeDocument/2006/relationships" xmlns:p="http://schemas.openxmlformats.org/presentationml/2006/main">
   <p:cSld>
     <p:spTree>
@@ -9550,7 +6695,7 @@
 </p:sld>
 </file>
 
-<file path=ppt/slides/slide18.xml><?xml version="1.0" encoding="utf-8"?>
+<file path=ppt/slides/slide15.xml><?xml version="1.0" encoding="utf-8"?>
 <p:sld xmlns:a="http://schemas.openxmlformats.org/drawingml/2006/main" xmlns:r="http://schemas.openxmlformats.org/officeDocument/2006/relationships" xmlns:p="http://schemas.openxmlformats.org/presentationml/2006/main">
   <p:cSld>
     <p:spTree>
@@ -9712,7 +6857,7 @@
 </p:sld>
 </file>
 
-<file path=ppt/slides/slide19.xml><?xml version="1.0" encoding="utf-8"?>
+<file path=ppt/slides/slide16.xml><?xml version="1.0" encoding="utf-8"?>
 <p:sld xmlns:a="http://schemas.openxmlformats.org/drawingml/2006/main" xmlns:r="http://schemas.openxmlformats.org/officeDocument/2006/relationships" xmlns:p="http://schemas.openxmlformats.org/presentationml/2006/main">
   <p:cSld>
     <p:spTree>
@@ -10668,58 +7813,7 @@
 </p:sld>
 </file>
 
-<file path=ppt/slides/slide2.xml><?xml version="1.0" encoding="utf-8"?>
-<p:sld xmlns:a="http://schemas.openxmlformats.org/drawingml/2006/main" xmlns:r="http://schemas.openxmlformats.org/officeDocument/2006/relationships" xmlns:p="http://schemas.openxmlformats.org/presentationml/2006/main">
-  <p:cSld>
-    <p:spTree>
-      <p:nvGrpSpPr>
-        <p:cNvPr id="1" name=""/>
-        <p:cNvGrpSpPr/>
-        <p:nvPr/>
-      </p:nvGrpSpPr>
-      <p:grpSpPr>
-        <a:xfrm>
-          <a:off x="0" y="0"/>
-          <a:ext cx="0" cy="0"/>
-          <a:chOff x="0" y="0"/>
-          <a:chExt cx="0" cy="0"/>
-        </a:xfrm>
-      </p:grpSpPr>
-      <p:sp>
-        <p:nvSpPr>
-          <p:cNvPr id="175" name="Linear Regression"/>
-          <p:cNvSpPr txBox="1">
-            <a:spLocks noGrp="1"/>
-          </p:cNvSpPr>
-          <p:nvPr>
-            <p:ph type="body" sz="half" idx="1"/>
-          </p:nvPr>
-        </p:nvSpPr>
-        <p:spPr>
-          <a:prstGeom prst="rect">
-            <a:avLst/>
-          </a:prstGeom>
-        </p:spPr>
-        <p:txBody>
-          <a:bodyPr/>
-          <a:lstStyle/>
-          <a:p>
-            <a:r>
-              <a:t>Linear Regression</a:t>
-            </a:r>
-          </a:p>
-        </p:txBody>
-      </p:sp>
-    </p:spTree>
-  </p:cSld>
-  <p:clrMapOvr>
-    <a:masterClrMapping/>
-  </p:clrMapOvr>
-  <p:transition spd="med"/>
-</p:sld>
-</file>
-
-<file path=ppt/slides/slide20.xml><?xml version="1.0" encoding="utf-8"?>
+<file path=ppt/slides/slide17.xml><?xml version="1.0" encoding="utf-8"?>
 <p:sld xmlns:a="http://schemas.openxmlformats.org/drawingml/2006/main" xmlns:r="http://schemas.openxmlformats.org/officeDocument/2006/relationships" xmlns:p="http://schemas.openxmlformats.org/presentationml/2006/main">
   <p:cSld>
     <p:spTree>
@@ -10770,7 +7864,7 @@
 </p:sld>
 </file>
 
-<file path=ppt/slides/slide21.xml><?xml version="1.0" encoding="utf-8"?>
+<file path=ppt/slides/slide18.xml><?xml version="1.0" encoding="utf-8"?>
 <p:sld xmlns:a="http://schemas.openxmlformats.org/drawingml/2006/main" xmlns:r="http://schemas.openxmlformats.org/officeDocument/2006/relationships" xmlns:p="http://schemas.openxmlformats.org/presentationml/2006/main">
   <p:cSld>
     <p:spTree>
@@ -10956,7 +8050,7 @@
 </p:sld>
 </file>
 
-<file path=ppt/slides/slide22.xml><?xml version="1.0" encoding="utf-8"?>
+<file path=ppt/slides/slide19.xml><?xml version="1.0" encoding="utf-8"?>
 <p:sld xmlns:a="http://schemas.openxmlformats.org/drawingml/2006/main" xmlns:r="http://schemas.openxmlformats.org/officeDocument/2006/relationships" xmlns:p="http://schemas.openxmlformats.org/presentationml/2006/main">
   <p:cSld>
     <p:spTree>
@@ -11836,7 +8930,58 @@
 </p:sld>
 </file>
 
-<file path=ppt/slides/slide23.xml><?xml version="1.0" encoding="utf-8"?>
+<file path=ppt/slides/slide2.xml><?xml version="1.0" encoding="utf-8"?>
+<p:sld xmlns:a="http://schemas.openxmlformats.org/drawingml/2006/main" xmlns:r="http://schemas.openxmlformats.org/officeDocument/2006/relationships" xmlns:p="http://schemas.openxmlformats.org/presentationml/2006/main">
+  <p:cSld>
+    <p:spTree>
+      <p:nvGrpSpPr>
+        <p:cNvPr id="1" name=""/>
+        <p:cNvGrpSpPr/>
+        <p:nvPr/>
+      </p:nvGrpSpPr>
+      <p:grpSpPr>
+        <a:xfrm>
+          <a:off x="0" y="0"/>
+          <a:ext cx="0" cy="0"/>
+          <a:chOff x="0" y="0"/>
+          <a:chExt cx="0" cy="0"/>
+        </a:xfrm>
+      </p:grpSpPr>
+      <p:sp>
+        <p:nvSpPr>
+          <p:cNvPr id="175" name="Linear Regression"/>
+          <p:cNvSpPr txBox="1">
+            <a:spLocks noGrp="1"/>
+          </p:cNvSpPr>
+          <p:nvPr>
+            <p:ph type="body" sz="half" idx="1"/>
+          </p:nvPr>
+        </p:nvSpPr>
+        <p:spPr>
+          <a:prstGeom prst="rect">
+            <a:avLst/>
+          </a:prstGeom>
+        </p:spPr>
+        <p:txBody>
+          <a:bodyPr/>
+          <a:lstStyle/>
+          <a:p>
+            <a:r>
+              <a:t>Linear Regression</a:t>
+            </a:r>
+          </a:p>
+        </p:txBody>
+      </p:sp>
+    </p:spTree>
+  </p:cSld>
+  <p:clrMapOvr>
+    <a:masterClrMapping/>
+  </p:clrMapOvr>
+  <p:transition spd="med"/>
+</p:sld>
+</file>
+
+<file path=ppt/slides/slide20.xml><?xml version="1.0" encoding="utf-8"?>
 <p:sld xmlns:a="http://schemas.openxmlformats.org/drawingml/2006/main" xmlns:r="http://schemas.openxmlformats.org/officeDocument/2006/relationships" xmlns:p="http://schemas.openxmlformats.org/presentationml/2006/main">
   <p:cSld>
     <p:spTree>
@@ -12282,7 +9427,7 @@
 </p:sld>
 </file>
 
-<file path=ppt/slides/slide24.xml><?xml version="1.0" encoding="utf-8"?>
+<file path=ppt/slides/slide21.xml><?xml version="1.0" encoding="utf-8"?>
 <p:sld xmlns:a="http://schemas.openxmlformats.org/drawingml/2006/main" xmlns:r="http://schemas.openxmlformats.org/officeDocument/2006/relationships" xmlns:p="http://schemas.openxmlformats.org/presentationml/2006/main">
   <p:cSld>
     <p:spTree>
@@ -12477,7 +9622,7 @@
           </a:ln>
           <a:extLst>
             <a:ext uri="{C572A759-6A51-4108-AA02-DFA0A04FC94B}">
-              <ma14:wrappingTextBoxFlag xmlns:ma14="http://schemas.microsoft.com/office/mac/drawingml/2011/main" xmlns:a14="http://schemas.microsoft.com/office/drawing/2010/main" xmlns:m="http://schemas.openxmlformats.org/officeDocument/2006/math" xmlns="" val="1"/>
+              <ma14:wrappingTextBoxFlag xmlns="" xmlns:m="http://schemas.openxmlformats.org/officeDocument/2006/math" xmlns:a14="http://schemas.microsoft.com/office/drawing/2010/main" xmlns:ma14="http://schemas.microsoft.com/office/mac/drawingml/2011/main" val="1"/>
             </a:ext>
           </a:extLst>
         </p:spPr>
@@ -12535,7 +9680,7 @@
 </p:sld>
 </file>
 
-<file path=ppt/slides/slide25.xml><?xml version="1.0" encoding="utf-8"?>
+<file path=ppt/slides/slide22.xml><?xml version="1.0" encoding="utf-8"?>
 <p:sld xmlns:a="http://schemas.openxmlformats.org/drawingml/2006/main" xmlns:r="http://schemas.openxmlformats.org/officeDocument/2006/relationships" xmlns:p="http://schemas.openxmlformats.org/presentationml/2006/main">
   <p:cSld>
     <p:spTree>
@@ -13080,6 +10225,58 @@
       </p:grpSpPr>
       <p:sp>
         <p:nvSpPr>
+          <p:cNvPr id="187" name="Training a Linear Regression Model"/>
+          <p:cNvSpPr txBox="1">
+            <a:spLocks noGrp="1"/>
+          </p:cNvSpPr>
+          <p:nvPr>
+            <p:ph type="body" sz="half" idx="1"/>
+          </p:nvPr>
+        </p:nvSpPr>
+        <p:spPr>
+          <a:prstGeom prst="rect">
+            <a:avLst/>
+          </a:prstGeom>
+        </p:spPr>
+        <p:txBody>
+          <a:bodyPr/>
+          <a:lstStyle/>
+          <a:p>
+            <a:r>
+              <a:rPr dirty="0"/>
+              <a:t>Training a Linear Regression Model</a:t>
+            </a:r>
+          </a:p>
+        </p:txBody>
+      </p:sp>
+    </p:spTree>
+  </p:cSld>
+  <p:clrMapOvr>
+    <a:masterClrMapping/>
+  </p:clrMapOvr>
+  <p:transition spd="med"/>
+</p:sld>
+</file>
+
+<file path=ppt/slides/slide5.xml><?xml version="1.0" encoding="utf-8"?>
+<p:sld xmlns:a="http://schemas.openxmlformats.org/drawingml/2006/main" xmlns:r="http://schemas.openxmlformats.org/officeDocument/2006/relationships" xmlns:p="http://schemas.openxmlformats.org/presentationml/2006/main">
+  <p:cSld>
+    <p:spTree>
+      <p:nvGrpSpPr>
+        <p:cNvPr id="1" name=""/>
+        <p:cNvGrpSpPr/>
+        <p:nvPr/>
+      </p:nvGrpSpPr>
+      <p:grpSpPr>
+        <a:xfrm>
+          <a:off x="0" y="0"/>
+          <a:ext cx="0" cy="0"/>
+          <a:chOff x="0" y="0"/>
+          <a:chExt cx="0" cy="0"/>
+        </a:xfrm>
+      </p:grpSpPr>
+      <p:sp>
+        <p:nvSpPr>
           <p:cNvPr id="182" name="Least Squares"/>
           <p:cNvSpPr txBox="1">
             <a:spLocks noGrp="1"/>
@@ -13149,7 +10346,7 @@
           </a:ln>
           <a:extLst>
             <a:ext uri="{C572A759-6A51-4108-AA02-DFA0A04FC94B}">
-              <ma14:wrappingTextBoxFlag xmlns:ma14="http://schemas.microsoft.com/office/mac/drawingml/2011/main" xmlns:a14="http://schemas.microsoft.com/office/drawing/2010/main" xmlns:m="http://schemas.openxmlformats.org/officeDocument/2006/math" xmlns="" val="1"/>
+              <ma14:wrappingTextBoxFlag xmlns="" xmlns:m="http://schemas.openxmlformats.org/officeDocument/2006/math" xmlns:a14="http://schemas.microsoft.com/office/drawing/2010/main" xmlns:ma14="http://schemas.microsoft.com/office/mac/drawingml/2011/main" val="1"/>
             </a:ext>
           </a:extLst>
         </p:spPr>
@@ -13556,490 +10753,7 @@
 </p:sld>
 </file>
 
-<file path=ppt/slides/slide5.xml><?xml version="1.0" encoding="utf-8"?>
-<p:sld xmlns:a="http://schemas.openxmlformats.org/drawingml/2006/main" xmlns:r="http://schemas.openxmlformats.org/officeDocument/2006/relationships" xmlns:p="http://schemas.openxmlformats.org/presentationml/2006/main" show="0">
-  <p:cSld>
-    <p:spTree>
-      <p:nvGrpSpPr>
-        <p:cNvPr id="1" name=""/>
-        <p:cNvGrpSpPr/>
-        <p:nvPr/>
-      </p:nvGrpSpPr>
-      <p:grpSpPr>
-        <a:xfrm>
-          <a:off x="0" y="0"/>
-          <a:ext cx="0" cy="0"/>
-          <a:chOff x="0" y="0"/>
-          <a:chExt cx="0" cy="0"/>
-        </a:xfrm>
-      </p:grpSpPr>
-      <p:sp>
-        <p:nvSpPr>
-          <p:cNvPr id="3" name="Title 2"/>
-          <p:cNvSpPr>
-            <a:spLocks noGrp="1"/>
-          </p:cNvSpPr>
-          <p:nvPr>
-            <p:ph type="title"/>
-          </p:nvPr>
-        </p:nvSpPr>
-        <p:spPr/>
-        <p:txBody>
-          <a:bodyPr/>
-          <a:lstStyle/>
-          <a:p>
-            <a:r>
-              <a:rPr lang="en-US" dirty="0">
-                <a:solidFill>
-                  <a:srgbClr val="FF0000"/>
-                </a:solidFill>
-              </a:rPr>
-              <a:t>Conditional Mean</a:t>
-            </a:r>
-          </a:p>
-        </p:txBody>
-      </p:sp>
-      <p:pic>
-        <p:nvPicPr>
-          <p:cNvPr id="4" name="Content Placeholder 3"/>
-          <p:cNvPicPr>
-            <a:picLocks noGrp="1" noChangeAspect="1"/>
-          </p:cNvPicPr>
-          <p:nvPr>
-            <p:ph idx="1"/>
-            <p:custDataLst>
-              <p:tags r:id="rId1"/>
-            </p:custDataLst>
-          </p:nvPr>
-        </p:nvPicPr>
-        <p:blipFill>
-          <a:blip r:embed="rId3" cstate="print">
-            <a:extLst>
-              <a:ext uri="{28A0092B-C50C-407E-A947-70E740481C1C}">
-                <a14:useLocalDpi xmlns:a14="http://schemas.microsoft.com/office/drawing/2010/main" val="0"/>
-              </a:ext>
-            </a:extLst>
-          </a:blip>
-          <a:stretch>
-            <a:fillRect/>
-          </a:stretch>
-        </p:blipFill>
-        <p:spPr>
-          <a:xfrm>
-            <a:off x="2182578" y="2221992"/>
-            <a:ext cx="8008734" cy="2714825"/>
-          </a:xfrm>
-          <a:prstGeom prst="rect">
-            <a:avLst/>
-          </a:prstGeom>
-          <a:noFill/>
-          <a:ln/>
-          <a:effectLst/>
-        </p:spPr>
-      </p:pic>
-    </p:spTree>
-    <p:extLst>
-      <p:ext uri="{BB962C8B-B14F-4D97-AF65-F5344CB8AC3E}">
-        <p14:creationId xmlns:p14="http://schemas.microsoft.com/office/powerpoint/2010/main" val="690451440"/>
-      </p:ext>
-    </p:extLst>
-  </p:cSld>
-  <p:clrMapOvr>
-    <a:masterClrMapping/>
-  </p:clrMapOvr>
-</p:sld>
-</file>
-
 <file path=ppt/slides/slide6.xml><?xml version="1.0" encoding="utf-8"?>
-<p:sld xmlns:a="http://schemas.openxmlformats.org/drawingml/2006/main" xmlns:r="http://schemas.openxmlformats.org/officeDocument/2006/relationships" xmlns:p="http://schemas.openxmlformats.org/presentationml/2006/main" show="0">
-  <p:cSld>
-    <p:spTree>
-      <p:nvGrpSpPr>
-        <p:cNvPr id="1" name=""/>
-        <p:cNvGrpSpPr/>
-        <p:nvPr/>
-      </p:nvGrpSpPr>
-      <p:grpSpPr>
-        <a:xfrm>
-          <a:off x="0" y="0"/>
-          <a:ext cx="0" cy="0"/>
-          <a:chOff x="0" y="0"/>
-          <a:chExt cx="0" cy="0"/>
-        </a:xfrm>
-      </p:grpSpPr>
-      <p:sp>
-        <p:nvSpPr>
-          <p:cNvPr id="3" name="Title 2"/>
-          <p:cNvSpPr>
-            <a:spLocks noGrp="1"/>
-          </p:cNvSpPr>
-          <p:nvPr>
-            <p:ph type="title"/>
-          </p:nvPr>
-        </p:nvSpPr>
-        <p:spPr/>
-        <p:txBody>
-          <a:bodyPr/>
-          <a:lstStyle/>
-          <a:p>
-            <a:r>
-              <a:rPr lang="en-US" dirty="0">
-                <a:solidFill>
-                  <a:srgbClr val="FF0000"/>
-                </a:solidFill>
-              </a:rPr>
-              <a:t>Conditional Mean</a:t>
-            </a:r>
-          </a:p>
-        </p:txBody>
-      </p:sp>
-      <p:pic>
-        <p:nvPicPr>
-          <p:cNvPr id="4" name="Content Placeholder 3"/>
-          <p:cNvPicPr>
-            <a:picLocks noGrp="1" noChangeAspect="1"/>
-          </p:cNvPicPr>
-          <p:nvPr>
-            <p:ph idx="1"/>
-            <p:custDataLst>
-              <p:tags r:id="rId1"/>
-            </p:custDataLst>
-          </p:nvPr>
-        </p:nvPicPr>
-        <p:blipFill>
-          <a:blip r:embed="rId3" cstate="print">
-            <a:extLst>
-              <a:ext uri="{28A0092B-C50C-407E-A947-70E740481C1C}">
-                <a14:useLocalDpi xmlns:a14="http://schemas.microsoft.com/office/drawing/2010/main" val="0"/>
-              </a:ext>
-            </a:extLst>
-          </a:blip>
-          <a:stretch>
-            <a:fillRect/>
-          </a:stretch>
-        </p:blipFill>
-        <p:spPr>
-          <a:xfrm>
-            <a:off x="2103450" y="1981417"/>
-            <a:ext cx="7985099" cy="3416922"/>
-          </a:xfrm>
-          <a:prstGeom prst="rect">
-            <a:avLst/>
-          </a:prstGeom>
-          <a:noFill/>
-          <a:ln/>
-          <a:effectLst/>
-        </p:spPr>
-      </p:pic>
-    </p:spTree>
-    <p:extLst>
-      <p:ext uri="{BB962C8B-B14F-4D97-AF65-F5344CB8AC3E}">
-        <p14:creationId xmlns:p14="http://schemas.microsoft.com/office/powerpoint/2010/main" val="2527865502"/>
-      </p:ext>
-    </p:extLst>
-  </p:cSld>
-  <p:clrMapOvr>
-    <a:masterClrMapping/>
-  </p:clrMapOvr>
-</p:sld>
-</file>
-
-<file path=ppt/slides/slide7.xml><?xml version="1.0" encoding="utf-8"?>
-<p:sld xmlns:a="http://schemas.openxmlformats.org/drawingml/2006/main" xmlns:r="http://schemas.openxmlformats.org/officeDocument/2006/relationships" xmlns:p="http://schemas.openxmlformats.org/presentationml/2006/main">
-  <p:cSld>
-    <p:spTree>
-      <p:nvGrpSpPr>
-        <p:cNvPr id="1" name=""/>
-        <p:cNvGrpSpPr/>
-        <p:nvPr/>
-      </p:nvGrpSpPr>
-      <p:grpSpPr>
-        <a:xfrm>
-          <a:off x="0" y="0"/>
-          <a:ext cx="0" cy="0"/>
-          <a:chOff x="0" y="0"/>
-          <a:chExt cx="0" cy="0"/>
-        </a:xfrm>
-      </p:grpSpPr>
-      <p:sp>
-        <p:nvSpPr>
-          <p:cNvPr id="187" name="Training a Linear Regression Model"/>
-          <p:cNvSpPr txBox="1">
-            <a:spLocks noGrp="1"/>
-          </p:cNvSpPr>
-          <p:nvPr>
-            <p:ph type="body" sz="half" idx="1"/>
-          </p:nvPr>
-        </p:nvSpPr>
-        <p:spPr>
-          <a:prstGeom prst="rect">
-            <a:avLst/>
-          </a:prstGeom>
-        </p:spPr>
-        <p:txBody>
-          <a:bodyPr/>
-          <a:lstStyle/>
-          <a:p>
-            <a:r>
-              <a:rPr dirty="0"/>
-              <a:t>Training a Linear Regression Model</a:t>
-            </a:r>
-          </a:p>
-        </p:txBody>
-      </p:sp>
-    </p:spTree>
-  </p:cSld>
-  <p:clrMapOvr>
-    <a:masterClrMapping/>
-  </p:clrMapOvr>
-  <p:transition spd="med"/>
-</p:sld>
-</file>
-
-<file path=ppt/slides/slide8.xml><?xml version="1.0" encoding="utf-8"?>
-<p:sld xmlns:a="http://schemas.openxmlformats.org/drawingml/2006/main" xmlns:r="http://schemas.openxmlformats.org/officeDocument/2006/relationships" xmlns:p="http://schemas.openxmlformats.org/presentationml/2006/main">
-  <p:cSld>
-    <p:spTree>
-      <p:nvGrpSpPr>
-        <p:cNvPr id="1" name=""/>
-        <p:cNvGrpSpPr/>
-        <p:nvPr/>
-      </p:nvGrpSpPr>
-      <p:grpSpPr>
-        <a:xfrm>
-          <a:off x="0" y="0"/>
-          <a:ext cx="0" cy="0"/>
-          <a:chOff x="0" y="0"/>
-          <a:chExt cx="0" cy="0"/>
-        </a:xfrm>
-      </p:grpSpPr>
-      <p:sp>
-        <p:nvSpPr>
-          <p:cNvPr id="190" name="General model-based training framework"/>
-          <p:cNvSpPr txBox="1">
-            <a:spLocks noGrp="1"/>
-          </p:cNvSpPr>
-          <p:nvPr>
-            <p:ph type="title"/>
-          </p:nvPr>
-        </p:nvSpPr>
-        <p:spPr>
-          <a:prstGeom prst="rect">
-            <a:avLst/>
-          </a:prstGeom>
-        </p:spPr>
-        <p:txBody>
-          <a:bodyPr>
-            <a:normAutofit/>
-          </a:bodyPr>
-          <a:lstStyle>
-            <a:lvl1pPr defTabSz="203200">
-              <a:defRPr sz="4800" spc="-48"/>
-            </a:lvl1pPr>
-          </a:lstStyle>
-          <a:p>
-            <a:r>
-              <a:rPr dirty="0"/>
-              <a:t>General model-based training</a:t>
-            </a:r>
-          </a:p>
-        </p:txBody>
-      </p:sp>
-      <p:sp>
-        <p:nvSpPr>
-          <p:cNvPr id="191" name="Define an appropriate objective function…"/>
-          <p:cNvSpPr txBox="1">
-            <a:spLocks noGrp="1"/>
-          </p:cNvSpPr>
-          <p:nvPr>
-            <p:ph type="body" idx="1"/>
-          </p:nvPr>
-        </p:nvSpPr>
-        <p:spPr>
-          <a:xfrm>
-            <a:off x="800100" y="2001859"/>
-            <a:ext cx="10691265" cy="3739896"/>
-          </a:xfrm>
-          <a:prstGeom prst="rect">
-            <a:avLst/>
-          </a:prstGeom>
-        </p:spPr>
-        <p:txBody>
-          <a:bodyPr>
-            <a:normAutofit fontScale="70000" lnSpcReduction="20000"/>
-          </a:bodyPr>
-          <a:lstStyle/>
-          <a:p>
-            <a:pPr marL="183052" indent="-183052" defTabSz="145791">
-              <a:spcBef>
-                <a:spcPts val="1898"/>
-              </a:spcBef>
-              <a:defRPr sz="2296"/>
-            </a:pPr>
-            <a:r>
-              <a:rPr dirty="0"/>
-              <a:t>Define an appropriate </a:t>
-            </a:r>
-            <a:r>
-              <a:rPr b="1" dirty="0">
-                <a:latin typeface="Graphik"/>
-                <a:ea typeface="Graphik"/>
-                <a:cs typeface="Graphik"/>
-                <a:sym typeface="Graphik"/>
-              </a:rPr>
-              <a:t>objective function</a:t>
-            </a:r>
-          </a:p>
-          <a:p>
-            <a:pPr marL="367568" lvl="1" indent="-184516" defTabSz="145791">
-              <a:spcBef>
-                <a:spcPts val="1898"/>
-              </a:spcBef>
-              <a:defRPr sz="2296"/>
-            </a:pPr>
-            <a:r>
-              <a:rPr dirty="0"/>
-              <a:t>Cost/Loss functions are minimized</a:t>
-            </a:r>
-            <a:r>
-              <a:rPr lang="en-US" dirty="0"/>
-              <a:t> (machine learning)</a:t>
-            </a:r>
-            <a:endParaRPr dirty="0"/>
-          </a:p>
-          <a:p>
-            <a:pPr marL="367568" lvl="1" indent="-184516" defTabSz="145791">
-              <a:spcBef>
-                <a:spcPts val="1898"/>
-              </a:spcBef>
-              <a:defRPr sz="2296"/>
-            </a:pPr>
-            <a:r>
-              <a:rPr dirty="0"/>
-              <a:t>Utility/Fitness functions are maximized </a:t>
-            </a:r>
-            <a:r>
-              <a:rPr lang="en-US" dirty="0"/>
-              <a:t>(statistics)</a:t>
-            </a:r>
-            <a:endParaRPr dirty="0"/>
-          </a:p>
-          <a:p>
-            <a:pPr marL="550620" lvl="2" indent="-184516" defTabSz="145791">
-              <a:spcBef>
-                <a:spcPts val="1898"/>
-              </a:spcBef>
-              <a:defRPr sz="2296"/>
-            </a:pPr>
-            <a:r>
-              <a:rPr dirty="0"/>
-              <a:t>For example</a:t>
-            </a:r>
-            <a:r>
-              <a:rPr lang="en-US" dirty="0"/>
-              <a:t>,</a:t>
-            </a:r>
-            <a:r>
-              <a:rPr dirty="0"/>
-              <a:t> the likelihood in MLE is a utility function</a:t>
-            </a:r>
-          </a:p>
-          <a:p>
-            <a:pPr marL="183052" indent="-183052" defTabSz="145791">
-              <a:spcBef>
-                <a:spcPts val="1898"/>
-              </a:spcBef>
-              <a:defRPr sz="2296"/>
-            </a:pPr>
-            <a:r>
-              <a:rPr dirty="0"/>
-              <a:t>“Train” the model by solving the optimization problem using an appropriate optimization </a:t>
-            </a:r>
-            <a:r>
-              <a:rPr b="1" dirty="0">
-                <a:latin typeface="Graphik"/>
-                <a:ea typeface="Graphik"/>
-                <a:cs typeface="Graphik"/>
-                <a:sym typeface="Graphik"/>
-              </a:rPr>
-              <a:t>method</a:t>
-            </a:r>
-          </a:p>
-          <a:p>
-            <a:pPr marL="367568" lvl="1" indent="-184516" defTabSz="145791">
-              <a:spcBef>
-                <a:spcPts val="1898"/>
-              </a:spcBef>
-              <a:defRPr sz="2296"/>
-            </a:pPr>
-            <a:r>
-              <a:rPr dirty="0"/>
-              <a:t>a “closed-form” solution (rare) </a:t>
-            </a:r>
-          </a:p>
-          <a:p>
-            <a:pPr marL="367568" lvl="1" indent="-184516" defTabSz="145791">
-              <a:spcBef>
-                <a:spcPts val="1898"/>
-              </a:spcBef>
-              <a:defRPr sz="2296"/>
-            </a:pPr>
-            <a:r>
-              <a:rPr dirty="0"/>
-              <a:t>a numerical method (usually)</a:t>
-            </a:r>
-          </a:p>
-          <a:p>
-            <a:pPr marL="550620" lvl="2" indent="-184516" defTabSz="145791">
-              <a:spcBef>
-                <a:spcPts val="1898"/>
-              </a:spcBef>
-              <a:defRPr sz="2296">
-                <a:solidFill>
-                  <a:srgbClr val="005493"/>
-                </a:solidFill>
-              </a:defRPr>
-            </a:pPr>
-            <a:r>
-              <a:rPr b="1" dirty="0">
-                <a:latin typeface="Graphik"/>
-                <a:ea typeface="Graphik"/>
-                <a:cs typeface="Graphik"/>
-                <a:sym typeface="Graphik"/>
-              </a:rPr>
-              <a:t>Gradient descent</a:t>
-            </a:r>
-            <a:r>
-              <a:rPr lang="en-US" b="1" dirty="0">
-                <a:latin typeface="Graphik"/>
-                <a:ea typeface="Graphik"/>
-                <a:cs typeface="Graphik"/>
-                <a:sym typeface="Graphik"/>
-              </a:rPr>
-              <a:t> or variants (</a:t>
-            </a:r>
-            <a:r>
-              <a:rPr dirty="0"/>
-              <a:t>Adam, Newton’s method</a:t>
-            </a:r>
-            <a:r>
-              <a:rPr lang="en-US" dirty="0"/>
-              <a:t>)</a:t>
-            </a:r>
-            <a:endParaRPr dirty="0"/>
-          </a:p>
-        </p:txBody>
-      </p:sp>
-    </p:spTree>
-  </p:cSld>
-  <p:clrMapOvr>
-    <a:masterClrMapping/>
-  </p:clrMapOvr>
-  <p:transition spd="med"/>
-</p:sld>
-</file>
-
-<file path=ppt/slides/slide9.xml><?xml version="1.0" encoding="utf-8"?>
 <p:sld xmlns:a="http://schemas.openxmlformats.org/drawingml/2006/main" xmlns:r="http://schemas.openxmlformats.org/officeDocument/2006/relationships" xmlns:p="http://schemas.openxmlformats.org/presentationml/2006/main">
   <p:cSld>
     <p:spTree>
@@ -14078,8 +10792,8 @@
           <a:lstStyle/>
           <a:p>
             <a:r>
-              <a:rPr lang="en-US" dirty="0"/>
-              <a:t>Optimizing the objective function</a:t>
+              <a:rPr lang="en-US"/>
+              <a:t>Objective functions and optimization</a:t>
             </a:r>
           </a:p>
         </p:txBody>
@@ -14111,32 +10825,39 @@
           <a:lstStyle/>
           <a:p>
             <a:r>
-              <a:rPr lang="en-US" dirty="0"/>
-              <a:t>Minimum vs. Minimizer</a:t>
-            </a:r>
-          </a:p>
-          <a:p>
-            <a:r>
-              <a:rPr lang="en-US" dirty="0"/>
-              <a:t>Given a function, </a:t>
-            </a:r>
-            <a:r>
-              <a:rPr lang="en-US" i="1" dirty="0"/>
-              <a:t>f</a:t>
-            </a:r>
-            <a:r>
-              <a:rPr lang="en-US" dirty="0"/>
-              <a:t>, how do we minimize the function?</a:t>
-            </a:r>
-          </a:p>
-          <a:p>
-            <a:r>
-              <a:rPr lang="en-US" dirty="0"/>
-              <a:t>What if there is no analytic solution? (I.e., no closed form?)</a:t>
-            </a:r>
-          </a:p>
-          <a:p>
-            <a:endParaRPr lang="en-US" dirty="0"/>
+              <a:rPr lang="en-US" b="1" i="0" dirty="0"/>
+              <a:t>Define an appropriate objective function</a:t>
+            </a:r>
+          </a:p>
+          <a:p>
+            <a:pPr lvl="1"/>
+            <a:r>
+              <a:rPr lang="en-US" b="0" i="0" dirty="0"/>
+              <a:t>Cost/loss functions are minimized (machine learning)</a:t>
+            </a:r>
+          </a:p>
+          <a:p>
+            <a:pPr lvl="1"/>
+            <a:r>
+              <a:rPr lang="en-US" b="0" i="0" dirty="0"/>
+              <a:t>Minimum vs. minimizer: the minimizer is the value </a:t>
+            </a:r>
+            <a:r>
+              <a:rPr lang="en-US" b="0" i="1" dirty="0"/>
+              <a:t>x</a:t>
+            </a:r>
+            <a:r>
+              <a:rPr lang="en-US" b="0" i="0" dirty="0"/>
+              <a:t> that produces the smallest output </a:t>
+            </a:r>
+            <a:r>
+              <a:rPr lang="en-US" b="0" i="1" dirty="0"/>
+              <a:t>f(x)</a:t>
+            </a:r>
+            <a:r>
+              <a:rPr lang="en-US" b="0" i="0" dirty="0"/>
+              <a:t>.</a:t>
+            </a:r>
           </a:p>
         </p:txBody>
       </p:sp>
@@ -14162,36 +10883,29 @@
           <a:lstStyle/>
           <a:p>
             <a:r>
-              <a:rPr lang="en-US" dirty="0"/>
-              <a:t>A minimizer is the value </a:t>
-            </a:r>
-            <a:r>
-              <a:rPr lang="en-US" i="1" dirty="0"/>
-              <a:t>x</a:t>
-            </a:r>
-            <a:r>
-              <a:rPr lang="en-US" dirty="0"/>
-              <a:t> that produces the smallest output </a:t>
-            </a:r>
-            <a:r>
-              <a:rPr lang="en-US" i="1" dirty="0"/>
-              <a:t>f(x)</a:t>
-            </a:r>
-            <a:r>
-              <a:rPr lang="en-US" dirty="0"/>
-              <a:t>.</a:t>
-            </a:r>
-          </a:p>
-          <a:p>
-            <a:r>
-              <a:rPr lang="en-US" dirty="0"/>
-              <a:t>Differential calculus!</a:t>
-            </a:r>
-          </a:p>
-          <a:p>
-            <a:r>
-              <a:rPr lang="en-US" dirty="0"/>
-              <a:t>Numerical approaches.</a:t>
+              <a:rPr lang="en-US" b="1" i="0" dirty="0"/>
+              <a:t>“Train” the model by choosing an optimization method</a:t>
+            </a:r>
+          </a:p>
+          <a:p>
+            <a:pPr lvl="1"/>
+            <a:r>
+              <a:rPr lang="en-US" b="0" i="0" dirty="0"/>
+              <a:t>A closed-form solution (rare) — differential calculus</a:t>
+            </a:r>
+          </a:p>
+          <a:p>
+            <a:pPr lvl="1"/>
+            <a:r>
+              <a:rPr lang="en-US" b="0" i="0" dirty="0"/>
+              <a:t>A numerical method (usually), when no analytic solution exists</a:t>
+            </a:r>
+          </a:p>
+          <a:p>
+            <a:pPr lvl="1"/>
+            <a:r>
+              <a:rPr lang="en-US" b="0" i="0" dirty="0"/>
+              <a:t>Gradient descent or variants (Adam, Newton’s method)</a:t>
             </a:r>
           </a:p>
         </p:txBody>
@@ -14240,7 +10954,883 @@
                                           </p:stCondLst>
                                         </p:cTn>
                                         <p:tgtEl>
+                                          <p:spTgt spid="3">
+                                            <p:txEl>
+                                              <p:pRg st="1" end="1"/>
+                                            </p:txEl>
+                                          </p:spTgt>
+                                        </p:tgtEl>
+                                        <p:attrNameLst>
+                                          <p:attrName>style.visibility</p:attrName>
+                                        </p:attrNameLst>
+                                      </p:cBhvr>
+                                      <p:to>
+                                        <p:strVal val="visible"/>
+                                      </p:to>
+                                    </p:set>
+                                  </p:childTnLst>
+                                </p:cTn>
+                              </p:par>
+                            </p:childTnLst>
+                          </p:cTn>
+                        </p:par>
+                      </p:childTnLst>
+                    </p:cTn>
+                  </p:par>
+                  <p:par>
+                    <p:cTn id="7" fill="hold">
+                      <p:stCondLst>
+                        <p:cond delay="indefinite"/>
+                      </p:stCondLst>
+                      <p:childTnLst>
+                        <p:par>
+                          <p:cTn id="8" fill="hold">
+                            <p:stCondLst>
+                              <p:cond delay="0"/>
+                            </p:stCondLst>
+                            <p:childTnLst>
+                              <p:par>
+                                <p:cTn id="9" presetID="1" presetClass="entr" presetSubtype="0" fill="hold" nodeType="clickEffect">
+                                  <p:stCondLst>
+                                    <p:cond delay="0"/>
+                                  </p:stCondLst>
+                                  <p:childTnLst>
+                                    <p:set>
+                                      <p:cBhvr>
+                                        <p:cTn id="10" dur="1" fill="hold">
+                                          <p:stCondLst>
+                                            <p:cond delay="0"/>
+                                          </p:stCondLst>
+                                        </p:cTn>
+                                        <p:tgtEl>
+                                          <p:spTgt spid="3">
+                                            <p:txEl>
+                                              <p:pRg st="2" end="2"/>
+                                            </p:txEl>
+                                          </p:spTgt>
+                                        </p:tgtEl>
+                                        <p:attrNameLst>
+                                          <p:attrName>style.visibility</p:attrName>
+                                        </p:attrNameLst>
+                                      </p:cBhvr>
+                                      <p:to>
+                                        <p:strVal val="visible"/>
+                                      </p:to>
+                                    </p:set>
+                                  </p:childTnLst>
+                                </p:cTn>
+                              </p:par>
+                            </p:childTnLst>
+                          </p:cTn>
+                        </p:par>
+                      </p:childTnLst>
+                    </p:cTn>
+                  </p:par>
+                  <p:par>
+                    <p:cTn id="11" fill="hold">
+                      <p:stCondLst>
+                        <p:cond delay="indefinite"/>
+                      </p:stCondLst>
+                      <p:childTnLst>
+                        <p:par>
+                          <p:cTn id="12" fill="hold">
+                            <p:stCondLst>
+                              <p:cond delay="0"/>
+                            </p:stCondLst>
+                            <p:childTnLst>
+                              <p:par>
+                                <p:cTn id="13" presetID="1" presetClass="entr" presetSubtype="0" fill="hold" nodeType="clickEffect">
+                                  <p:stCondLst>
+                                    <p:cond delay="0"/>
+                                  </p:stCondLst>
+                                  <p:childTnLst>
+                                    <p:set>
+                                      <p:cBhvr>
+                                        <p:cTn id="14" dur="1" fill="hold">
+                                          <p:stCondLst>
+                                            <p:cond delay="0"/>
+                                          </p:stCondLst>
+                                        </p:cTn>
+                                        <p:tgtEl>
                                           <p:spTgt spid="4">
+                                            <p:txEl>
+                                              <p:pRg st="0" end="0"/>
+                                            </p:txEl>
+                                          </p:spTgt>
+                                        </p:tgtEl>
+                                        <p:attrNameLst>
+                                          <p:attrName>style.visibility</p:attrName>
+                                        </p:attrNameLst>
+                                      </p:cBhvr>
+                                      <p:to>
+                                        <p:strVal val="visible"/>
+                                      </p:to>
+                                    </p:set>
+                                  </p:childTnLst>
+                                </p:cTn>
+                              </p:par>
+                            </p:childTnLst>
+                          </p:cTn>
+                        </p:par>
+                      </p:childTnLst>
+                    </p:cTn>
+                  </p:par>
+                  <p:par>
+                    <p:cTn id="15" fill="hold">
+                      <p:stCondLst>
+                        <p:cond delay="indefinite"/>
+                      </p:stCondLst>
+                      <p:childTnLst>
+                        <p:par>
+                          <p:cTn id="16" fill="hold">
+                            <p:stCondLst>
+                              <p:cond delay="0"/>
+                            </p:stCondLst>
+                            <p:childTnLst>
+                              <p:par>
+                                <p:cTn id="17" presetID="1" presetClass="entr" presetSubtype="0" fill="hold" nodeType="clickEffect">
+                                  <p:stCondLst>
+                                    <p:cond delay="0"/>
+                                  </p:stCondLst>
+                                  <p:childTnLst>
+                                    <p:set>
+                                      <p:cBhvr>
+                                        <p:cTn id="18" dur="1" fill="hold">
+                                          <p:stCondLst>
+                                            <p:cond delay="0"/>
+                                          </p:stCondLst>
+                                        </p:cTn>
+                                        <p:tgtEl>
+                                          <p:spTgt spid="4">
+                                            <p:txEl>
+                                              <p:pRg st="1" end="1"/>
+                                            </p:txEl>
+                                          </p:spTgt>
+                                        </p:tgtEl>
+                                        <p:attrNameLst>
+                                          <p:attrName>style.visibility</p:attrName>
+                                        </p:attrNameLst>
+                                      </p:cBhvr>
+                                      <p:to>
+                                        <p:strVal val="visible"/>
+                                      </p:to>
+                                    </p:set>
+                                  </p:childTnLst>
+                                </p:cTn>
+                              </p:par>
+                            </p:childTnLst>
+                          </p:cTn>
+                        </p:par>
+                      </p:childTnLst>
+                    </p:cTn>
+                  </p:par>
+                  <p:par>
+                    <p:cTn id="19" fill="hold">
+                      <p:stCondLst>
+                        <p:cond delay="indefinite"/>
+                      </p:stCondLst>
+                      <p:childTnLst>
+                        <p:par>
+                          <p:cTn id="20" fill="hold">
+                            <p:stCondLst>
+                              <p:cond delay="0"/>
+                            </p:stCondLst>
+                            <p:childTnLst>
+                              <p:par>
+                                <p:cTn id="21" presetID="1" presetClass="entr" presetSubtype="0" fill="hold" nodeType="clickEffect">
+                                  <p:stCondLst>
+                                    <p:cond delay="0"/>
+                                  </p:stCondLst>
+                                  <p:childTnLst>
+                                    <p:set>
+                                      <p:cBhvr>
+                                        <p:cTn id="22" dur="1" fill="hold">
+                                          <p:stCondLst>
+                                            <p:cond delay="0"/>
+                                          </p:stCondLst>
+                                        </p:cTn>
+                                        <p:tgtEl>
+                                          <p:spTgt spid="4">
+                                            <p:txEl>
+                                              <p:pRg st="2" end="2"/>
+                                            </p:txEl>
+                                          </p:spTgt>
+                                        </p:tgtEl>
+                                        <p:attrNameLst>
+                                          <p:attrName>style.visibility</p:attrName>
+                                        </p:attrNameLst>
+                                      </p:cBhvr>
+                                      <p:to>
+                                        <p:strVal val="visible"/>
+                                      </p:to>
+                                    </p:set>
+                                  </p:childTnLst>
+                                </p:cTn>
+                              </p:par>
+                              <p:par>
+                                <p:cTn id="23" presetID="1" presetClass="entr" presetSubtype="0" fill="hold" nodeType="withEffect">
+                                  <p:stCondLst>
+                                    <p:cond delay="0"/>
+                                  </p:stCondLst>
+                                  <p:childTnLst>
+                                    <p:set>
+                                      <p:cBhvr>
+                                        <p:cTn id="24" dur="1" fill="hold">
+                                          <p:stCondLst>
+                                            <p:cond delay="0"/>
+                                          </p:stCondLst>
+                                        </p:cTn>
+                                        <p:tgtEl>
+                                          <p:spTgt spid="4">
+                                            <p:txEl>
+                                              <p:pRg st="3" end="3"/>
+                                            </p:txEl>
+                                          </p:spTgt>
+                                        </p:tgtEl>
+                                        <p:attrNameLst>
+                                          <p:attrName>style.visibility</p:attrName>
+                                        </p:attrNameLst>
+                                      </p:cBhvr>
+                                      <p:to>
+                                        <p:strVal val="visible"/>
+                                      </p:to>
+                                    </p:set>
+                                  </p:childTnLst>
+                                </p:cTn>
+                              </p:par>
+                            </p:childTnLst>
+                          </p:cTn>
+                        </p:par>
+                      </p:childTnLst>
+                    </p:cTn>
+                  </p:par>
+                </p:childTnLst>
+              </p:cTn>
+              <p:prevCondLst>
+                <p:cond evt="onPrev" delay="0">
+                  <p:tgtEl>
+                    <p:sldTgt/>
+                  </p:tgtEl>
+                </p:cond>
+              </p:prevCondLst>
+              <p:nextCondLst>
+                <p:cond evt="onNext" delay="0">
+                  <p:tgtEl>
+                    <p:sldTgt/>
+                  </p:tgtEl>
+                </p:cond>
+              </p:nextCondLst>
+            </p:seq>
+          </p:childTnLst>
+        </p:cTn>
+      </p:par>
+    </p:tnLst>
+  </p:timing>
+</p:sld>
+</file>
+
+<file path=ppt/slides/slide7.xml><?xml version="1.0" encoding="utf-8"?>
+<p:sld xmlns:a="http://schemas.openxmlformats.org/drawingml/2006/main" xmlns:r="http://schemas.openxmlformats.org/officeDocument/2006/relationships" xmlns:p="http://schemas.openxmlformats.org/presentationml/2006/main">
+  <p:cSld>
+    <p:spTree>
+      <p:nvGrpSpPr>
+        <p:cNvPr id="1" name=""/>
+        <p:cNvGrpSpPr/>
+        <p:nvPr/>
+      </p:nvGrpSpPr>
+      <p:grpSpPr>
+        <a:xfrm>
+          <a:off x="0" y="0"/>
+          <a:ext cx="0" cy="0"/>
+          <a:chOff x="0" y="0"/>
+          <a:chExt cx="0" cy="0"/>
+        </a:xfrm>
+      </p:grpSpPr>
+      <p:sp>
+        <p:nvSpPr>
+          <p:cNvPr id="2" name="Title 1">
+            <a:extLst>
+              <a:ext uri="{FF2B5EF4-FFF2-40B4-BE49-F238E27FC236}">
+                <a16:creationId xmlns:a16="http://schemas.microsoft.com/office/drawing/2014/main" id="{E032997E-1C3A-7EC4-901A-4E5D547B05AF}"/>
+              </a:ext>
+            </a:extLst>
+          </p:cNvPr>
+          <p:cNvSpPr>
+            <a:spLocks noGrp="1"/>
+          </p:cNvSpPr>
+          <p:nvPr>
+            <p:ph type="title"/>
+          </p:nvPr>
+        </p:nvSpPr>
+        <p:spPr/>
+        <p:txBody>
+          <a:bodyPr>
+            <a:normAutofit fontScale="90000"/>
+          </a:bodyPr>
+          <a:lstStyle/>
+          <a:p>
+            <a:r>
+              <a:rPr lang="en-US" dirty="0"/>
+              <a:t>Typical Forms of linear regression models</a:t>
+            </a:r>
+          </a:p>
+        </p:txBody>
+      </p:sp>
+      <mc:AlternateContent xmlns:mc="http://schemas.openxmlformats.org/markup-compatibility/2006" xmlns:a14="http://schemas.microsoft.com/office/drawing/2010/main">
+        <mc:Choice Requires="a14">
+          <p:sp>
+            <p:nvSpPr>
+              <p:cNvPr id="3" name="Content Placeholder 2">
+                <a:extLst>
+                  <a:ext uri="{FF2B5EF4-FFF2-40B4-BE49-F238E27FC236}">
+                    <a16:creationId xmlns:a16="http://schemas.microsoft.com/office/drawing/2014/main" id="{6291388A-D814-0C2F-9289-708792D4ECBF}"/>
+                  </a:ext>
+                </a:extLst>
+              </p:cNvPr>
+              <p:cNvSpPr>
+                <a:spLocks noGrp="1"/>
+              </p:cNvSpPr>
+              <p:nvPr>
+                <p:ph sz="half" idx="1"/>
+              </p:nvPr>
+            </p:nvSpPr>
+            <p:spPr/>
+            <p:txBody>
+              <a:bodyPr/>
+              <a:lstStyle/>
+              <a:p>
+                <a:pPr marL="0" indent="0">
+                  <a:buNone/>
+                </a:pPr>
+                <a:r>
+                  <a:rPr lang="sv-SE" dirty="0">
+                    <a:latin typeface="Cambria Math" panose="02040503050406030204" pitchFamily="18" charset="0"/>
+                  </a:rPr>
+                  <a:t>Scalar Form</a:t>
+                </a:r>
+              </a:p>
+              <a:p>
+                <a14:m>
+                  <m:oMath xmlns:m="http://schemas.openxmlformats.org/officeDocument/2006/math">
+                    <m:sSub>
+                      <m:sSubPr>
+                        <m:ctrlPr>
+                          <a:rPr lang="sv-SE" i="1" dirty="0" smtClean="0">
+                            <a:latin typeface="Cambria Math" panose="02040503050406030204" pitchFamily="18" charset="0"/>
+                          </a:rPr>
+                        </m:ctrlPr>
+                      </m:sSubPr>
+                      <m:e>
+                        <m:r>
+                          <a:rPr lang="sv-SE" i="1" dirty="0" smtClean="0">
+                            <a:latin typeface="Cambria Math" panose="02040503050406030204" pitchFamily="18" charset="0"/>
+                          </a:rPr>
+                          <m:t>𝑦</m:t>
+                        </m:r>
+                      </m:e>
+                      <m:sub>
+                        <m:r>
+                          <a:rPr lang="sv-SE" i="1" dirty="0" smtClean="0">
+                            <a:latin typeface="Cambria Math" panose="02040503050406030204" pitchFamily="18" charset="0"/>
+                          </a:rPr>
+                          <m:t>𝑖</m:t>
+                        </m:r>
+                      </m:sub>
+                    </m:sSub>
+                    <m:r>
+                      <a:rPr lang="sv-SE" i="1" dirty="0" smtClean="0">
+                        <a:latin typeface="Cambria Math" panose="02040503050406030204" pitchFamily="18" charset="0"/>
+                      </a:rPr>
+                      <m:t>=</m:t>
+                    </m:r>
+                    <m:sSub>
+                      <m:sSubPr>
+                        <m:ctrlPr>
+                          <a:rPr lang="sv-SE" i="1" dirty="0" smtClean="0">
+                            <a:latin typeface="Cambria Math" panose="02040503050406030204" pitchFamily="18" charset="0"/>
+                          </a:rPr>
+                        </m:ctrlPr>
+                      </m:sSubPr>
+                      <m:e>
+                        <m:r>
+                          <a:rPr lang="sv-SE" i="1" dirty="0" smtClean="0">
+                            <a:latin typeface="Cambria Math" panose="02040503050406030204" pitchFamily="18" charset="0"/>
+                          </a:rPr>
+                          <m:t>𝛽</m:t>
+                        </m:r>
+                      </m:e>
+                      <m:sub>
+                        <m:r>
+                          <a:rPr lang="sv-SE" i="1" dirty="0" smtClean="0">
+                            <a:latin typeface="Cambria Math" panose="02040503050406030204" pitchFamily="18" charset="0"/>
+                          </a:rPr>
+                          <m:t>0</m:t>
+                        </m:r>
+                      </m:sub>
+                    </m:sSub>
+                    <m:r>
+                      <a:rPr lang="sv-SE" i="1" dirty="0" smtClean="0">
+                        <a:latin typeface="Cambria Math" panose="02040503050406030204" pitchFamily="18" charset="0"/>
+                      </a:rPr>
+                      <m:t>+</m:t>
+                    </m:r>
+                    <m:nary>
+                      <m:naryPr>
+                        <m:chr m:val="∑"/>
+                        <m:limLoc m:val="undOvr"/>
+                        <m:ctrlPr>
+                          <a:rPr lang="sv-SE" i="1" dirty="0" smtClean="0">
+                            <a:latin typeface="Cambria Math" panose="02040503050406030204" pitchFamily="18" charset="0"/>
+                          </a:rPr>
+                        </m:ctrlPr>
+                      </m:naryPr>
+                      <m:sub>
+                        <m:r>
+                          <a:rPr lang="sv-SE" i="1" dirty="0" smtClean="0">
+                            <a:latin typeface="Cambria Math" panose="02040503050406030204" pitchFamily="18" charset="0"/>
+                          </a:rPr>
+                          <m:t>𝑗</m:t>
+                        </m:r>
+                        <m:r>
+                          <a:rPr lang="sv-SE" i="1" dirty="0" smtClean="0">
+                            <a:latin typeface="Cambria Math" panose="02040503050406030204" pitchFamily="18" charset="0"/>
+                          </a:rPr>
+                          <m:t>=1</m:t>
+                        </m:r>
+                      </m:sub>
+                      <m:sup>
+                        <m:r>
+                          <a:rPr lang="sv-SE" i="1" dirty="0" smtClean="0">
+                            <a:latin typeface="Cambria Math" panose="02040503050406030204" pitchFamily="18" charset="0"/>
+                          </a:rPr>
+                          <m:t>𝑝</m:t>
+                        </m:r>
+                      </m:sup>
+                      <m:e>
+                        <m:sSub>
+                          <m:sSubPr>
+                            <m:ctrlPr>
+                              <a:rPr lang="sv-SE" i="1" dirty="0" smtClean="0">
+                                <a:latin typeface="Cambria Math" panose="02040503050406030204" pitchFamily="18" charset="0"/>
+                              </a:rPr>
+                            </m:ctrlPr>
+                          </m:sSubPr>
+                          <m:e>
+                            <m:r>
+                              <a:rPr lang="sv-SE" i="1" dirty="0" smtClean="0">
+                                <a:latin typeface="Cambria Math" panose="02040503050406030204" pitchFamily="18" charset="0"/>
+                              </a:rPr>
+                              <m:t>𝛽</m:t>
+                            </m:r>
+                          </m:e>
+                          <m:sub>
+                            <m:r>
+                              <a:rPr lang="sv-SE" i="1" dirty="0" smtClean="0">
+                                <a:latin typeface="Cambria Math" panose="02040503050406030204" pitchFamily="18" charset="0"/>
+                              </a:rPr>
+                              <m:t>𝑗</m:t>
+                            </m:r>
+                          </m:sub>
+                        </m:sSub>
+                      </m:e>
+                    </m:nary>
+                    <m:sSub>
+                      <m:sSubPr>
+                        <m:ctrlPr>
+                          <a:rPr lang="sv-SE" i="1" dirty="0" smtClean="0">
+                            <a:latin typeface="Cambria Math" panose="02040503050406030204" pitchFamily="18" charset="0"/>
+                          </a:rPr>
+                        </m:ctrlPr>
+                      </m:sSubPr>
+                      <m:e>
+                        <m:r>
+                          <a:rPr lang="sv-SE" i="1" dirty="0" smtClean="0">
+                            <a:latin typeface="Cambria Math" panose="02040503050406030204" pitchFamily="18" charset="0"/>
+                          </a:rPr>
+                          <m:t>𝑥</m:t>
+                        </m:r>
+                      </m:e>
+                      <m:sub>
+                        <m:r>
+                          <a:rPr lang="sv-SE" i="1" dirty="0" smtClean="0">
+                            <a:latin typeface="Cambria Math" panose="02040503050406030204" pitchFamily="18" charset="0"/>
+                          </a:rPr>
+                          <m:t>𝑖𝑗</m:t>
+                        </m:r>
+                      </m:sub>
+                    </m:sSub>
+                    <m:r>
+                      <a:rPr lang="sv-SE" i="1" dirty="0" smtClean="0">
+                        <a:latin typeface="Cambria Math" panose="02040503050406030204" pitchFamily="18" charset="0"/>
+                      </a:rPr>
+                      <m:t>+</m:t>
+                    </m:r>
+                    <m:sSub>
+                      <m:sSubPr>
+                        <m:ctrlPr>
+                          <a:rPr lang="sv-SE" i="1" dirty="0" smtClean="0">
+                            <a:latin typeface="Cambria Math" panose="02040503050406030204" pitchFamily="18" charset="0"/>
+                          </a:rPr>
+                        </m:ctrlPr>
+                      </m:sSubPr>
+                      <m:e>
+                        <m:r>
+                          <a:rPr lang="sv-SE" i="1" dirty="0" smtClean="0">
+                            <a:latin typeface="Cambria Math" panose="02040503050406030204" pitchFamily="18" charset="0"/>
+                          </a:rPr>
+                          <m:t>𝜀</m:t>
+                        </m:r>
+                      </m:e>
+                      <m:sub>
+                        <m:r>
+                          <a:rPr lang="sv-SE" i="1" dirty="0" smtClean="0">
+                            <a:latin typeface="Cambria Math" panose="02040503050406030204" pitchFamily="18" charset="0"/>
+                          </a:rPr>
+                          <m:t>𝑖</m:t>
+                        </m:r>
+                      </m:sub>
+                    </m:sSub>
+                    <m:r>
+                      <a:rPr lang="sv-SE" i="1" dirty="0" smtClean="0">
+                        <a:latin typeface="Cambria Math" panose="02040503050406030204" pitchFamily="18" charset="0"/>
+                      </a:rPr>
+                      <m:t> </m:t>
+                    </m:r>
+                    <m:r>
+                      <m:rPr>
+                        <m:nor/>
+                      </m:rPr>
+                      <a:rPr lang="sv-SE" i="0" dirty="0" smtClean="0">
+                        <a:latin typeface="Cambria Math" panose="02040503050406030204" pitchFamily="18" charset="0"/>
+                      </a:rPr>
+                      <m:t> for </m:t>
+                    </m:r>
+                    <m:r>
+                      <a:rPr lang="sv-SE" i="1" dirty="0" smtClean="0">
+                        <a:latin typeface="Cambria Math" panose="02040503050406030204" pitchFamily="18" charset="0"/>
+                      </a:rPr>
+                      <m:t>𝑖</m:t>
+                    </m:r>
+                    <m:r>
+                      <a:rPr lang="sv-SE" i="1" dirty="0" smtClean="0">
+                        <a:latin typeface="Cambria Math" panose="02040503050406030204" pitchFamily="18" charset="0"/>
+                      </a:rPr>
+                      <m:t>=1,2,…,</m:t>
+                    </m:r>
+                    <m:r>
+                      <a:rPr lang="sv-SE" i="1" dirty="0" smtClean="0">
+                        <a:latin typeface="Cambria Math" panose="02040503050406030204" pitchFamily="18" charset="0"/>
+                      </a:rPr>
+                      <m:t>𝑛</m:t>
+                    </m:r>
+                  </m:oMath>
+                </a14:m>
+                <a:endParaRPr lang="sv-SE" dirty="0">
+                  <a:latin typeface="Cambria Math" panose="02040503050406030204" pitchFamily="18" charset="0"/>
+                </a:endParaRPr>
+              </a:p>
+            </p:txBody>
+          </p:sp>
+        </mc:Choice>
+        <mc:Fallback xmlns="">
+          <p:sp>
+            <p:nvSpPr>
+              <p:cNvPr id="3" name="Content Placeholder 2">
+                <a:extLst>
+                  <a:ext uri="{FF2B5EF4-FFF2-40B4-BE49-F238E27FC236}">
+                    <a16:creationId xmlns:a16="http://schemas.microsoft.com/office/drawing/2014/main" id="{6291388A-D814-0C2F-9289-708792D4ECBF}"/>
+                  </a:ext>
+                </a:extLst>
+              </p:cNvPr>
+              <p:cNvSpPr>
+                <a:spLocks noGrp="1" noRot="1" noChangeAspect="1" noMove="1" noResize="1" noEditPoints="1" noAdjustHandles="1" noChangeArrowheads="1" noChangeShapeType="1" noTextEdit="1"/>
+              </p:cNvSpPr>
+              <p:nvPr>
+                <p:ph sz="half" idx="1"/>
+              </p:nvPr>
+            </p:nvSpPr>
+            <p:spPr>
+              <a:blipFill>
+                <a:blip r:embed="rId2"/>
+                <a:stretch>
+                  <a:fillRect l="-1287" t="-979" r="-1287"/>
+                </a:stretch>
+              </a:blipFill>
+            </p:spPr>
+            <p:txBody>
+              <a:bodyPr/>
+              <a:lstStyle/>
+              <a:p>
+                <a:r>
+                  <a:rPr lang="en-US">
+                    <a:noFill/>
+                  </a:rPr>
+                  <a:t> </a:t>
+                </a:r>
+              </a:p>
+            </p:txBody>
+          </p:sp>
+        </mc:Fallback>
+      </mc:AlternateContent>
+      <mc:AlternateContent xmlns:mc="http://schemas.openxmlformats.org/markup-compatibility/2006" xmlns:a14="http://schemas.microsoft.com/office/drawing/2010/main">
+        <mc:Choice Requires="a14">
+          <p:sp>
+            <p:nvSpPr>
+              <p:cNvPr id="4" name="Content Placeholder 3">
+                <a:extLst>
+                  <a:ext uri="{FF2B5EF4-FFF2-40B4-BE49-F238E27FC236}">
+                    <a16:creationId xmlns:a16="http://schemas.microsoft.com/office/drawing/2014/main" id="{ED737C0F-8011-2262-F9F9-0E2BB7891DBF}"/>
+                  </a:ext>
+                </a:extLst>
+              </p:cNvPr>
+              <p:cNvSpPr>
+                <a:spLocks noGrp="1"/>
+              </p:cNvSpPr>
+              <p:nvPr>
+                <p:ph sz="half" idx="2"/>
+              </p:nvPr>
+            </p:nvSpPr>
+            <p:spPr/>
+            <p:txBody>
+              <a:bodyPr/>
+              <a:lstStyle/>
+              <a:p>
+                <a:pPr marL="0" indent="0">
+                  <a:buNone/>
+                </a:pPr>
+                <a:r>
+                  <a:rPr lang="en-US" dirty="0">
+                    <a:latin typeface="Cambria Math" panose="02040503050406030204" pitchFamily="18" charset="0"/>
+                  </a:rPr>
+                  <a:t>Matrix Notation</a:t>
+                </a:r>
+              </a:p>
+              <a:p>
+                <a14:m>
+                  <m:oMath xmlns:m="http://schemas.openxmlformats.org/officeDocument/2006/math">
+                    <m:r>
+                      <a:rPr lang="en-US" b="1" i="1" smtClean="0">
+                        <a:latin typeface="Cambria Math" panose="02040503050406030204" pitchFamily="18" charset="0"/>
+                      </a:rPr>
+                      <m:t>𝐲</m:t>
+                    </m:r>
+                    <m:r>
+                      <a:rPr lang="en-US" b="0" i="1">
+                        <a:latin typeface="Cambria Math" panose="02040503050406030204" pitchFamily="18" charset="0"/>
+                      </a:rPr>
+                      <m:t>=</m:t>
+                    </m:r>
+                    <m:r>
+                      <a:rPr lang="en-US" b="1" i="1">
+                        <a:latin typeface="Cambria Math" panose="02040503050406030204" pitchFamily="18" charset="0"/>
+                      </a:rPr>
+                      <m:t>𝐗</m:t>
+                    </m:r>
+                    <m:r>
+                      <a:rPr lang="en-US" b="1" i="1">
+                        <a:latin typeface="Cambria Math" panose="02040503050406030204" pitchFamily="18" charset="0"/>
+                      </a:rPr>
+                      <m:t>𝜷</m:t>
+                    </m:r>
+                    <m:r>
+                      <a:rPr lang="en-US" b="0" i="1">
+                        <a:latin typeface="Cambria Math" panose="02040503050406030204" pitchFamily="18" charset="0"/>
+                      </a:rPr>
+                      <m:t>+</m:t>
+                    </m:r>
+                    <m:r>
+                      <a:rPr lang="en-US" b="1" i="1">
+                        <a:latin typeface="Cambria Math" panose="02040503050406030204" pitchFamily="18" charset="0"/>
+                      </a:rPr>
+                      <m:t>𝜺</m:t>
+                    </m:r>
+                  </m:oMath>
+                </a14:m>
+                <a:endParaRPr lang="en-US" dirty="0"/>
+              </a:p>
+            </p:txBody>
+          </p:sp>
+        </mc:Choice>
+        <mc:Fallback xmlns="">
+          <p:sp>
+            <p:nvSpPr>
+              <p:cNvPr id="4" name="Content Placeholder 3">
+                <a:extLst>
+                  <a:ext uri="{FF2B5EF4-FFF2-40B4-BE49-F238E27FC236}">
+                    <a16:creationId xmlns:a16="http://schemas.microsoft.com/office/drawing/2014/main" id="{ED737C0F-8011-2262-F9F9-0E2BB7891DBF}"/>
+                  </a:ext>
+                </a:extLst>
+              </p:cNvPr>
+              <p:cNvSpPr>
+                <a:spLocks noGrp="1" noRot="1" noChangeAspect="1" noMove="1" noResize="1" noEditPoints="1" noAdjustHandles="1" noChangeArrowheads="1" noChangeShapeType="1" noTextEdit="1"/>
+              </p:cNvSpPr>
+              <p:nvPr>
+                <p:ph sz="half" idx="2"/>
+              </p:nvPr>
+            </p:nvSpPr>
+            <p:spPr>
+              <a:blipFill>
+                <a:blip r:embed="rId3"/>
+                <a:stretch>
+                  <a:fillRect l="-1170" t="-979"/>
+                </a:stretch>
+              </a:blipFill>
+            </p:spPr>
+            <p:txBody>
+              <a:bodyPr/>
+              <a:lstStyle/>
+              <a:p>
+                <a:r>
+                  <a:rPr lang="en-US">
+                    <a:noFill/>
+                  </a:rPr>
+                  <a:t> </a:t>
+                </a:r>
+              </a:p>
+            </p:txBody>
+          </p:sp>
+        </mc:Fallback>
+      </mc:AlternateContent>
+      <p:sp>
+        <p:nvSpPr>
+          <p:cNvPr id="5" name="TextBox 4">
+            <a:extLst>
+              <a:ext uri="{FF2B5EF4-FFF2-40B4-BE49-F238E27FC236}">
+                <a16:creationId xmlns:a16="http://schemas.microsoft.com/office/drawing/2014/main" id="{2571D62C-76C8-0EE0-4753-D2F021ACDA20}"/>
+              </a:ext>
+            </a:extLst>
+          </p:cNvPr>
+          <p:cNvSpPr txBox="1"/>
+          <p:nvPr/>
+        </p:nvSpPr>
+        <p:spPr>
+          <a:xfrm>
+            <a:off x="4373805" y="3594539"/>
+            <a:ext cx="2851037" cy="2308324"/>
+          </a:xfrm>
+          <a:prstGeom prst="rect">
+            <a:avLst/>
+          </a:prstGeom>
+          <a:noFill/>
+        </p:spPr>
+        <p:txBody>
+          <a:bodyPr wrap="none" rtlCol="0">
+            <a:spAutoFit/>
+          </a:bodyPr>
+          <a:lstStyle/>
+          <a:p>
+            <a:r>
+              <a:rPr lang="en-US" b="1" dirty="0"/>
+              <a:t>Assumptions</a:t>
+            </a:r>
+          </a:p>
+          <a:p>
+            <a:pPr marL="285750" indent="-285750">
+              <a:buFont typeface="Arial" panose="020B0604020202020204" pitchFamily="34" charset="0"/>
+              <a:buChar char="•"/>
+            </a:pPr>
+            <a:r>
+              <a:rPr lang="en-US" dirty="0"/>
+              <a:t>Linearity</a:t>
+            </a:r>
+          </a:p>
+          <a:p>
+            <a:pPr marL="285750" indent="-285750">
+              <a:buFont typeface="Arial" panose="020B0604020202020204" pitchFamily="34" charset="0"/>
+              <a:buChar char="•"/>
+            </a:pPr>
+            <a:r>
+              <a:rPr lang="en-US" dirty="0"/>
+              <a:t>Homoscedasticity</a:t>
+            </a:r>
+          </a:p>
+          <a:p>
+            <a:pPr marL="285750" indent="-285750">
+              <a:buFont typeface="Arial" panose="020B0604020202020204" pitchFamily="34" charset="0"/>
+              <a:buChar char="•"/>
+            </a:pPr>
+            <a:r>
+              <a:rPr lang="en-US" dirty="0"/>
+              <a:t>Independence of Errors</a:t>
+            </a:r>
+          </a:p>
+          <a:p>
+            <a:pPr marL="285750" indent="-285750">
+              <a:buFont typeface="Arial" panose="020B0604020202020204" pitchFamily="34" charset="0"/>
+              <a:buChar char="•"/>
+            </a:pPr>
+            <a:r>
+              <a:rPr lang="en-US" dirty="0"/>
+              <a:t>Normal Residuals</a:t>
+            </a:r>
+          </a:p>
+          <a:p>
+            <a:pPr marL="285750" indent="-285750">
+              <a:buFont typeface="Arial" panose="020B0604020202020204" pitchFamily="34" charset="0"/>
+              <a:buChar char="•"/>
+            </a:pPr>
+            <a:r>
+              <a:rPr lang="en-US" dirty="0"/>
+              <a:t>No Multicollinearity</a:t>
+            </a:r>
+          </a:p>
+          <a:p>
+            <a:pPr marL="285750" indent="-285750">
+              <a:buFont typeface="Arial" panose="020B0604020202020204" pitchFamily="34" charset="0"/>
+              <a:buChar char="•"/>
+            </a:pPr>
+            <a:endParaRPr lang="en-US" dirty="0"/>
+          </a:p>
+          <a:p>
+            <a:endParaRPr lang="en-US" b="1" dirty="0"/>
+          </a:p>
+        </p:txBody>
+      </p:sp>
+    </p:spTree>
+    <p:extLst>
+      <p:ext uri="{BB962C8B-B14F-4D97-AF65-F5344CB8AC3E}">
+        <p14:creationId xmlns:p14="http://schemas.microsoft.com/office/powerpoint/2010/main" val="3707712987"/>
+      </p:ext>
+    </p:extLst>
+  </p:cSld>
+  <p:clrMapOvr>
+    <a:masterClrMapping/>
+  </p:clrMapOvr>
+  <p:timing>
+    <p:tnLst>
+      <p:par>
+        <p:cTn id="1" dur="indefinite" restart="never" nodeType="tmRoot">
+          <p:childTnLst>
+            <p:seq concurrent="1" nextAc="seek">
+              <p:cTn id="2" dur="indefinite" nodeType="mainSeq">
+                <p:childTnLst>
+                  <p:par>
+                    <p:cTn id="3" fill="hold">
+                      <p:stCondLst>
+                        <p:cond delay="indefinite"/>
+                      </p:stCondLst>
+                      <p:childTnLst>
+                        <p:par>
+                          <p:cTn id="4" fill="hold">
+                            <p:stCondLst>
+                              <p:cond delay="0"/>
+                            </p:stCondLst>
+                            <p:childTnLst>
+                              <p:par>
+                                <p:cTn id="5" presetID="1" presetClass="entr" presetSubtype="0" fill="hold" grpId="0" nodeType="clickEffect">
+                                  <p:stCondLst>
+                                    <p:cond delay="0"/>
+                                  </p:stCondLst>
+                                  <p:childTnLst>
+                                    <p:set>
+                                      <p:cBhvr>
+                                        <p:cTn id="6" dur="1" fill="hold">
+                                          <p:stCondLst>
+                                            <p:cond delay="0"/>
+                                          </p:stCondLst>
+                                        </p:cTn>
+                                        <p:tgtEl>
+                                          <p:spTgt spid="3">
                                             <p:txEl>
                                               <p:pRg st="0" end="0"/>
                                             </p:txEl>
@@ -14276,7 +11866,7 @@
                             </p:stCondLst>
                             <p:childTnLst>
                               <p:par>
-                                <p:cTn id="9" presetID="1" presetClass="entr" presetSubtype="0" fill="hold" nodeType="clickEffect">
+                                <p:cTn id="9" presetID="1" presetClass="entr" presetSubtype="0" fill="hold" grpId="0" nodeType="clickEffect">
                                   <p:stCondLst>
                                     <p:cond delay="0"/>
                                   </p:stCondLst>
@@ -14340,7 +11930,1124 @@
                                         <p:tgtEl>
                                           <p:spTgt spid="4">
                                             <p:txEl>
+                                              <p:pRg st="0" end="0"/>
+                                            </p:txEl>
+                                          </p:spTgt>
+                                        </p:tgtEl>
+                                        <p:attrNameLst>
+                                          <p:attrName>style.visibility</p:attrName>
+                                        </p:attrNameLst>
+                                      </p:cBhvr>
+                                      <p:to>
+                                        <p:strVal val="visible"/>
+                                      </p:to>
+                                    </p:set>
+                                  </p:childTnLst>
+                                </p:cTn>
+                              </p:par>
+                              <p:par>
+                                <p:cTn id="15" presetID="1" presetClass="entr" presetSubtype="0" fill="hold" nodeType="withEffect">
+                                  <p:stCondLst>
+                                    <p:cond delay="0"/>
+                                  </p:stCondLst>
+                                  <p:childTnLst>
+                                    <p:set>
+                                      <p:cBhvr>
+                                        <p:cTn id="16" dur="1" fill="hold">
+                                          <p:stCondLst>
+                                            <p:cond delay="0"/>
+                                          </p:stCondLst>
+                                        </p:cTn>
+                                        <p:tgtEl>
+                                          <p:spTgt spid="4">
+                                            <p:txEl>
                                               <p:pRg st="1" end="1"/>
+                                            </p:txEl>
+                                          </p:spTgt>
+                                        </p:tgtEl>
+                                        <p:attrNameLst>
+                                          <p:attrName>style.visibility</p:attrName>
+                                        </p:attrNameLst>
+                                      </p:cBhvr>
+                                      <p:to>
+                                        <p:strVal val="visible"/>
+                                      </p:to>
+                                    </p:set>
+                                  </p:childTnLst>
+                                </p:cTn>
+                              </p:par>
+                            </p:childTnLst>
+                          </p:cTn>
+                        </p:par>
+                      </p:childTnLst>
+                    </p:cTn>
+                  </p:par>
+                  <p:par>
+                    <p:cTn id="17" fill="hold">
+                      <p:stCondLst>
+                        <p:cond delay="indefinite"/>
+                      </p:stCondLst>
+                      <p:childTnLst>
+                        <p:par>
+                          <p:cTn id="18" fill="hold">
+                            <p:stCondLst>
+                              <p:cond delay="0"/>
+                            </p:stCondLst>
+                            <p:childTnLst>
+                              <p:par>
+                                <p:cTn id="19" presetID="1" presetClass="entr" presetSubtype="0" fill="hold" nodeType="clickEffect">
+                                  <p:stCondLst>
+                                    <p:cond delay="0"/>
+                                  </p:stCondLst>
+                                  <p:childTnLst>
+                                    <p:set>
+                                      <p:cBhvr>
+                                        <p:cTn id="20" dur="1" fill="hold">
+                                          <p:stCondLst>
+                                            <p:cond delay="0"/>
+                                          </p:stCondLst>
+                                        </p:cTn>
+                                        <p:tgtEl>
+                                          <p:spTgt spid="5">
+                                            <p:txEl>
+                                              <p:pRg st="0" end="0"/>
+                                            </p:txEl>
+                                          </p:spTgt>
+                                        </p:tgtEl>
+                                        <p:attrNameLst>
+                                          <p:attrName>style.visibility</p:attrName>
+                                        </p:attrNameLst>
+                                      </p:cBhvr>
+                                      <p:to>
+                                        <p:strVal val="visible"/>
+                                      </p:to>
+                                    </p:set>
+                                  </p:childTnLst>
+                                </p:cTn>
+                              </p:par>
+                            </p:childTnLst>
+                          </p:cTn>
+                        </p:par>
+                      </p:childTnLst>
+                    </p:cTn>
+                  </p:par>
+                  <p:par>
+                    <p:cTn id="21" fill="hold">
+                      <p:stCondLst>
+                        <p:cond delay="indefinite"/>
+                      </p:stCondLst>
+                      <p:childTnLst>
+                        <p:par>
+                          <p:cTn id="22" fill="hold">
+                            <p:stCondLst>
+                              <p:cond delay="0"/>
+                            </p:stCondLst>
+                            <p:childTnLst>
+                              <p:par>
+                                <p:cTn id="23" presetID="1" presetClass="entr" presetSubtype="0" fill="hold" nodeType="clickEffect">
+                                  <p:stCondLst>
+                                    <p:cond delay="0"/>
+                                  </p:stCondLst>
+                                  <p:childTnLst>
+                                    <p:set>
+                                      <p:cBhvr>
+                                        <p:cTn id="24" dur="1" fill="hold">
+                                          <p:stCondLst>
+                                            <p:cond delay="0"/>
+                                          </p:stCondLst>
+                                        </p:cTn>
+                                        <p:tgtEl>
+                                          <p:spTgt spid="5">
+                                            <p:txEl>
+                                              <p:pRg st="1" end="1"/>
+                                            </p:txEl>
+                                          </p:spTgt>
+                                        </p:tgtEl>
+                                        <p:attrNameLst>
+                                          <p:attrName>style.visibility</p:attrName>
+                                        </p:attrNameLst>
+                                      </p:cBhvr>
+                                      <p:to>
+                                        <p:strVal val="visible"/>
+                                      </p:to>
+                                    </p:set>
+                                  </p:childTnLst>
+                                </p:cTn>
+                              </p:par>
+                            </p:childTnLst>
+                          </p:cTn>
+                        </p:par>
+                      </p:childTnLst>
+                    </p:cTn>
+                  </p:par>
+                  <p:par>
+                    <p:cTn id="25" fill="hold">
+                      <p:stCondLst>
+                        <p:cond delay="indefinite"/>
+                      </p:stCondLst>
+                      <p:childTnLst>
+                        <p:par>
+                          <p:cTn id="26" fill="hold">
+                            <p:stCondLst>
+                              <p:cond delay="0"/>
+                            </p:stCondLst>
+                            <p:childTnLst>
+                              <p:par>
+                                <p:cTn id="27" presetID="1" presetClass="entr" presetSubtype="0" fill="hold" nodeType="clickEffect">
+                                  <p:stCondLst>
+                                    <p:cond delay="0"/>
+                                  </p:stCondLst>
+                                  <p:childTnLst>
+                                    <p:set>
+                                      <p:cBhvr>
+                                        <p:cTn id="28" dur="1" fill="hold">
+                                          <p:stCondLst>
+                                            <p:cond delay="0"/>
+                                          </p:stCondLst>
+                                        </p:cTn>
+                                        <p:tgtEl>
+                                          <p:spTgt spid="5">
+                                            <p:txEl>
+                                              <p:pRg st="2" end="2"/>
+                                            </p:txEl>
+                                          </p:spTgt>
+                                        </p:tgtEl>
+                                        <p:attrNameLst>
+                                          <p:attrName>style.visibility</p:attrName>
+                                        </p:attrNameLst>
+                                      </p:cBhvr>
+                                      <p:to>
+                                        <p:strVal val="visible"/>
+                                      </p:to>
+                                    </p:set>
+                                  </p:childTnLst>
+                                </p:cTn>
+                              </p:par>
+                            </p:childTnLst>
+                          </p:cTn>
+                        </p:par>
+                      </p:childTnLst>
+                    </p:cTn>
+                  </p:par>
+                  <p:par>
+                    <p:cTn id="29" fill="hold">
+                      <p:stCondLst>
+                        <p:cond delay="indefinite"/>
+                      </p:stCondLst>
+                      <p:childTnLst>
+                        <p:par>
+                          <p:cTn id="30" fill="hold">
+                            <p:stCondLst>
+                              <p:cond delay="0"/>
+                            </p:stCondLst>
+                            <p:childTnLst>
+                              <p:par>
+                                <p:cTn id="31" presetID="1" presetClass="entr" presetSubtype="0" fill="hold" nodeType="clickEffect">
+                                  <p:stCondLst>
+                                    <p:cond delay="0"/>
+                                  </p:stCondLst>
+                                  <p:childTnLst>
+                                    <p:set>
+                                      <p:cBhvr>
+                                        <p:cTn id="32" dur="1" fill="hold">
+                                          <p:stCondLst>
+                                            <p:cond delay="0"/>
+                                          </p:stCondLst>
+                                        </p:cTn>
+                                        <p:tgtEl>
+                                          <p:spTgt spid="5">
+                                            <p:txEl>
+                                              <p:pRg st="3" end="3"/>
+                                            </p:txEl>
+                                          </p:spTgt>
+                                        </p:tgtEl>
+                                        <p:attrNameLst>
+                                          <p:attrName>style.visibility</p:attrName>
+                                        </p:attrNameLst>
+                                      </p:cBhvr>
+                                      <p:to>
+                                        <p:strVal val="visible"/>
+                                      </p:to>
+                                    </p:set>
+                                  </p:childTnLst>
+                                </p:cTn>
+                              </p:par>
+                            </p:childTnLst>
+                          </p:cTn>
+                        </p:par>
+                      </p:childTnLst>
+                    </p:cTn>
+                  </p:par>
+                  <p:par>
+                    <p:cTn id="33" fill="hold">
+                      <p:stCondLst>
+                        <p:cond delay="indefinite"/>
+                      </p:stCondLst>
+                      <p:childTnLst>
+                        <p:par>
+                          <p:cTn id="34" fill="hold">
+                            <p:stCondLst>
+                              <p:cond delay="0"/>
+                            </p:stCondLst>
+                            <p:childTnLst>
+                              <p:par>
+                                <p:cTn id="35" presetID="1" presetClass="entr" presetSubtype="0" fill="hold" nodeType="clickEffect">
+                                  <p:stCondLst>
+                                    <p:cond delay="0"/>
+                                  </p:stCondLst>
+                                  <p:childTnLst>
+                                    <p:set>
+                                      <p:cBhvr>
+                                        <p:cTn id="36" dur="1" fill="hold">
+                                          <p:stCondLst>
+                                            <p:cond delay="0"/>
+                                          </p:stCondLst>
+                                        </p:cTn>
+                                        <p:tgtEl>
+                                          <p:spTgt spid="5">
+                                            <p:txEl>
+                                              <p:pRg st="4" end="4"/>
+                                            </p:txEl>
+                                          </p:spTgt>
+                                        </p:tgtEl>
+                                        <p:attrNameLst>
+                                          <p:attrName>style.visibility</p:attrName>
+                                        </p:attrNameLst>
+                                      </p:cBhvr>
+                                      <p:to>
+                                        <p:strVal val="visible"/>
+                                      </p:to>
+                                    </p:set>
+                                  </p:childTnLst>
+                                </p:cTn>
+                              </p:par>
+                            </p:childTnLst>
+                          </p:cTn>
+                        </p:par>
+                      </p:childTnLst>
+                    </p:cTn>
+                  </p:par>
+                  <p:par>
+                    <p:cTn id="37" fill="hold">
+                      <p:stCondLst>
+                        <p:cond delay="indefinite"/>
+                      </p:stCondLst>
+                      <p:childTnLst>
+                        <p:par>
+                          <p:cTn id="38" fill="hold">
+                            <p:stCondLst>
+                              <p:cond delay="0"/>
+                            </p:stCondLst>
+                            <p:childTnLst>
+                              <p:par>
+                                <p:cTn id="39" presetID="1" presetClass="entr" presetSubtype="0" fill="hold" nodeType="clickEffect">
+                                  <p:stCondLst>
+                                    <p:cond delay="0"/>
+                                  </p:stCondLst>
+                                  <p:childTnLst>
+                                    <p:set>
+                                      <p:cBhvr>
+                                        <p:cTn id="40" dur="1" fill="hold">
+                                          <p:stCondLst>
+                                            <p:cond delay="0"/>
+                                          </p:stCondLst>
+                                        </p:cTn>
+                                        <p:tgtEl>
+                                          <p:spTgt spid="5">
+                                            <p:txEl>
+                                              <p:pRg st="5" end="5"/>
+                                            </p:txEl>
+                                          </p:spTgt>
+                                        </p:tgtEl>
+                                        <p:attrNameLst>
+                                          <p:attrName>style.visibility</p:attrName>
+                                        </p:attrNameLst>
+                                      </p:cBhvr>
+                                      <p:to>
+                                        <p:strVal val="visible"/>
+                                      </p:to>
+                                    </p:set>
+                                  </p:childTnLst>
+                                </p:cTn>
+                              </p:par>
+                            </p:childTnLst>
+                          </p:cTn>
+                        </p:par>
+                      </p:childTnLst>
+                    </p:cTn>
+                  </p:par>
+                </p:childTnLst>
+              </p:cTn>
+              <p:prevCondLst>
+                <p:cond evt="onPrev" delay="0">
+                  <p:tgtEl>
+                    <p:sldTgt/>
+                  </p:tgtEl>
+                </p:cond>
+              </p:prevCondLst>
+              <p:nextCondLst>
+                <p:cond evt="onNext" delay="0">
+                  <p:tgtEl>
+                    <p:sldTgt/>
+                  </p:tgtEl>
+                </p:cond>
+              </p:nextCondLst>
+            </p:seq>
+          </p:childTnLst>
+        </p:cTn>
+      </p:par>
+    </p:tnLst>
+    <p:bldLst>
+      <p:bldP spid="3" grpId="0" build="p"/>
+    </p:bldLst>
+  </p:timing>
+</p:sld>
+</file>
+
+<file path=ppt/slides/slide8.xml><?xml version="1.0" encoding="utf-8"?>
+<p:sld xmlns:a="http://schemas.openxmlformats.org/drawingml/2006/main" xmlns:r="http://schemas.openxmlformats.org/officeDocument/2006/relationships" xmlns:p="http://schemas.openxmlformats.org/presentationml/2006/main">
+  <p:cSld>
+    <p:spTree>
+      <p:nvGrpSpPr>
+        <p:cNvPr id="1" name=""/>
+        <p:cNvGrpSpPr/>
+        <p:nvPr/>
+      </p:nvGrpSpPr>
+      <p:grpSpPr>
+        <a:xfrm>
+          <a:off x="0" y="0"/>
+          <a:ext cx="0" cy="0"/>
+          <a:chOff x="0" y="0"/>
+          <a:chExt cx="0" cy="0"/>
+        </a:xfrm>
+      </p:grpSpPr>
+      <p:sp>
+        <p:nvSpPr>
+          <p:cNvPr id="2" name="Title 1">
+            <a:extLst>
+              <a:ext uri="{FF2B5EF4-FFF2-40B4-BE49-F238E27FC236}">
+                <a16:creationId xmlns:a16="http://schemas.microsoft.com/office/drawing/2014/main" id="{CA172A30-A5E5-419A-C060-ACFA4DC7E9BD}"/>
+              </a:ext>
+            </a:extLst>
+          </p:cNvPr>
+          <p:cNvSpPr>
+            <a:spLocks noGrp="1"/>
+          </p:cNvSpPr>
+          <p:nvPr>
+            <p:ph type="title"/>
+          </p:nvPr>
+        </p:nvSpPr>
+        <p:spPr/>
+        <p:txBody>
+          <a:bodyPr/>
+          <a:lstStyle/>
+          <a:p>
+            <a:r>
+              <a:rPr lang="en-US" dirty="0"/>
+              <a:t>Ordinary least squares objective</a:t>
+            </a:r>
+          </a:p>
+        </p:txBody>
+      </p:sp>
+      <mc:AlternateContent xmlns:mc="http://schemas.openxmlformats.org/markup-compatibility/2006">
+        <mc:Choice xmlns:a14="http://schemas.microsoft.com/office/drawing/2010/main" Requires="a14">
+          <p:sp>
+            <p:nvSpPr>
+              <p:cNvPr id="3" name="Content Placeholder 2">
+                <a:extLst>
+                  <a:ext uri="{FF2B5EF4-FFF2-40B4-BE49-F238E27FC236}">
+                    <a16:creationId xmlns:a16="http://schemas.microsoft.com/office/drawing/2014/main" id="{F2AC4BA7-6E27-AC88-A788-092EA31ACEA5}"/>
+                  </a:ext>
+                </a:extLst>
+              </p:cNvPr>
+              <p:cNvSpPr>
+                <a:spLocks noGrp="1"/>
+              </p:cNvSpPr>
+              <p:nvPr>
+                <p:ph sz="half" idx="1"/>
+              </p:nvPr>
+            </p:nvSpPr>
+            <p:spPr/>
+            <p:txBody>
+              <a:bodyPr/>
+              <a:lstStyle/>
+              <a:p>
+                <a:r>
+                  <a:rPr lang="en-US" dirty="0"/>
+                  <a:t>We want  </a:t>
+                </a:r>
+                <a14:m>
+                  <m:oMath xmlns:m="http://schemas.openxmlformats.org/officeDocument/2006/math">
+                    <m:acc>
+                      <m:accPr>
+                        <m:chr m:val="̂"/>
+                        <m:ctrlPr>
+                          <a:rPr lang="en-US" i="1">
+                            <a:latin typeface="Cambria Math" panose="02040503050406030204" pitchFamily="18" charset="0"/>
+                          </a:rPr>
+                        </m:ctrlPr>
+                      </m:accPr>
+                      <m:e>
+                        <m:r>
+                          <a:rPr lang="en-US" i="1">
+                            <a:latin typeface="Cambria Math" panose="02040503050406030204" pitchFamily="18" charset="0"/>
+                          </a:rPr>
+                          <m:t>𝑦</m:t>
+                        </m:r>
+                      </m:e>
+                    </m:acc>
+                    <m:r>
+                      <a:rPr lang="en-US" i="1">
+                        <a:latin typeface="Cambria Math" panose="02040503050406030204" pitchFamily="18" charset="0"/>
+                      </a:rPr>
+                      <m:t>=</m:t>
+                    </m:r>
+                    <m:r>
+                      <a:rPr lang="en-US" i="1">
+                        <a:latin typeface="Cambria Math" panose="02040503050406030204" pitchFamily="18" charset="0"/>
+                      </a:rPr>
+                      <m:t>𝑋</m:t>
+                    </m:r>
+                    <m:r>
+                      <a:rPr lang="en-US" i="1">
+                        <a:latin typeface="Cambria Math" panose="02040503050406030204" pitchFamily="18" charset="0"/>
+                      </a:rPr>
+                      <m:t>𝛽</m:t>
+                    </m:r>
+                  </m:oMath>
+                </a14:m>
+                <a:r>
+                  <a:rPr lang="en-US" dirty="0"/>
+                  <a:t> to be a </a:t>
+                </a:r>
+                <a:r>
+                  <a:rPr lang="en-US" i="1" dirty="0"/>
+                  <a:t>good</a:t>
+                </a:r>
+                <a:r>
+                  <a:rPr lang="en-US" dirty="0"/>
+                  <a:t> approximation..</a:t>
+                </a:r>
+              </a:p>
+              <a:p>
+                <a:endParaRPr lang="en-US" dirty="0"/>
+              </a:p>
+              <a:p>
+                <a:r>
+                  <a:rPr lang="en-US" dirty="0"/>
+                  <a:t>How do we measure goodness?</a:t>
+                </a:r>
+              </a:p>
+              <a:p>
+                <a:r>
+                  <a:rPr lang="en-US" dirty="0"/>
+                  <a:t>We want </a:t>
+                </a:r>
+                <a14:m>
+                  <m:oMath xmlns:m="http://schemas.openxmlformats.org/officeDocument/2006/math">
+                    <m:r>
+                      <a:rPr lang="en-US" i="1" dirty="0">
+                        <a:latin typeface="Cambria Math" panose="02040503050406030204" pitchFamily="18" charset="0"/>
+                      </a:rPr>
+                      <m:t>𝑦</m:t>
+                    </m:r>
+                    <m:r>
+                      <a:rPr lang="en-US" i="1" dirty="0">
+                        <a:latin typeface="Cambria Math" panose="02040503050406030204" pitchFamily="18" charset="0"/>
+                      </a:rPr>
+                      <m:t>−</m:t>
+                    </m:r>
+                    <m:acc>
+                      <m:accPr>
+                        <m:chr m:val="̂"/>
+                        <m:ctrlPr>
+                          <a:rPr lang="en-US" i="1" dirty="0">
+                            <a:latin typeface="Cambria Math" panose="02040503050406030204" pitchFamily="18" charset="0"/>
+                          </a:rPr>
+                        </m:ctrlPr>
+                      </m:accPr>
+                      <m:e>
+                        <m:r>
+                          <a:rPr lang="en-US" i="1" dirty="0">
+                            <a:latin typeface="Cambria Math" panose="02040503050406030204" pitchFamily="18" charset="0"/>
+                          </a:rPr>
+                          <m:t>𝑦</m:t>
+                        </m:r>
+                      </m:e>
+                    </m:acc>
+                  </m:oMath>
+                </a14:m>
+                <a:r>
+                  <a:rPr lang="en-US" dirty="0"/>
+                  <a:t> to be </a:t>
+                </a:r>
+                <a:r>
+                  <a:rPr lang="en-US" i="1" dirty="0"/>
+                  <a:t>small.</a:t>
+                </a:r>
+                <a:endParaRPr lang="en-US" dirty="0"/>
+              </a:p>
+              <a:p>
+                <a:r>
+                  <a:rPr lang="en-US" dirty="0"/>
+                  <a:t>Why use </a:t>
+                </a:r>
+                <a14:m>
+                  <m:oMath xmlns:m="http://schemas.openxmlformats.org/officeDocument/2006/math">
+                    <m:sSup>
+                      <m:sSupPr>
+                        <m:ctrlPr>
+                          <a:rPr lang="en-US" i="1" dirty="0" smtClean="0">
+                            <a:latin typeface="Cambria Math" panose="02040503050406030204" pitchFamily="18" charset="0"/>
+                          </a:rPr>
+                        </m:ctrlPr>
+                      </m:sSupPr>
+                      <m:e>
+                        <m:d>
+                          <m:dPr>
+                            <m:ctrlPr>
+                              <a:rPr lang="en-US" i="1" dirty="0" smtClean="0">
+                                <a:latin typeface="Cambria Math" panose="02040503050406030204" pitchFamily="18" charset="0"/>
+                              </a:rPr>
+                            </m:ctrlPr>
+                          </m:dPr>
+                          <m:e>
+                            <m:r>
+                              <a:rPr lang="en-US" i="1" dirty="0" smtClean="0">
+                                <a:latin typeface="Cambria Math" panose="02040503050406030204" pitchFamily="18" charset="0"/>
+                              </a:rPr>
+                              <m:t>𝑦</m:t>
+                            </m:r>
+                            <m:r>
+                              <a:rPr lang="en-US" i="1" dirty="0" smtClean="0">
+                                <a:latin typeface="Cambria Math" panose="02040503050406030204" pitchFamily="18" charset="0"/>
+                              </a:rPr>
+                              <m:t>−</m:t>
+                            </m:r>
+                            <m:acc>
+                              <m:accPr>
+                                <m:chr m:val="̂"/>
+                                <m:ctrlPr>
+                                  <a:rPr lang="en-US" i="1" dirty="0" smtClean="0">
+                                    <a:latin typeface="Cambria Math" panose="02040503050406030204" pitchFamily="18" charset="0"/>
+                                  </a:rPr>
+                                </m:ctrlPr>
+                              </m:accPr>
+                              <m:e>
+                                <m:r>
+                                  <a:rPr lang="en-US" i="1" dirty="0" smtClean="0">
+                                    <a:latin typeface="Cambria Math" panose="02040503050406030204" pitchFamily="18" charset="0"/>
+                                  </a:rPr>
+                                  <m:t>𝑦</m:t>
+                                </m:r>
+                              </m:e>
+                            </m:acc>
+                          </m:e>
+                        </m:d>
+                      </m:e>
+                      <m:sup>
+                        <m:r>
+                          <a:rPr lang="en-US" i="1" dirty="0" smtClean="0">
+                            <a:latin typeface="Cambria Math" panose="02040503050406030204" pitchFamily="18" charset="0"/>
+                          </a:rPr>
+                          <m:t>2</m:t>
+                        </m:r>
+                      </m:sup>
+                    </m:sSup>
+                  </m:oMath>
+                </a14:m>
+                <a:r>
+                  <a:rPr lang="en-US" dirty="0"/>
+                  <a:t>and not </a:t>
+                </a:r>
+                <a14:m>
+                  <m:oMath xmlns:m="http://schemas.openxmlformats.org/officeDocument/2006/math">
+                    <m:d>
+                      <m:dPr>
+                        <m:begChr m:val="|"/>
+                        <m:endChr m:val="|"/>
+                        <m:ctrlPr>
+                          <a:rPr lang="en-US" i="1" dirty="0" smtClean="0">
+                            <a:latin typeface="Cambria Math" panose="02040503050406030204" pitchFamily="18" charset="0"/>
+                          </a:rPr>
+                        </m:ctrlPr>
+                      </m:dPr>
+                      <m:e>
+                        <m:r>
+                          <a:rPr lang="en-US" i="1" dirty="0" smtClean="0">
+                            <a:latin typeface="Cambria Math" panose="02040503050406030204" pitchFamily="18" charset="0"/>
+                          </a:rPr>
+                          <m:t>𝑦</m:t>
+                        </m:r>
+                        <m:r>
+                          <a:rPr lang="en-US" i="1" dirty="0" smtClean="0">
+                            <a:latin typeface="Cambria Math" panose="02040503050406030204" pitchFamily="18" charset="0"/>
+                          </a:rPr>
+                          <m:t>−</m:t>
+                        </m:r>
+                        <m:acc>
+                          <m:accPr>
+                            <m:chr m:val="̂"/>
+                            <m:ctrlPr>
+                              <a:rPr lang="en-US" i="1" dirty="0" smtClean="0">
+                                <a:latin typeface="Cambria Math" panose="02040503050406030204" pitchFamily="18" charset="0"/>
+                              </a:rPr>
+                            </m:ctrlPr>
+                          </m:accPr>
+                          <m:e>
+                            <m:r>
+                              <a:rPr lang="en-US" i="1" dirty="0" smtClean="0">
+                                <a:latin typeface="Cambria Math" panose="02040503050406030204" pitchFamily="18" charset="0"/>
+                              </a:rPr>
+                              <m:t>𝑦</m:t>
+                            </m:r>
+                          </m:e>
+                        </m:acc>
+                      </m:e>
+                    </m:d>
+                  </m:oMath>
+                </a14:m>
+                <a:r>
+                  <a:rPr lang="en-US" dirty="0"/>
+                  <a:t> ?</a:t>
+                </a:r>
+              </a:p>
+              <a:p>
+                <a:r>
+                  <a:rPr lang="en-US" dirty="0"/>
+                  <a:t>The objective function:</a:t>
+                </a:r>
+              </a:p>
+            </p:txBody>
+          </p:sp>
+        </mc:Choice>
+        <mc:Fallback>
+          <p:sp>
+            <p:nvSpPr>
+              <p:cNvPr id="3" name="Content Placeholder 2">
+                <a:extLst>
+                  <a:ext uri="{FF2B5EF4-FFF2-40B4-BE49-F238E27FC236}">
+                    <a16:creationId xmlns:a16="http://schemas.microsoft.com/office/drawing/2014/main" id="{F2AC4BA7-6E27-AC88-A788-092EA31ACEA5}"/>
+                  </a:ext>
+                </a:extLst>
+              </p:cNvPr>
+              <p:cNvSpPr>
+                <a:spLocks noGrp="1" noRot="1" noChangeAspect="1" noMove="1" noResize="1" noEditPoints="1" noAdjustHandles="1" noChangeArrowheads="1" noChangeShapeType="1" noTextEdit="1"/>
+              </p:cNvSpPr>
+              <p:nvPr>
+                <p:ph sz="half" idx="1"/>
+              </p:nvPr>
+            </p:nvSpPr>
+            <p:spPr>
+              <a:blipFill>
+                <a:blip r:embed="rId2"/>
+                <a:stretch>
+                  <a:fillRect l="-1053" t="-816"/>
+                </a:stretch>
+              </a:blipFill>
+            </p:spPr>
+            <p:txBody>
+              <a:bodyPr/>
+              <a:lstStyle/>
+              <a:p>
+                <a:r>
+                  <a:rPr lang="en-US">
+                    <a:noFill/>
+                  </a:rPr>
+                  <a:t> </a:t>
+                </a:r>
+              </a:p>
+            </p:txBody>
+          </p:sp>
+        </mc:Fallback>
+      </mc:AlternateContent>
+      <mc:AlternateContent xmlns:mc="http://schemas.openxmlformats.org/markup-compatibility/2006">
+        <mc:Choice xmlns:a14="http://schemas.microsoft.com/office/drawing/2010/main" Requires="a14">
+          <p:sp>
+            <p:nvSpPr>
+              <p:cNvPr id="8" name="TextBox 7">
+                <a:extLst>
+                  <a:ext uri="{FF2B5EF4-FFF2-40B4-BE49-F238E27FC236}">
+                    <a16:creationId xmlns:a16="http://schemas.microsoft.com/office/drawing/2014/main" id="{D4A754CF-C3FE-6DEE-57BA-C1A4427C4C64}"/>
+                  </a:ext>
+                </a:extLst>
+              </p:cNvPr>
+              <p:cNvSpPr txBox="1"/>
+              <p:nvPr/>
+            </p:nvSpPr>
+            <p:spPr>
+              <a:xfrm>
+                <a:off x="5060442" y="3223218"/>
+                <a:ext cx="6096762" cy="612732"/>
+              </a:xfrm>
+              <a:prstGeom prst="rect">
+                <a:avLst/>
+              </a:prstGeom>
+              <a:noFill/>
+            </p:spPr>
+            <p:txBody>
+              <a:bodyPr wrap="square">
+                <a:spAutoFit/>
+              </a:bodyPr>
+              <a:lstStyle/>
+              <a:p>
+                <a:pPr/>
+                <a14:m>
+                  <m:oMathPara xmlns:m="http://schemas.openxmlformats.org/officeDocument/2006/math">
+                    <m:oMath>
+                      <m:r>
+                        <a:rPr lang="fr-FR" i="1" dirty="0" smtClean="0">
+                          <a:latin typeface="Cambria Math" panose="02040503050406030204" pitchFamily="18" charset="0"/>
+                        </a:rPr>
+                        <m:t>𝐽</m:t>
+                      </m:r>
+                      <m:d>
+                        <m:dPr>
+                          <m:ctrlPr>
+                            <a:rPr lang="fr-FR" i="1" dirty="0" smtClean="0">
+                              <a:latin typeface="Cambria Math" panose="02040503050406030204" pitchFamily="18" charset="0"/>
+                            </a:rPr>
+                          </m:ctrlPr>
+                        </m:dPr>
+                        <m:e>
+                          <m:r>
+                            <a:rPr lang="fr-FR" i="1" dirty="0" smtClean="0">
+                              <a:latin typeface="Cambria Math" panose="02040503050406030204" pitchFamily="18" charset="0"/>
+                            </a:rPr>
+                            <m:t>𝛽</m:t>
+                          </m:r>
+                        </m:e>
+                      </m:d>
+                      <m:r>
+                        <a:rPr lang="fr-FR" i="1" dirty="0" smtClean="0">
+                          <a:latin typeface="Cambria Math" panose="02040503050406030204" pitchFamily="18" charset="0"/>
+                        </a:rPr>
+                        <m:t>=</m:t>
+                      </m:r>
+                      <m:f>
+                        <m:fPr>
+                          <m:ctrlPr>
+                            <a:rPr lang="fr-FR" i="1" dirty="0" smtClean="0">
+                              <a:latin typeface="Cambria Math" panose="02040503050406030204" pitchFamily="18" charset="0"/>
+                            </a:rPr>
+                          </m:ctrlPr>
+                        </m:fPr>
+                        <m:num>
+                          <m:r>
+                            <a:rPr lang="fr-FR" i="1" dirty="0" smtClean="0">
+                              <a:latin typeface="Cambria Math" panose="02040503050406030204" pitchFamily="18" charset="0"/>
+                            </a:rPr>
+                            <m:t>1</m:t>
+                          </m:r>
+                        </m:num>
+                        <m:den>
+                          <m:r>
+                            <a:rPr lang="fr-FR" i="1" dirty="0" smtClean="0">
+                              <a:latin typeface="Cambria Math" panose="02040503050406030204" pitchFamily="18" charset="0"/>
+                            </a:rPr>
+                            <m:t>2</m:t>
+                          </m:r>
+                          <m:r>
+                            <a:rPr lang="fr-FR" i="1" dirty="0" smtClean="0">
+                              <a:latin typeface="Cambria Math" panose="02040503050406030204" pitchFamily="18" charset="0"/>
+                            </a:rPr>
+                            <m:t>𝑛</m:t>
+                          </m:r>
+                        </m:den>
+                      </m:f>
+                      <m:r>
+                        <a:rPr lang="fr-FR" i="1" dirty="0" smtClean="0">
+                          <a:latin typeface="Cambria Math" panose="02040503050406030204" pitchFamily="18" charset="0"/>
+                        </a:rPr>
+                        <m:t>​</m:t>
+                      </m:r>
+                      <m:sSup>
+                        <m:sSupPr>
+                          <m:ctrlPr>
+                            <a:rPr lang="fr-FR" i="1" dirty="0" smtClean="0">
+                              <a:latin typeface="Cambria Math" panose="02040503050406030204" pitchFamily="18" charset="0"/>
+                            </a:rPr>
+                          </m:ctrlPr>
+                        </m:sSupPr>
+                        <m:e>
+                          <m:d>
+                            <m:dPr>
+                              <m:ctrlPr>
+                                <a:rPr lang="fr-FR" i="1" dirty="0" smtClean="0">
+                                  <a:latin typeface="Cambria Math" panose="02040503050406030204" pitchFamily="18" charset="0"/>
+                                </a:rPr>
+                              </m:ctrlPr>
+                            </m:dPr>
+                            <m:e>
+                              <m:r>
+                                <a:rPr lang="fr-FR" i="1" dirty="0" smtClean="0">
+                                  <a:latin typeface="Cambria Math" panose="02040503050406030204" pitchFamily="18" charset="0"/>
+                                </a:rPr>
+                                <m:t>𝑦</m:t>
+                              </m:r>
+                              <m:r>
+                                <a:rPr lang="fr-FR" i="1" dirty="0" smtClean="0">
+                                  <a:latin typeface="Cambria Math" panose="02040503050406030204" pitchFamily="18" charset="0"/>
+                                </a:rPr>
+                                <m:t>−</m:t>
+                              </m:r>
+                              <m:r>
+                                <a:rPr lang="fr-FR" i="1" dirty="0" smtClean="0">
+                                  <a:latin typeface="Cambria Math" panose="02040503050406030204" pitchFamily="18" charset="0"/>
+                                </a:rPr>
+                                <m:t>𝑋</m:t>
+                              </m:r>
+                              <m:r>
+                                <a:rPr lang="fr-FR" i="1" dirty="0" smtClean="0">
+                                  <a:latin typeface="Cambria Math" panose="02040503050406030204" pitchFamily="18" charset="0"/>
+                                </a:rPr>
+                                <m:t>𝛽</m:t>
+                              </m:r>
+                            </m:e>
+                          </m:d>
+                        </m:e>
+                        <m:sup>
+                          <m:r>
+                            <a:rPr lang="fr-FR" i="1" dirty="0" smtClean="0">
+                              <a:latin typeface="Cambria Math" panose="02040503050406030204" pitchFamily="18" charset="0"/>
+                            </a:rPr>
+                            <m:t>𝑇</m:t>
+                          </m:r>
+                        </m:sup>
+                      </m:sSup>
+                      <m:d>
+                        <m:dPr>
+                          <m:ctrlPr>
+                            <a:rPr lang="fr-FR" i="1" dirty="0" smtClean="0">
+                              <a:latin typeface="Cambria Math" panose="02040503050406030204" pitchFamily="18" charset="0"/>
+                            </a:rPr>
+                          </m:ctrlPr>
+                        </m:dPr>
+                        <m:e>
+                          <m:r>
+                            <a:rPr lang="fr-FR" i="1" dirty="0" smtClean="0">
+                              <a:latin typeface="Cambria Math" panose="02040503050406030204" pitchFamily="18" charset="0"/>
+                            </a:rPr>
+                            <m:t>𝑦</m:t>
+                          </m:r>
+                          <m:r>
+                            <a:rPr lang="fr-FR" i="1" dirty="0" smtClean="0">
+                              <a:latin typeface="Cambria Math" panose="02040503050406030204" pitchFamily="18" charset="0"/>
+                            </a:rPr>
+                            <m:t>−</m:t>
+                          </m:r>
+                          <m:r>
+                            <a:rPr lang="fr-FR" i="1" dirty="0" smtClean="0">
+                              <a:latin typeface="Cambria Math" panose="02040503050406030204" pitchFamily="18" charset="0"/>
+                            </a:rPr>
+                            <m:t>𝑋</m:t>
+                          </m:r>
+                          <m:r>
+                            <a:rPr lang="fr-FR" i="1" dirty="0" smtClean="0">
+                              <a:latin typeface="Cambria Math" panose="02040503050406030204" pitchFamily="18" charset="0"/>
+                            </a:rPr>
+                            <m:t>𝛽</m:t>
+                          </m:r>
+                        </m:e>
+                      </m:d>
+                    </m:oMath>
+                  </m:oMathPara>
+                </a14:m>
+                <a:endParaRPr dirty="0"/>
+              </a:p>
+            </p:txBody>
+          </p:sp>
+        </mc:Choice>
+        <mc:Fallback>
+          <p:sp>
+            <p:nvSpPr>
+              <p:cNvPr id="8" name="TextBox 7">
+                <a:extLst>
+                  <a:ext uri="{FF2B5EF4-FFF2-40B4-BE49-F238E27FC236}">
+                    <a16:creationId xmlns:a16="http://schemas.microsoft.com/office/drawing/2014/main" id="{D4A754CF-C3FE-6DEE-57BA-C1A4427C4C64}"/>
+                  </a:ext>
+                </a:extLst>
+              </p:cNvPr>
+              <p:cNvSpPr txBox="1">
+                <a:spLocks noRot="1" noChangeAspect="1" noMove="1" noResize="1" noEditPoints="1" noAdjustHandles="1" noChangeArrowheads="1" noChangeShapeType="1" noTextEdit="1"/>
+              </p:cNvSpPr>
+              <p:nvPr/>
+            </p:nvSpPr>
+            <p:spPr>
+              <a:xfrm>
+                <a:off x="5060442" y="3223218"/>
+                <a:ext cx="6096762" cy="612732"/>
+              </a:xfrm>
+              <a:prstGeom prst="rect">
+                <a:avLst/>
+              </a:prstGeom>
+              <a:blipFill>
+                <a:blip r:embed="rId3"/>
+                <a:stretch>
+                  <a:fillRect/>
+                </a:stretch>
+              </a:blipFill>
+            </p:spPr>
+            <p:txBody>
+              <a:bodyPr/>
+              <a:lstStyle/>
+              <a:p>
+                <a:r>
+                  <a:rPr lang="en-US">
+                    <a:noFill/>
+                  </a:rPr>
+                  <a:t> </a:t>
+                </a:r>
+              </a:p>
+            </p:txBody>
+          </p:sp>
+        </mc:Fallback>
+      </mc:AlternateContent>
+    </p:spTree>
+    <p:extLst>
+      <p:ext uri="{BB962C8B-B14F-4D97-AF65-F5344CB8AC3E}">
+        <p14:creationId xmlns:p14="http://schemas.microsoft.com/office/powerpoint/2010/main" val="1375252611"/>
+      </p:ext>
+    </p:extLst>
+  </p:cSld>
+  <p:clrMapOvr>
+    <a:masterClrMapping/>
+  </p:clrMapOvr>
+  <p:timing>
+    <p:tnLst>
+      <p:par>
+        <p:cTn id="1" dur="indefinite" restart="never" nodeType="tmRoot">
+          <p:childTnLst>
+            <p:seq concurrent="1" nextAc="seek">
+              <p:cTn id="2" dur="indefinite" nodeType="mainSeq">
+                <p:childTnLst>
+                  <p:par>
+                    <p:cTn id="3" fill="hold">
+                      <p:stCondLst>
+                        <p:cond delay="indefinite"/>
+                      </p:stCondLst>
+                      <p:childTnLst>
+                        <p:par>
+                          <p:cTn id="4" fill="hold">
+                            <p:stCondLst>
+                              <p:cond delay="0"/>
+                            </p:stCondLst>
+                            <p:childTnLst>
+                              <p:par>
+                                <p:cTn id="5" presetID="1" presetClass="entr" presetSubtype="0" fill="hold" nodeType="clickEffect">
+                                  <p:stCondLst>
+                                    <p:cond delay="0"/>
+                                  </p:stCondLst>
+                                  <p:childTnLst>
+                                    <p:set>
+                                      <p:cBhvr>
+                                        <p:cTn id="6" dur="1" fill="hold">
+                                          <p:stCondLst>
+                                            <p:cond delay="0"/>
+                                          </p:stCondLst>
+                                        </p:cTn>
+                                        <p:tgtEl>
+                                          <p:spTgt spid="3">
+                                            <p:txEl>
+                                              <p:pRg st="0" end="0"/>
+                                            </p:txEl>
+                                          </p:spTgt>
+                                        </p:tgtEl>
+                                        <p:attrNameLst>
+                                          <p:attrName>style.visibility</p:attrName>
+                                        </p:attrNameLst>
+                                      </p:cBhvr>
+                                      <p:to>
+                                        <p:strVal val="visible"/>
+                                      </p:to>
+                                    </p:set>
+                                  </p:childTnLst>
+                                </p:cTn>
+                              </p:par>
+                            </p:childTnLst>
+                          </p:cTn>
+                        </p:par>
+                      </p:childTnLst>
+                    </p:cTn>
+                  </p:par>
+                  <p:par>
+                    <p:cTn id="7" fill="hold">
+                      <p:stCondLst>
+                        <p:cond delay="indefinite"/>
+                      </p:stCondLst>
+                      <p:childTnLst>
+                        <p:par>
+                          <p:cTn id="8" fill="hold">
+                            <p:stCondLst>
+                              <p:cond delay="0"/>
+                            </p:stCondLst>
+                            <p:childTnLst>
+                              <p:par>
+                                <p:cTn id="9" presetID="1" presetClass="entr" presetSubtype="0" fill="hold" nodeType="clickEffect">
+                                  <p:stCondLst>
+                                    <p:cond delay="0"/>
+                                  </p:stCondLst>
+                                  <p:childTnLst>
+                                    <p:set>
+                                      <p:cBhvr>
+                                        <p:cTn id="10" dur="1" fill="hold">
+                                          <p:stCondLst>
+                                            <p:cond delay="0"/>
+                                          </p:stCondLst>
+                                        </p:cTn>
+                                        <p:tgtEl>
+                                          <p:spTgt spid="3">
+                                            <p:txEl>
+                                              <p:pRg st="2" end="2"/>
+                                            </p:txEl>
+                                          </p:spTgt>
+                                        </p:tgtEl>
+                                        <p:attrNameLst>
+                                          <p:attrName>style.visibility</p:attrName>
+                                        </p:attrNameLst>
+                                      </p:cBhvr>
+                                      <p:to>
+                                        <p:strVal val="visible"/>
+                                      </p:to>
+                                    </p:set>
+                                  </p:childTnLst>
+                                </p:cTn>
+                              </p:par>
+                            </p:childTnLst>
+                          </p:cTn>
+                        </p:par>
+                      </p:childTnLst>
+                    </p:cTn>
+                  </p:par>
+                  <p:par>
+                    <p:cTn id="11" fill="hold">
+                      <p:stCondLst>
+                        <p:cond delay="indefinite"/>
+                      </p:stCondLst>
+                      <p:childTnLst>
+                        <p:par>
+                          <p:cTn id="12" fill="hold">
+                            <p:stCondLst>
+                              <p:cond delay="0"/>
+                            </p:stCondLst>
+                            <p:childTnLst>
+                              <p:par>
+                                <p:cTn id="13" presetID="1" presetClass="entr" presetSubtype="0" fill="hold" nodeType="clickEffect">
+                                  <p:stCondLst>
+                                    <p:cond delay="0"/>
+                                  </p:stCondLst>
+                                  <p:childTnLst>
+                                    <p:set>
+                                      <p:cBhvr>
+                                        <p:cTn id="14" dur="1" fill="hold">
+                                          <p:stCondLst>
+                                            <p:cond delay="0"/>
+                                          </p:stCondLst>
+                                        </p:cTn>
+                                        <p:tgtEl>
+                                          <p:spTgt spid="3">
+                                            <p:txEl>
+                                              <p:pRg st="3" end="3"/>
                                             </p:txEl>
                                           </p:spTgt>
                                         </p:tgtEl>
@@ -14389,7 +13096,7 @@
                                         <p:tgtEl>
                                           <p:spTgt spid="3">
                                             <p:txEl>
-                                              <p:pRg st="2" end="2"/>
+                                              <p:pRg st="4" end="4"/>
                                             </p:txEl>
                                           </p:spTgt>
                                         </p:tgtEl>
@@ -14436,9 +13143,773 @@
                                           </p:stCondLst>
                                         </p:cTn>
                                         <p:tgtEl>
-                                          <p:spTgt spid="4">
+                                          <p:spTgt spid="3">
                                             <p:txEl>
-                                              <p:pRg st="2" end="2"/>
+                                              <p:pRg st="5" end="5"/>
+                                            </p:txEl>
+                                          </p:spTgt>
+                                        </p:tgtEl>
+                                        <p:attrNameLst>
+                                          <p:attrName>style.visibility</p:attrName>
+                                        </p:attrNameLst>
+                                      </p:cBhvr>
+                                      <p:to>
+                                        <p:strVal val="visible"/>
+                                      </p:to>
+                                    </p:set>
+                                  </p:childTnLst>
+                                </p:cTn>
+                              </p:par>
+                            </p:childTnLst>
+                          </p:cTn>
+                        </p:par>
+                      </p:childTnLst>
+                    </p:cTn>
+                  </p:par>
+                  <p:par>
+                    <p:cTn id="23" fill="hold">
+                      <p:stCondLst>
+                        <p:cond delay="indefinite"/>
+                      </p:stCondLst>
+                      <p:childTnLst>
+                        <p:par>
+                          <p:cTn id="24" fill="hold">
+                            <p:stCondLst>
+                              <p:cond delay="0"/>
+                            </p:stCondLst>
+                            <p:childTnLst>
+                              <p:par>
+                                <p:cTn id="25" presetID="1" presetClass="entr" presetSubtype="0" fill="hold" grpId="0" nodeType="clickEffect">
+                                  <p:stCondLst>
+                                    <p:cond delay="0"/>
+                                  </p:stCondLst>
+                                  <p:childTnLst>
+                                    <p:set>
+                                      <p:cBhvr>
+                                        <p:cTn id="26" dur="1" fill="hold">
+                                          <p:stCondLst>
+                                            <p:cond delay="0"/>
+                                          </p:stCondLst>
+                                        </p:cTn>
+                                        <p:tgtEl>
+                                          <p:spTgt spid="8"/>
+                                        </p:tgtEl>
+                                        <p:attrNameLst>
+                                          <p:attrName>style.visibility</p:attrName>
+                                        </p:attrNameLst>
+                                      </p:cBhvr>
+                                      <p:to>
+                                        <p:strVal val="visible"/>
+                                      </p:to>
+                                    </p:set>
+                                  </p:childTnLst>
+                                </p:cTn>
+                              </p:par>
+                            </p:childTnLst>
+                          </p:cTn>
+                        </p:par>
+                      </p:childTnLst>
+                    </p:cTn>
+                  </p:par>
+                </p:childTnLst>
+              </p:cTn>
+              <p:prevCondLst>
+                <p:cond evt="onPrev" delay="0">
+                  <p:tgtEl>
+                    <p:sldTgt/>
+                  </p:tgtEl>
+                </p:cond>
+              </p:prevCondLst>
+              <p:nextCondLst>
+                <p:cond evt="onNext" delay="0">
+                  <p:tgtEl>
+                    <p:sldTgt/>
+                  </p:tgtEl>
+                </p:cond>
+              </p:nextCondLst>
+            </p:seq>
+          </p:childTnLst>
+        </p:cTn>
+      </p:par>
+    </p:tnLst>
+    <p:bldLst>
+      <p:bldP spid="8" grpId="0"/>
+    </p:bldLst>
+  </p:timing>
+</p:sld>
+</file>
+
+<file path=ppt/slides/slide9.xml><?xml version="1.0" encoding="utf-8"?>
+<p:sld xmlns:a="http://schemas.openxmlformats.org/drawingml/2006/main" xmlns:r="http://schemas.openxmlformats.org/officeDocument/2006/relationships" xmlns:p="http://schemas.openxmlformats.org/presentationml/2006/main">
+  <p:cSld>
+    <p:spTree>
+      <p:nvGrpSpPr>
+        <p:cNvPr id="1" name=""/>
+        <p:cNvGrpSpPr/>
+        <p:nvPr/>
+      </p:nvGrpSpPr>
+      <p:grpSpPr>
+        <a:xfrm>
+          <a:off x="0" y="0"/>
+          <a:ext cx="0" cy="0"/>
+          <a:chOff x="0" y="0"/>
+          <a:chExt cx="0" cy="0"/>
+        </a:xfrm>
+      </p:grpSpPr>
+      <p:sp>
+        <p:nvSpPr>
+          <p:cNvPr id="202" name="Method 1: Normal Equations"/>
+          <p:cNvSpPr txBox="1">
+            <a:spLocks noGrp="1"/>
+          </p:cNvSpPr>
+          <p:nvPr>
+            <p:ph type="title"/>
+          </p:nvPr>
+        </p:nvSpPr>
+        <p:spPr>
+          <a:prstGeom prst="rect">
+            <a:avLst/>
+          </a:prstGeom>
+        </p:spPr>
+        <p:txBody>
+          <a:bodyPr/>
+          <a:lstStyle/>
+          <a:p>
+            <a:r>
+              <a:rPr dirty="0"/>
+              <a:t>Method 1: Normal Equations </a:t>
+            </a:r>
+          </a:p>
+        </p:txBody>
+      </p:sp>
+      <mc:AlternateContent xmlns:mc="http://schemas.openxmlformats.org/markup-compatibility/2006" xmlns:a14="http://schemas.microsoft.com/office/drawing/2010/main">
+        <mc:Choice Requires="a14">
+          <p:sp>
+            <p:nvSpPr>
+              <p:cNvPr id="203" name="Matrix notation cost function:…"/>
+              <p:cNvSpPr txBox="1">
+                <a:spLocks noGrp="1"/>
+              </p:cNvSpPr>
+              <p:nvPr>
+                <p:ph type="body" idx="1"/>
+              </p:nvPr>
+            </p:nvSpPr>
+            <p:spPr>
+              <a:prstGeom prst="rect">
+                <a:avLst/>
+              </a:prstGeom>
+            </p:spPr>
+            <p:txBody>
+              <a:bodyPr>
+                <a:normAutofit/>
+              </a:bodyPr>
+              <a:lstStyle/>
+              <a:p>
+                <a:pPr marL="169658" indent="-169658" defTabSz="135123">
+                  <a:spcBef>
+                    <a:spcPts val="1758"/>
+                  </a:spcBef>
+                  <a:defRPr sz="2128"/>
+                </a:pPr>
+                <a:r>
+                  <a:rPr dirty="0"/>
+                  <a:t>Matrix notation cost function:</a:t>
+                </a:r>
+                <a:br>
+                  <a:rPr dirty="0"/>
+                </a:br>
+                <a14:m>
+                  <m:oMath xmlns:m="http://schemas.openxmlformats.org/officeDocument/2006/math">
+                    <m:r>
+                      <a:rPr sz="1828" i="1">
+                        <a:solidFill>
+                          <a:srgbClr val="52575F"/>
+                        </a:solidFill>
+                        <a:latin typeface="Cambria Math" panose="02040503050406030204" pitchFamily="18" charset="0"/>
+                      </a:rPr>
+                      <m:t>𝐽</m:t>
+                    </m:r>
+                    <m:r>
+                      <a:rPr sz="1828" i="1">
+                        <a:solidFill>
+                          <a:srgbClr val="52575F"/>
+                        </a:solidFill>
+                        <a:latin typeface="Cambria Math" panose="02040503050406030204" pitchFamily="18" charset="0"/>
+                      </a:rPr>
+                      <m:t>(</m:t>
+                    </m:r>
+                    <m:r>
+                      <a:rPr sz="1828" i="1">
+                        <a:solidFill>
+                          <a:srgbClr val="52575F"/>
+                        </a:solidFill>
+                        <a:latin typeface="Cambria Math" panose="02040503050406030204" pitchFamily="18" charset="0"/>
+                      </a:rPr>
+                      <m:t>𝛽</m:t>
+                    </m:r>
+                    <m:r>
+                      <a:rPr sz="1828" i="1">
+                        <a:solidFill>
+                          <a:srgbClr val="52575F"/>
+                        </a:solidFill>
+                        <a:latin typeface="Cambria Math" panose="02040503050406030204" pitchFamily="18" charset="0"/>
+                      </a:rPr>
+                      <m:t>)=</m:t>
+                    </m:r>
+                    <m:f>
+                      <m:fPr>
+                        <m:ctrlPr>
+                          <a:rPr sz="1828" i="1">
+                            <a:solidFill>
+                              <a:srgbClr val="52575F"/>
+                            </a:solidFill>
+                            <a:latin typeface="Cambria Math" panose="02040503050406030204" pitchFamily="18" charset="0"/>
+                          </a:rPr>
+                        </m:ctrlPr>
+                      </m:fPr>
+                      <m:num>
+                        <m:r>
+                          <a:rPr sz="1828" i="1">
+                            <a:solidFill>
+                              <a:srgbClr val="52575F"/>
+                            </a:solidFill>
+                            <a:latin typeface="Cambria Math" panose="02040503050406030204" pitchFamily="18" charset="0"/>
+                          </a:rPr>
+                          <m:t>1</m:t>
+                        </m:r>
+                      </m:num>
+                      <m:den>
+                        <m:r>
+                          <a:rPr sz="1828" i="1">
+                            <a:solidFill>
+                              <a:srgbClr val="52575F"/>
+                            </a:solidFill>
+                            <a:latin typeface="Cambria Math" panose="02040503050406030204" pitchFamily="18" charset="0"/>
+                          </a:rPr>
+                          <m:t>2</m:t>
+                        </m:r>
+                        <m:r>
+                          <a:rPr sz="1828" i="1">
+                            <a:solidFill>
+                              <a:srgbClr val="52575F"/>
+                            </a:solidFill>
+                            <a:latin typeface="Cambria Math" panose="02040503050406030204" pitchFamily="18" charset="0"/>
+                          </a:rPr>
+                          <m:t>𝑛</m:t>
+                        </m:r>
+                      </m:den>
+                    </m:f>
+                    <m:r>
+                      <a:rPr sz="1828" i="1">
+                        <a:solidFill>
+                          <a:srgbClr val="52575F"/>
+                        </a:solidFill>
+                        <a:latin typeface="Cambria Math" panose="02040503050406030204" pitchFamily="18" charset="0"/>
+                      </a:rPr>
+                      <m:t>(</m:t>
+                    </m:r>
+                    <m:r>
+                      <a:rPr sz="1828" i="1">
+                        <a:solidFill>
+                          <a:srgbClr val="52575F"/>
+                        </a:solidFill>
+                        <a:latin typeface="Cambria Math" panose="02040503050406030204" pitchFamily="18" charset="0"/>
+                      </a:rPr>
+                      <m:t>𝑦</m:t>
+                    </m:r>
+                    <m:r>
+                      <a:rPr sz="1828" i="1">
+                        <a:solidFill>
+                          <a:srgbClr val="52575F"/>
+                        </a:solidFill>
+                        <a:latin typeface="Cambria Math" panose="02040503050406030204" pitchFamily="18" charset="0"/>
+                      </a:rPr>
+                      <m:t>−</m:t>
+                    </m:r>
+                    <m:r>
+                      <a:rPr sz="1828" i="1">
+                        <a:solidFill>
+                          <a:srgbClr val="52575F"/>
+                        </a:solidFill>
+                        <a:latin typeface="Cambria Math" panose="02040503050406030204" pitchFamily="18" charset="0"/>
+                      </a:rPr>
+                      <m:t>𝑋</m:t>
+                    </m:r>
+                    <m:r>
+                      <a:rPr sz="1828" i="1">
+                        <a:solidFill>
+                          <a:srgbClr val="52575F"/>
+                        </a:solidFill>
+                        <a:latin typeface="Cambria Math" panose="02040503050406030204" pitchFamily="18" charset="0"/>
+                      </a:rPr>
+                      <m:t>𝛽</m:t>
+                    </m:r>
+                    <m:sSup>
+                      <m:sSupPr>
+                        <m:ctrlPr>
+                          <a:rPr sz="1828" i="1">
+                            <a:solidFill>
+                              <a:srgbClr val="52575F"/>
+                            </a:solidFill>
+                            <a:latin typeface="Cambria Math" panose="02040503050406030204" pitchFamily="18" charset="0"/>
+                          </a:rPr>
+                        </m:ctrlPr>
+                      </m:sSupPr>
+                      <m:e>
+                        <m:r>
+                          <a:rPr sz="1828" i="1">
+                            <a:solidFill>
+                              <a:srgbClr val="52575F"/>
+                            </a:solidFill>
+                            <a:latin typeface="Cambria Math" panose="02040503050406030204" pitchFamily="18" charset="0"/>
+                          </a:rPr>
+                          <m:t>)</m:t>
+                        </m:r>
+                      </m:e>
+                      <m:sup>
+                        <m:r>
+                          <a:rPr sz="1828" i="1">
+                            <a:solidFill>
+                              <a:srgbClr val="52575F"/>
+                            </a:solidFill>
+                            <a:latin typeface="Cambria Math" panose="02040503050406030204" pitchFamily="18" charset="0"/>
+                          </a:rPr>
+                          <m:t>𝑇</m:t>
+                        </m:r>
+                      </m:sup>
+                    </m:sSup>
+                    <m:r>
+                      <a:rPr sz="1828" i="1">
+                        <a:solidFill>
+                          <a:srgbClr val="52575F"/>
+                        </a:solidFill>
+                        <a:latin typeface="Cambria Math" panose="02040503050406030204" pitchFamily="18" charset="0"/>
+                      </a:rPr>
+                      <m:t>(</m:t>
+                    </m:r>
+                    <m:r>
+                      <a:rPr sz="1828" i="1">
+                        <a:solidFill>
+                          <a:srgbClr val="52575F"/>
+                        </a:solidFill>
+                        <a:latin typeface="Cambria Math" panose="02040503050406030204" pitchFamily="18" charset="0"/>
+                      </a:rPr>
+                      <m:t>𝑦</m:t>
+                    </m:r>
+                    <m:r>
+                      <a:rPr sz="1828" i="1">
+                        <a:solidFill>
+                          <a:srgbClr val="52575F"/>
+                        </a:solidFill>
+                        <a:latin typeface="Cambria Math" panose="02040503050406030204" pitchFamily="18" charset="0"/>
+                      </a:rPr>
+                      <m:t>−</m:t>
+                    </m:r>
+                    <m:r>
+                      <a:rPr sz="1828" i="1">
+                        <a:solidFill>
+                          <a:srgbClr val="52575F"/>
+                        </a:solidFill>
+                        <a:latin typeface="Cambria Math" panose="02040503050406030204" pitchFamily="18" charset="0"/>
+                      </a:rPr>
+                      <m:t>𝑋</m:t>
+                    </m:r>
+                    <m:r>
+                      <a:rPr sz="1828" i="1">
+                        <a:solidFill>
+                          <a:srgbClr val="52575F"/>
+                        </a:solidFill>
+                        <a:latin typeface="Cambria Math" panose="02040503050406030204" pitchFamily="18" charset="0"/>
+                      </a:rPr>
+                      <m:t>𝛽</m:t>
+                    </m:r>
+                    <m:r>
+                      <a:rPr sz="1828" i="1">
+                        <a:solidFill>
+                          <a:srgbClr val="52575F"/>
+                        </a:solidFill>
+                        <a:latin typeface="Cambria Math" panose="02040503050406030204" pitchFamily="18" charset="0"/>
+                      </a:rPr>
+                      <m:t>)</m:t>
+                    </m:r>
+                  </m:oMath>
+                </a14:m>
+                <a:br>
+                  <a:rPr dirty="0"/>
+                </a:br>
+                <a:endParaRPr dirty="0"/>
+              </a:p>
+              <a:p>
+                <a:pPr marL="169658" indent="-169658" defTabSz="135123">
+                  <a:spcBef>
+                    <a:spcPts val="1758"/>
+                  </a:spcBef>
+                  <a:defRPr sz="2128"/>
+                </a:pPr>
+                <a:r>
+                  <a:rPr lang="en-US" dirty="0"/>
+                  <a:t>Optimal</a:t>
+                </a:r>
+                <a:r>
+                  <a:rPr dirty="0"/>
+                  <a:t> </a:t>
+                </a:r>
+                <a14:m>
+                  <m:oMath xmlns:m="http://schemas.openxmlformats.org/officeDocument/2006/math">
+                    <m:acc>
+                      <m:accPr>
+                        <m:chr m:val="̂"/>
+                        <m:ctrlPr>
+                          <a:rPr lang="ar-AE" sz="1828" i="1">
+                            <a:solidFill>
+                              <a:srgbClr val="52575F"/>
+                            </a:solidFill>
+                            <a:latin typeface="Cambria Math" panose="02040503050406030204" pitchFamily="18" charset="0"/>
+                          </a:rPr>
+                        </m:ctrlPr>
+                      </m:accPr>
+                      <m:e>
+                        <m:r>
+                          <a:rPr lang="ar-AE" sz="1828" i="1">
+                            <a:solidFill>
+                              <a:srgbClr val="52575F"/>
+                            </a:solidFill>
+                            <a:latin typeface="Cambria Math" panose="02040503050406030204" pitchFamily="18" charset="0"/>
+                          </a:rPr>
+                          <m:t>𝛽</m:t>
+                        </m:r>
+                      </m:e>
+                    </m:acc>
+                  </m:oMath>
+                </a14:m>
+                <a:r>
+                  <a:rPr dirty="0"/>
+                  <a:t>:</a:t>
+                </a:r>
+                <a:br>
+                  <a:rPr dirty="0"/>
+                </a:br>
+                <a14:m>
+                  <m:oMath xmlns:m="http://schemas.openxmlformats.org/officeDocument/2006/math">
+                    <m:acc>
+                      <m:accPr>
+                        <m:chr m:val="̂"/>
+                        <m:ctrlPr>
+                          <a:rPr lang="ar-AE" sz="1828" i="1">
+                            <a:solidFill>
+                              <a:srgbClr val="52575F"/>
+                            </a:solidFill>
+                            <a:latin typeface="Cambria Math" panose="02040503050406030204" pitchFamily="18" charset="0"/>
+                          </a:rPr>
+                        </m:ctrlPr>
+                      </m:accPr>
+                      <m:e>
+                        <m:r>
+                          <a:rPr lang="ar-AE" sz="1828" i="1">
+                            <a:solidFill>
+                              <a:srgbClr val="52575F"/>
+                            </a:solidFill>
+                            <a:latin typeface="Cambria Math" panose="02040503050406030204" pitchFamily="18" charset="0"/>
+                          </a:rPr>
+                          <m:t>𝛽</m:t>
+                        </m:r>
+                      </m:e>
+                    </m:acc>
+                    <m:r>
+                      <a:rPr lang="ar-AE" sz="1828" i="1">
+                        <a:solidFill>
+                          <a:srgbClr val="52575F"/>
+                        </a:solidFill>
+                        <a:latin typeface="Cambria Math" panose="02040503050406030204" pitchFamily="18" charset="0"/>
+                      </a:rPr>
+                      <m:t>=(</m:t>
+                    </m:r>
+                    <m:sSup>
+                      <m:sSupPr>
+                        <m:ctrlPr>
+                          <a:rPr lang="ar-AE" sz="1828" i="1">
+                            <a:solidFill>
+                              <a:srgbClr val="52575F"/>
+                            </a:solidFill>
+                            <a:latin typeface="Cambria Math" panose="02040503050406030204" pitchFamily="18" charset="0"/>
+                          </a:rPr>
+                        </m:ctrlPr>
+                      </m:sSupPr>
+                      <m:e>
+                        <m:r>
+                          <a:rPr lang="ar-AE" sz="1828" i="1">
+                            <a:solidFill>
+                              <a:srgbClr val="52575F"/>
+                            </a:solidFill>
+                            <a:latin typeface="Cambria Math" panose="02040503050406030204" pitchFamily="18" charset="0"/>
+                          </a:rPr>
+                          <m:t>𝑋</m:t>
+                        </m:r>
+                      </m:e>
+                      <m:sup>
+                        <m:r>
+                          <a:rPr lang="ar-AE" sz="1828" i="1">
+                            <a:solidFill>
+                              <a:srgbClr val="52575F"/>
+                            </a:solidFill>
+                            <a:latin typeface="Cambria Math" panose="02040503050406030204" pitchFamily="18" charset="0"/>
+                          </a:rPr>
+                          <m:t>𝑇</m:t>
+                        </m:r>
+                      </m:sup>
+                    </m:sSup>
+                    <m:r>
+                      <a:rPr lang="ar-AE" sz="1828" i="1">
+                        <a:solidFill>
+                          <a:srgbClr val="52575F"/>
+                        </a:solidFill>
+                        <a:latin typeface="Cambria Math" panose="02040503050406030204" pitchFamily="18" charset="0"/>
+                      </a:rPr>
+                      <m:t>𝑋</m:t>
+                    </m:r>
+                    <m:sSup>
+                      <m:sSupPr>
+                        <m:ctrlPr>
+                          <a:rPr lang="ar-AE" sz="1828" i="1">
+                            <a:solidFill>
+                              <a:srgbClr val="52575F"/>
+                            </a:solidFill>
+                            <a:latin typeface="Cambria Math" panose="02040503050406030204" pitchFamily="18" charset="0"/>
+                          </a:rPr>
+                        </m:ctrlPr>
+                      </m:sSupPr>
+                      <m:e>
+                        <m:r>
+                          <a:rPr lang="ar-AE" sz="1828" i="1">
+                            <a:solidFill>
+                              <a:srgbClr val="52575F"/>
+                            </a:solidFill>
+                            <a:latin typeface="Cambria Math" panose="02040503050406030204" pitchFamily="18" charset="0"/>
+                          </a:rPr>
+                          <m:t>)</m:t>
+                        </m:r>
+                      </m:e>
+                      <m:sup>
+                        <m:r>
+                          <a:rPr lang="ar-AE" sz="1828" i="1">
+                            <a:solidFill>
+                              <a:srgbClr val="52575F"/>
+                            </a:solidFill>
+                            <a:latin typeface="Cambria Math" panose="02040503050406030204" pitchFamily="18" charset="0"/>
+                          </a:rPr>
+                          <m:t>−1</m:t>
+                        </m:r>
+                      </m:sup>
+                    </m:sSup>
+                    <m:sSup>
+                      <m:sSupPr>
+                        <m:ctrlPr>
+                          <a:rPr lang="ar-AE" sz="1828" i="1">
+                            <a:solidFill>
+                              <a:srgbClr val="52575F"/>
+                            </a:solidFill>
+                            <a:latin typeface="Cambria Math" panose="02040503050406030204" pitchFamily="18" charset="0"/>
+                          </a:rPr>
+                        </m:ctrlPr>
+                      </m:sSupPr>
+                      <m:e>
+                        <m:r>
+                          <a:rPr lang="ar-AE" sz="1828" i="1">
+                            <a:solidFill>
+                              <a:srgbClr val="52575F"/>
+                            </a:solidFill>
+                            <a:latin typeface="Cambria Math" panose="02040503050406030204" pitchFamily="18" charset="0"/>
+                          </a:rPr>
+                          <m:t>𝑋</m:t>
+                        </m:r>
+                      </m:e>
+                      <m:sup>
+                        <m:r>
+                          <a:rPr lang="ar-AE" sz="1828" i="1">
+                            <a:solidFill>
+                              <a:srgbClr val="52575F"/>
+                            </a:solidFill>
+                            <a:latin typeface="Cambria Math" panose="02040503050406030204" pitchFamily="18" charset="0"/>
+                          </a:rPr>
+                          <m:t>𝑇</m:t>
+                        </m:r>
+                      </m:sup>
+                    </m:sSup>
+                    <m:r>
+                      <a:rPr lang="ar-AE" sz="1828" i="1">
+                        <a:solidFill>
+                          <a:srgbClr val="52575F"/>
+                        </a:solidFill>
+                        <a:latin typeface="Cambria Math" panose="02040503050406030204" pitchFamily="18" charset="0"/>
+                      </a:rPr>
+                      <m:t>𝑦</m:t>
+                    </m:r>
+                  </m:oMath>
+                </a14:m>
+                <a:endParaRPr sz="1969" dirty="0">
+                  <a:solidFill>
+                    <a:srgbClr val="53585F"/>
+                  </a:solidFill>
+                </a:endParaRPr>
+              </a:p>
+            </p:txBody>
+          </p:sp>
+        </mc:Choice>
+        <mc:Fallback xmlns="">
+          <p:sp>
+            <p:nvSpPr>
+              <p:cNvPr id="203" name="Matrix notation cost function:…"/>
+              <p:cNvSpPr txBox="1">
+                <a:spLocks noGrp="1" noRot="1" noChangeAspect="1" noMove="1" noResize="1" noEditPoints="1" noAdjustHandles="1" noChangeArrowheads="1" noChangeShapeType="1" noTextEdit="1"/>
+              </p:cNvSpPr>
+              <p:nvPr>
+                <p:ph type="body" idx="1"/>
+              </p:nvPr>
+            </p:nvSpPr>
+            <p:spPr>
+              <a:prstGeom prst="rect">
+                <a:avLst/>
+              </a:prstGeom>
+              <a:blipFill>
+                <a:blip r:embed="rId2"/>
+                <a:stretch>
+                  <a:fillRect l="-570" t="-979"/>
+                </a:stretch>
+              </a:blipFill>
+            </p:spPr>
+            <p:txBody>
+              <a:bodyPr/>
+              <a:lstStyle/>
+              <a:p>
+                <a:r>
+                  <a:rPr lang="en-US">
+                    <a:noFill/>
+                  </a:rPr>
+                  <a:t> </a:t>
+                </a:r>
+              </a:p>
+            </p:txBody>
+          </p:sp>
+        </mc:Fallback>
+      </mc:AlternateContent>
+    </p:spTree>
+  </p:cSld>
+  <p:clrMapOvr>
+    <a:masterClrMapping/>
+  </p:clrMapOvr>
+  <p:transition spd="med"/>
+  <p:timing>
+    <p:tnLst>
+      <p:par>
+        <p:cTn id="1" dur="indefinite" restart="never" fill="hold" nodeType="tmRoot">
+          <p:childTnLst>
+            <p:seq concurrent="1" prevAc="none" nextAc="seek">
+              <p:cTn id="2" dur="indefinite" fill="hold" nodeType="mainSeq">
+                <p:childTnLst>
+                  <p:par>
+                    <p:cTn id="3" fill="hold">
+                      <p:stCondLst>
+                        <p:cond delay="indefinite"/>
+                      </p:stCondLst>
+                      <p:childTnLst>
+                        <p:par>
+                          <p:cTn id="4" fill="hold">
+                            <p:stCondLst>
+                              <p:cond delay="0"/>
+                            </p:stCondLst>
+                            <p:childTnLst>
+                              <p:par>
+                                <p:cTn id="5" presetID="1" presetClass="entr" presetSubtype="0" fill="hold" grpId="0" nodeType="clickEffect">
+                                  <p:stCondLst>
+                                    <p:cond delay="0"/>
+                                  </p:stCondLst>
+                                  <p:iterate>
+                                    <p:tmAbs val="0"/>
+                                  </p:iterate>
+                                  <p:childTnLst>
+                                    <p:set>
+                                      <p:cBhvr>
+                                        <p:cTn id="6" fill="hold"/>
+                                        <p:tgtEl>
+                                          <p:spTgt spid="203">
+                                            <p:bg/>
+                                          </p:spTgt>
+                                        </p:tgtEl>
+                                        <p:attrNameLst>
+                                          <p:attrName>style.visibility</p:attrName>
+                                        </p:attrNameLst>
+                                      </p:cBhvr>
+                                      <p:to>
+                                        <p:strVal val="visible"/>
+                                      </p:to>
+                                    </p:set>
+                                  </p:childTnLst>
+                                </p:cTn>
+                              </p:par>
+                              <p:par>
+                                <p:cTn id="7" presetID="1" presetClass="entr" presetSubtype="0" fill="hold" grpId="0" nodeType="withEffect">
+                                  <p:stCondLst>
+                                    <p:cond delay="0"/>
+                                  </p:stCondLst>
+                                  <p:iterate>
+                                    <p:tmAbs val="0"/>
+                                  </p:iterate>
+                                  <p:childTnLst>
+                                    <p:set>
+                                      <p:cBhvr>
+                                        <p:cTn id="8" fill="hold"/>
+                                        <p:tgtEl>
+                                          <p:spTgt spid="203">
+                                            <p:txEl>
+                                              <p:pRg st="0" end="0"/>
+                                            </p:txEl>
+                                          </p:spTgt>
+                                        </p:tgtEl>
+                                        <p:attrNameLst>
+                                          <p:attrName>style.visibility</p:attrName>
+                                        </p:attrNameLst>
+                                      </p:cBhvr>
+                                      <p:to>
+                                        <p:strVal val="visible"/>
+                                      </p:to>
+                                    </p:set>
+                                  </p:childTnLst>
+                                </p:cTn>
+                              </p:par>
+                            </p:childTnLst>
+                          </p:cTn>
+                        </p:par>
+                      </p:childTnLst>
+                    </p:cTn>
+                  </p:par>
+                  <p:par>
+                    <p:cTn id="9" fill="hold">
+                      <p:stCondLst>
+                        <p:cond delay="indefinite"/>
+                      </p:stCondLst>
+                      <p:childTnLst>
+                        <p:par>
+                          <p:cTn id="10" fill="hold">
+                            <p:stCondLst>
+                              <p:cond delay="0"/>
+                            </p:stCondLst>
+                            <p:childTnLst>
+                              <p:par>
+                                <p:cTn id="11" presetID="1" presetClass="entr" presetSubtype="0" fill="hold" grpId="0" nodeType="clickEffect">
+                                  <p:stCondLst>
+                                    <p:cond delay="0"/>
+                                  </p:stCondLst>
+                                  <p:iterate>
+                                    <p:tmAbs val="0"/>
+                                  </p:iterate>
+                                  <p:childTnLst>
+                                    <p:set>
+                                      <p:cBhvr>
+                                        <p:cTn id="12" fill="hold"/>
+                                        <p:tgtEl>
+                                          <p:spTgt spid="203">
+                                            <p:txEl>
+                                              <p:pRg st="1" end="1"/>
                                             </p:txEl>
                                           </p:spTgt>
                                         </p:tgtEl>
@@ -14480,46 +13951,11 @@
         </p:cTn>
       </p:par>
     </p:tnLst>
+    <p:bldLst>
+      <p:bldP spid="203" grpId="0" build="p" bldLvl="5" animBg="1" advAuto="0"/>
+    </p:bldLst>
   </p:timing>
 </p:sld>
-</file>
-
-<file path=ppt/tags/tag1.xml><?xml version="1.0" encoding="utf-8"?>
-<p:tagLst xmlns:a="http://schemas.openxmlformats.org/drawingml/2006/main" xmlns:r="http://schemas.openxmlformats.org/officeDocument/2006/relationships" xmlns:p="http://schemas.openxmlformats.org/presentationml/2006/main">
-  <p:tag name="OUTPUTDPI" val="1200"/>
-  <p:tag name="ORIGINALHEIGHT" val="1306.337"/>
-  <p:tag name="ORIGINALWIDTH" val="3850.769"/>
-  <p:tag name="LATEXADDIN" val="\documentclass{article}\pagestyle{empty}&#10;\usepackage[top=1in, bottom=1in, left=2in, right=2in]{geometry}&#10;\usepackage{amsmath,amssymb,bm}&#10;\newcommand{\bu}{{\bm u}}&#10;\newcommand{\bv}{{\bm v}}&#10;\newcommand{\bw}{{\bm w}}&#10;\newcommand{\bx}{{\bm x}}&#10;\newcommand{\bmu}{{\bm \mu}}&#10;\newcommand{\btheta}{{\bm \theta}}&#10;\newcommand{\bX}{{\bm X}}&#10;\newcommand{\bzero}{{\bm 0}}&#10;\newcommand{\R}{\mathbb{R}}&#10;\newcommand{\argmax}{\operatorname{argmax}}&#10;\begin{document}&#10;\begin{itemize}&#10;\item Just like classification, there is a regression function $f^*$ that achieves the minimum value $R^*$ of the mean squared error&#10;\item {\bf Theorem:} The function&#10;$$&#10;f^*(\bx) := E_{Y|\bX}[Y|\bX = \bx]&#10;$$&#10;minimizes the mean squared error.&#10;\item This function is called the {\em conditional mean} predictor.&#10;\end{itemize}&#10;\end{document}&#10;"/>
-  <p:tag name="IGUANATEXSIZE" val="20"/>
-  <p:tag name="IGUANATEXCURSOR" val="775"/>
-  <p:tag name="TRANSPARENCY" val="False"/>
-  <p:tag name="FILENAME" val=""/>
-  <p:tag name="LATEXENGINEID" val="0"/>
-  <p:tag name="TEMPFOLDER" val="c:\temp\"/>
-  <p:tag name="LATEXFORMHEIGHT" val="640.5"/>
-  <p:tag name="LATEXFORMWIDTH" val="525"/>
-  <p:tag name="LATEXFORMWRAP" val="True"/>
-  <p:tag name="BITMAPVECTOR" val="0"/>
-</p:tagLst>
-</file>
-
-<file path=ppt/tags/tag2.xml><?xml version="1.0" encoding="utf-8"?>
-<p:tagLst xmlns:a="http://schemas.openxmlformats.org/drawingml/2006/main" xmlns:r="http://schemas.openxmlformats.org/officeDocument/2006/relationships" xmlns:p="http://schemas.openxmlformats.org/presentationml/2006/main">
-  <p:tag name="OUTPUTDPI" val="1200"/>
-  <p:tag name="ORIGINALHEIGHT" val="1730.034"/>
-  <p:tag name="ORIGINALWIDTH" val="4042.745"/>
-  <p:tag name="LATEXADDIN" val="\documentclass{article}\pagestyle{empty}&#10;\usepackage[top=1in, bottom=1in, left=2in, right=2in]{geometry}&#10;\usepackage{amsmath,amssymb,bm}&#10;\newcommand{\bu}{{\bm u}}&#10;\newcommand{\bv}{{\bm v}}&#10;\newcommand{\bw}{{\bm w}}&#10;\newcommand{\bx}{{\bm x}}&#10;\newcommand{\bmu}{{\bm \mu}}&#10;\newcommand{\btheta}{{\bm \theta}}&#10;\newcommand{\bX}{{\bm X}}&#10;\newcommand{\bzero}{{\bm 0}}&#10;\newcommand{\R}{\mathbb{R}}&#10;\newcommand{\argmax}{\operatorname{argmax}}&#10;\begin{document}&#10;\noindent {\em Proof of Theorem:} Let $f$ be any regression function.&#10;\begin{align*}&#10;R(f) &amp;= E_{\bX Y}[(f(\bX) - Y)^2]\\&#10;&amp;= E_{\bX} E_{Y|\bX} [(f(\bX)-Y)^2 | \bX] \\&#10;&amp;= E_{\bX} E_{Y|\bX} [(f(\bX)-E[Y|\bX] + E[Y|\bX] - Y)^2|\bX] \\&#10;&amp;= E_{\bX} E_{Y|\bX} [(f(\bX)-E[Y|\bX])^2] + (E[Y|\bX] - Y)^2 \\&#10;&amp; \qquad - 2(f(\bX)-E[Y|\bX])(E[Y|\bX] - Y)|\bX]&#10;\end{align*}&#10;The second term is independent of $f$, and the third term is zero. The first term can be made to equal 0 by taking $f$ to be the conditional mean, so this minimizes the MSE.&#10;\end{document}&#10;"/>
-  <p:tag name="IGUANATEXSIZE" val="20"/>
-  <p:tag name="IGUANATEXCURSOR" val="980"/>
-  <p:tag name="TRANSPARENCY" val="False"/>
-  <p:tag name="FILENAME" val=""/>
-  <p:tag name="LATEXENGINEID" val="0"/>
-  <p:tag name="TEMPFOLDER" val="c:\temp\"/>
-  <p:tag name="LATEXFORMHEIGHT" val="640.5"/>
-  <p:tag name="LATEXFORMWIDTH" val="525"/>
-  <p:tag name="LATEXFORMWRAP" val="True"/>
-  <p:tag name="BITMAPVECTOR" val="0"/>
-</p:tagLst>
 </file>
 
 <file path=ppt/theme/theme1.xml><?xml version="1.0" encoding="utf-8"?>
